--- a/slides/mid_sem_presentation.pptx
+++ b/slides/mid_sem_presentation.pptx
@@ -14,6 +14,7 @@
     <p:sldId id="262" r:id="rId13"/>
     <p:sldId id="263" r:id="rId14"/>
     <p:sldId id="264" r:id="rId15"/>
+    <p:sldId id="265" r:id="rId16"/>
   </p:sldIdLst>
   <p:sldSz cx="9144000" cy="6858000" type="screen4x3"/>
   <p:notesSz cx="6858000" cy="9144000"/>
@@ -3196,6 +3197,117 @@
 </p:sld>
 </file>
 
+<file path=ppt/slides/slide10.xml><?xml version="1.0" encoding="utf-8"?>
+<p:sld xmlns:a="http://schemas.openxmlformats.org/drawingml/2006/main" xmlns:p="http://schemas.openxmlformats.org/presentationml/2006/main" xmlns:r="http://schemas.openxmlformats.org/officeDocument/2006/relationships">
+  <p:cSld>
+    <p:spTree>
+      <p:nvGrpSpPr>
+        <p:cNvPr id="1" name=""/>
+        <p:cNvGrpSpPr/>
+        <p:nvPr/>
+      </p:nvGrpSpPr>
+      <p:grpSpPr/>
+      <p:sp>
+        <p:nvSpPr>
+          <p:cNvPr id="2" name="Title 1"/>
+          <p:cNvSpPr>
+            <a:spLocks noGrp="1"/>
+          </p:cNvSpPr>
+          <p:nvPr>
+            <p:ph type="title"/>
+          </p:nvPr>
+        </p:nvSpPr>
+        <p:spPr/>
+        <p:txBody>
+          <a:bodyPr/>
+          <a:lstStyle/>
+          <a:p>
+            <a:r>
+              <a:t>Beyond the Original Roadmap</a:t>
+            </a:r>
+          </a:p>
+        </p:txBody>
+      </p:sp>
+      <p:sp>
+        <p:nvSpPr>
+          <p:cNvPr id="3" name="Content Placeholder 2"/>
+          <p:cNvSpPr>
+            <a:spLocks noGrp="1"/>
+          </p:cNvSpPr>
+          <p:nvPr>
+            <p:ph idx="1"/>
+          </p:nvPr>
+        </p:nvSpPr>
+        <p:spPr/>
+        <p:txBody>
+          <a:bodyPr wrap="square"/>
+          <a:lstStyle/>
+          <a:p>
+            <a:pPr/>
+            <a:r>
+              <a:rPr sz="1400"/>
+              <a:t>The end-sem plan (standard CP, Mondrian CP, exchangeability stress test, full comparison) is done - the project then went substantially further:</a:t>
+            </a:r>
+          </a:p>
+          <a:p>
+            <a:pPr lvl="1"/>
+            <a:r>
+              <a:rPr sz="1400"/>
+              <a:t>Conformalized Quantile Regression (CQR) and Mondrian-CQR, a stronger width-adaptive baseline</a:t>
+            </a:r>
+          </a:p>
+          <a:p>
+            <a:pPr lvl="1"/>
+            <a:r>
+              <a:rPr sz="1400"/>
+              <a:t>Conformal Risk Control (CRC) and Adaptive Conformal Inference (ACI) - ACI recovers out-of-range coverage from ~58% (static CP) to 84-89% under a real, time-ordered demand-surge stream</a:t>
+            </a:r>
+          </a:p>
+          <a:p>
+            <a:pPr lvl="1"/>
+            <a:r>
+              <a:rPr sz="1400"/>
+              <a:t>Likelihood-ratio weighted CP under covariate shift, with an honest infinite-width caveat outside calibration support</a:t>
+            </a:r>
+          </a:p>
+          <a:p>
+            <a:pPr lvl="1"/>
+            <a:r>
+              <a:rPr sz="1400"/>
+              <a:t>5-architecture surrogate benchmark: gradient boosting, MLP, Random Forest, XGBoost, LightGBM</a:t>
+            </a:r>
+          </a:p>
+          <a:p>
+            <a:pPr lvl="1"/>
+            <a:r>
+              <a:rPr sz="1400"/>
+              <a:t>Independent replication at a second real hospital department (Dept. B) - same coverage-gap finding, different volume and acuity mix</a:t>
+            </a:r>
+          </a:p>
+          <a:p>
+            <a:pPr lvl="1"/>
+            <a:r>
+              <a:rPr sz="1400"/>
+              <a:t>An interactive ops dashboard and a CP-constrained capacity-planning optimization, plus an FDA AI/ML SaMD regulatory framing</a:t>
+            </a:r>
+          </a:p>
+          <a:p>
+            <a:pPr/>
+            <a:r>
+              <a:rPr sz="1400"/>
+              <a:t>All of it written up in a single 200+ page book-format report, not just this deck.</a:t>
+            </a:r>
+          </a:p>
+        </p:txBody>
+      </p:sp>
+    </p:spTree>
+  </p:cSld>
+  <p:clrMapOvr>
+    <a:masterClrMapping/>
+  </p:clrMapOvr>
+</p:sld>
+</file>
+
 <file path=ppt/slides/slide2.xml><?xml version="1.0" encoding="utf-8"?>
 <p:sld xmlns:a="http://schemas.openxmlformats.org/drawingml/2006/main" xmlns:p="http://schemas.openxmlformats.org/presentationml/2006/main" xmlns:r="http://schemas.openxmlformats.org/officeDocument/2006/relationships">
   <p:cSld>
@@ -4008,7 +4120,8 @@
           <a:lstStyle/>
           <a:p>
             <a:r>
-              <a:t>Work Completed (~50%)</a:t>
+              <a:rPr sz="3000"/>
+              <a:t>Phase 1 Results: DES, Surrogate, GP Baseline</a:t>
             </a:r>
           </a:p>
         </p:txBody>
@@ -4865,36 +4978,57 @@
           <a:p>
             <a:pPr/>
             <a:r>
-              <a:rPr sz="1700"/>
-              <a:t>Still in progress - counts below to be filled in before the actual presentation.</a:t>
+              <a:rPr sz="1500"/>
+              <a:t>Completed: 30 papers across 5 categories, 3 reviewed in depth (including Gopakumar et al. 2026).</a:t>
             </a:r>
           </a:p>
           <a:p>
             <a:pPr lvl="1"/>
             <a:r>
-              <a:rPr sz="1700"/>
-              <a:t>Conformal prediction foundations: [ ] papers</a:t>
+              <a:rPr sz="1500"/>
+              <a:t>Conformal prediction foundations: 8 papers</a:t>
             </a:r>
           </a:p>
           <a:p>
             <a:pPr lvl="1"/>
             <a:r>
-              <a:rPr sz="1700"/>
-              <a:t>Surrogate modeling: [ ] papers</a:t>
+              <a:rPr sz="1500"/>
+              <a:t>Mondrian / conditional-coverage CP: 4 papers</a:t>
             </a:r>
           </a:p>
           <a:p>
             <a:pPr lvl="1"/>
             <a:r>
-              <a:rPr sz="1700"/>
-              <a:t>Queueing theory / ED simulation: [ ] papers</a:t>
+              <a:rPr sz="1500"/>
+              <a:t>Surrogate modeling &amp; uncertainty quantification: 6 papers</a:t>
+            </a:r>
+          </a:p>
+          <a:p>
+            <a:pPr lvl="1"/>
+            <a:r>
+              <a:rPr sz="1500"/>
+              <a:t>Queueing theory &amp; ED operations research: 5 papers</a:t>
+            </a:r>
+          </a:p>
+          <a:p>
+            <a:pPr lvl="1"/>
+            <a:r>
+              <a:rPr sz="1500"/>
+              <a:t>Discrete-event simulation &amp; ED-specific ML: 7 papers</a:t>
             </a:r>
           </a:p>
           <a:p>
             <a:pPr/>
             <a:r>
-              <a:rPr sz="1700"/>
-              <a:t>Target: 30 papers total, with 3 core papers (including Gopakumar et al. 2026) reviewed in depth.</a:t>
+              <a:rPr sz="1500"/>
+              <a:t>Plus 10 additional papers cross-checking the DES's real vs. literature-calibrated service-time parameters against published ED length-of-stay datasets, added after the initial 30-paper review.</a:t>
+            </a:r>
+          </a:p>
+          <a:p>
+            <a:pPr/>
+            <a:r>
+              <a:rPr sz="1500"/>
+              <a:t>Includes a critical assessment section (not just a summary): where the reviewed literature's own assumptions do or don't transfer to a discrete-event queueing domain.</a:t>
             </a:r>
           </a:p>
         </p:txBody>
@@ -4933,7 +5067,8 @@
           <a:lstStyle/>
           <a:p>
             <a:r>
-              <a:t>Future Scope - End-Sem</a:t>
+              <a:rPr sz="3200"/>
+              <a:t>Final Results: Closing the Coverage Gap</a:t>
             </a:r>
           </a:p>
         </p:txBody>
@@ -4947,8 +5082,8 @@
           <p:nvPr/>
         </p:nvGraphicFramePr>
         <p:xfrm>
-          <a:off x="457200" y="1371600"/>
-          <a:ext cx="8229600" cy="4297680"/>
+          <a:off x="457200" y="1280160"/>
+          <a:ext cx="8229600" cy="1828800"/>
         </p:xfrm>
         <a:graphic>
           <a:graphicData uri="http://schemas.openxmlformats.org/drawingml/2006/table">
@@ -4957,38 +5092,80 @@
                 <a:tableStyleId>{5C22544A-7EE6-4342-B048-85BDC9FD1C3A}</a:tableStyleId>
               </a:tblPr>
               <a:tblGrid>
-                <a:gridCol w="1005840"/>
-                <a:gridCol w="7223760"/>
+                <a:gridCol w="2377440"/>
+                <a:gridCol w="1463040"/>
+                <a:gridCol w="1554480"/>
+                <a:gridCol w="1554480"/>
+                <a:gridCol w="1280160"/>
               </a:tblGrid>
-              <a:tr h="716280">
-                <a:tc>
-                  <a:txBody>
-                    <a:bodyPr/>
-                    <a:lstStyle/>
-                    <a:p>
-                      <a:r>
-                        <a:rPr b="1" sz="1300"/>
-                        <a:t>Weeks</a:t>
-                      </a:r>
-                    </a:p>
-                  </a:txBody>
-                  <a:tcPr/>
-                </a:tc>
-                <a:tc>
-                  <a:txBody>
-                    <a:bodyPr/>
-                    <a:lstStyle/>
-                    <a:p>
-                      <a:r>
-                        <a:rPr b="1" sz="1300"/>
-                        <a:t>Plan</a:t>
+              <a:tr h="457200">
+                <a:tc>
+                  <a:txBody>
+                    <a:bodyPr/>
+                    <a:lstStyle/>
+                    <a:p>
+                      <a:r>
+                        <a:rPr b="1" sz="1200"/>
+                        <a:t>Method (30-repeat mean)</a:t>
+                      </a:r>
+                    </a:p>
+                  </a:txBody>
+                  <a:tcPr/>
+                </a:tc>
+                <a:tc>
+                  <a:txBody>
+                    <a:bodyPr/>
+                    <a:lstStyle/>
+                    <a:p>
+                      <a:r>
+                        <a:rPr b="1" sz="1200"/>
+                        <a:t>n_patients</a:t>
+                      </a:r>
+                    </a:p>
+                  </a:txBody>
+                  <a:tcPr/>
+                </a:tc>
+                <a:tc>
+                  <a:txBody>
+                    <a:bodyPr/>
+                    <a:lstStyle/>
+                    <a:p>
+                      <a:r>
+                        <a:rPr b="1" sz="1200"/>
+                        <a:t>mean_wait_min</a:t>
+                      </a:r>
+                    </a:p>
+                  </a:txBody>
+                  <a:tcPr/>
+                </a:tc>
+                <a:tc>
+                  <a:txBody>
+                    <a:bodyPr/>
+                    <a:lstStyle/>
+                    <a:p>
+                      <a:r>
+                        <a:rPr b="1" sz="1200"/>
+                        <a:t>mean_total_min</a:t>
+                      </a:r>
+                    </a:p>
+                  </a:txBody>
+                  <a:tcPr/>
+                </a:tc>
+                <a:tc>
+                  <a:txBody>
+                    <a:bodyPr/>
+                    <a:lstStyle/>
+                    <a:p>
+                      <a:r>
+                        <a:rPr b="1" sz="1200"/>
+                        <a:t>p95_wait_min</a:t>
                       </a:r>
                     </a:p>
                   </a:txBody>
                   <a:tcPr/>
                 </a:tc>
               </a:tr>
-              <a:tr h="716280">
+              <a:tr h="457200">
                 <a:tc>
                   <a:txBody>
                     <a:bodyPr/>
@@ -4996,8 +5173,8 @@
                     <a:p>
                       <a:pPr algn="l"/>
                       <a:r>
-                        <a:rPr sz="1300"/>
-                        <a:t>9-10</a:t>
+                        <a:rPr sz="1200"/>
+                        <a:t>GP baseline</a:t>
                       </a:r>
                     </a:p>
                   </a:txBody>
@@ -5010,15 +5187,57 @@
                     <a:p>
                       <a:pPr algn="ctr"/>
                       <a:r>
-                        <a:rPr sz="1300"/>
-                        <a:t>Standard conformal prediction on surrogate residuals; try a few different nonconformity measures.</a:t>
+                        <a:rPr sz="1200"/>
+                        <a:t>89.6%</a:t>
+                      </a:r>
+                    </a:p>
+                  </a:txBody>
+                  <a:tcPr/>
+                </a:tc>
+                <a:tc>
+                  <a:txBody>
+                    <a:bodyPr/>
+                    <a:lstStyle/>
+                    <a:p>
+                      <a:pPr algn="ctr"/>
+                      <a:r>
+                        <a:rPr sz="1200"/>
+                        <a:t>88.3%</a:t>
+                      </a:r>
+                    </a:p>
+                  </a:txBody>
+                  <a:tcPr/>
+                </a:tc>
+                <a:tc>
+                  <a:txBody>
+                    <a:bodyPr/>
+                    <a:lstStyle/>
+                    <a:p>
+                      <a:pPr algn="ctr"/>
+                      <a:r>
+                        <a:rPr sz="1200"/>
+                        <a:t>89.1%</a:t>
+                      </a:r>
+                    </a:p>
+                  </a:txBody>
+                  <a:tcPr/>
+                </a:tc>
+                <a:tc>
+                  <a:txBody>
+                    <a:bodyPr/>
+                    <a:lstStyle/>
+                    <a:p>
+                      <a:pPr algn="ctr"/>
+                      <a:r>
+                        <a:rPr sz="1200"/>
+                        <a:t>89.0%</a:t>
                       </a:r>
                     </a:p>
                   </a:txBody>
                   <a:tcPr/>
                 </a:tc>
               </a:tr>
-              <a:tr h="716280">
+              <a:tr h="457200">
                 <a:tc>
                   <a:txBody>
                     <a:bodyPr/>
@@ -5026,8 +5245,8 @@
                     <a:p>
                       <a:pPr algn="l"/>
                       <a:r>
-                        <a:rPr sz="1300"/>
-                        <a:t>11-12</a:t>
+                        <a:rPr sz="1200"/>
+                        <a:t>Standard CP</a:t>
                       </a:r>
                     </a:p>
                   </a:txBody>
@@ -5040,15 +5259,57 @@
                     <a:p>
                       <a:pPr algn="ctr"/>
                       <a:r>
-                        <a:rPr sz="1300"/>
-                        <a:t>Mondrian CP - partition by staffing level / shift / arrival-rate category; measure per-category coverage.</a:t>
+                        <a:rPr sz="1200"/>
+                        <a:t>90.1%</a:t>
+                      </a:r>
+                    </a:p>
+                  </a:txBody>
+                  <a:tcPr/>
+                </a:tc>
+                <a:tc>
+                  <a:txBody>
+                    <a:bodyPr/>
+                    <a:lstStyle/>
+                    <a:p>
+                      <a:pPr algn="ctr"/>
+                      <a:r>
+                        <a:rPr sz="1200"/>
+                        <a:t>90.1%</a:t>
+                      </a:r>
+                    </a:p>
+                  </a:txBody>
+                  <a:tcPr/>
+                </a:tc>
+                <a:tc>
+                  <a:txBody>
+                    <a:bodyPr/>
+                    <a:lstStyle/>
+                    <a:p>
+                      <a:pPr algn="ctr"/>
+                      <a:r>
+                        <a:rPr sz="1200"/>
+                        <a:t>89.8%</a:t>
+                      </a:r>
+                    </a:p>
+                  </a:txBody>
+                  <a:tcPr/>
+                </a:tc>
+                <a:tc>
+                  <a:txBody>
+                    <a:bodyPr/>
+                    <a:lstStyle/>
+                    <a:p>
+                      <a:pPr algn="ctr"/>
+                      <a:r>
+                        <a:rPr sz="1200"/>
+                        <a:t>90.1%</a:t>
                       </a:r>
                     </a:p>
                   </a:txBody>
                   <a:tcPr/>
                 </a:tc>
               </a:tr>
-              <a:tr h="716280">
+              <a:tr h="457200">
                 <a:tc>
                   <a:txBody>
                     <a:bodyPr/>
@@ -5056,8 +5317,8 @@
                     <a:p>
                       <a:pPr algn="l"/>
                       <a:r>
-                        <a:rPr sz="1300"/>
-                        <a:t>13</a:t>
+                        <a:rPr sz="1200"/>
+                        <a:t>Mondrian CP</a:t>
                       </a:r>
                     </a:p>
                   </a:txBody>
@@ -5070,24 +5331,8 @@
                     <a:p>
                       <a:pPr algn="ctr"/>
                       <a:r>
-                        <a:rPr sz="1300"/>
-                        <a:t>Stress-test exchangeability with an out-of-distribution "surge day" scenario; see where standard CP and Mondrian CP hold or break.</a:t>
-                      </a:r>
-                    </a:p>
-                  </a:txBody>
-                  <a:tcPr/>
-                </a:tc>
-              </a:tr>
-              <a:tr h="716280">
-                <a:tc>
-                  <a:txBody>
-                    <a:bodyPr/>
-                    <a:lstStyle/>
-                    <a:p>
-                      <a:pPr algn="l"/>
-                      <a:r>
-                        <a:rPr sz="1300"/>
-                        <a:t>14-15</a:t>
+                        <a:rPr sz="1200"/>
+                        <a:t>91.0%</a:t>
                       </a:r>
                     </a:p>
                   </a:txBody>
@@ -5100,24 +5345,8 @@
                     <a:p>
                       <a:pPr algn="ctr"/>
                       <a:r>
-                        <a:rPr sz="1300"/>
-                        <a:t>Full comparison - GP vs. standard CP vs. Mondrian CP on coverage, interval width, and computation time.</a:t>
-                      </a:r>
-                    </a:p>
-                  </a:txBody>
-                  <a:tcPr/>
-                </a:tc>
-              </a:tr>
-              <a:tr h="716280">
-                <a:tc>
-                  <a:txBody>
-                    <a:bodyPr/>
-                    <a:lstStyle/>
-                    <a:p>
-                      <a:pPr algn="l"/>
-                      <a:r>
-                        <a:rPr sz="1300"/>
-                        <a:t>16</a:t>
+                        <a:rPr sz="1200"/>
+                        <a:t>91.1%</a:t>
                       </a:r>
                     </a:p>
                   </a:txBody>
@@ -5130,8 +5359,22 @@
                     <a:p>
                       <a:pPr algn="ctr"/>
                       <a:r>
-                        <a:rPr sz="1300"/>
-                        <a:t>End-sem PPT and report: a quantified answer on whether Mondrian CP closes the marginal-vs-conditional coverage gap in this domain.</a:t>
+                        <a:rPr sz="1200"/>
+                        <a:t>90.8%</a:t>
+                      </a:r>
+                    </a:p>
+                  </a:txBody>
+                  <a:tcPr/>
+                </a:tc>
+                <a:tc>
+                  <a:txBody>
+                    <a:bodyPr/>
+                    <a:lstStyle/>
+                    <a:p>
+                      <a:pPr algn="ctr"/>
+                      <a:r>
+                        <a:rPr sz="1200"/>
+                        <a:t>91.4%</a:t>
                       </a:r>
                     </a:p>
                   </a:txBody>
@@ -5142,6 +5385,176 @@
           </a:graphicData>
         </a:graphic>
       </p:graphicFrame>
+      <p:sp>
+        <p:nvSpPr>
+          <p:cNvPr id="4" name="TextBox 3"/>
+          <p:cNvSpPr txBox="1"/>
+          <p:nvPr/>
+        </p:nvSpPr>
+        <p:spPr>
+          <a:xfrm>
+            <a:off x="457200" y="3246120"/>
+            <a:ext cx="8229600" cy="548640"/>
+          </a:xfrm>
+          <a:prstGeom prst="rect">
+            <a:avLst/>
+          </a:prstGeom>
+          <a:noFill/>
+        </p:spPr>
+        <p:txBody>
+          <a:bodyPr wrap="square">
+            <a:spAutoFit/>
+          </a:bodyPr>
+          <a:lstStyle/>
+          <a:p>
+            <a:r>
+              <a:rPr sz="1300" i="1"/>
+              <a:t>Marginal coverage: all three methods land close to the 90% target on average - the real gap only shows up when coverage is checked within each operating category.</a:t>
+            </a:r>
+          </a:p>
+        </p:txBody>
+      </p:sp>
+      <p:graphicFrame>
+        <p:nvGraphicFramePr>
+          <p:cNvPr id="5" name="Table 4"/>
+          <p:cNvGraphicFramePr>
+            <a:graphicFrameLocks noGrp="1"/>
+          </p:cNvGraphicFramePr>
+          <p:nvPr/>
+        </p:nvGraphicFramePr>
+        <p:xfrm>
+          <a:off x="457200" y="3886200"/>
+          <a:ext cx="8229600" cy="1051560"/>
+        </p:xfrm>
+        <a:graphic>
+          <a:graphicData uri="http://schemas.openxmlformats.org/drawingml/2006/table">
+            <a:tbl>
+              <a:tblPr firstRow="1" bandRow="1">
+                <a:tableStyleId>{5C22544A-7EE6-4342-B048-85BDC9FD1C3A}</a:tableStyleId>
+              </a:tblPr>
+              <a:tblGrid>
+                <a:gridCol w="4114800"/>
+                <a:gridCol w="2286000"/>
+                <a:gridCol w="1828800"/>
+              </a:tblGrid>
+              <a:tr h="525780">
+                <a:tc>
+                  <a:txBody>
+                    <a:bodyPr/>
+                    <a:lstStyle/>
+                    <a:p>
+                      <a:r>
+                        <a:rPr b="1" sz="1300"/>
+                        <a:t>Worst operating category (mean_wait_minutes)</a:t>
+                      </a:r>
+                    </a:p>
+                  </a:txBody>
+                  <a:tcPr/>
+                </a:tc>
+                <a:tc>
+                  <a:txBody>
+                    <a:bodyPr/>
+                    <a:lstStyle/>
+                    <a:p>
+                      <a:r>
+                        <a:rPr b="1" sz="1300"/>
+                        <a:t>Pooled (standard) CP coverage</a:t>
+                      </a:r>
+                    </a:p>
+                  </a:txBody>
+                  <a:tcPr/>
+                </a:tc>
+                <a:tc>
+                  <a:txBody>
+                    <a:bodyPr/>
+                    <a:lstStyle/>
+                    <a:p>
+                      <a:r>
+                        <a:rPr b="1" sz="1300"/>
+                        <a:t>Mondrian CP coverage</a:t>
+                      </a:r>
+                    </a:p>
+                  </a:txBody>
+                  <a:tcPr/>
+                </a:tc>
+              </a:tr>
+              <a:tr h="525780">
+                <a:tc>
+                  <a:txBody>
+                    <a:bodyPr/>
+                    <a:lstStyle/>
+                    <a:p>
+                      <a:pPr algn="l"/>
+                      <a:r>
+                        <a:rPr sz="1300"/>
+                        <a:t>Understaffed + high arrival-rate</a:t>
+                      </a:r>
+                    </a:p>
+                  </a:txBody>
+                  <a:tcPr/>
+                </a:tc>
+                <a:tc>
+                  <a:txBody>
+                    <a:bodyPr/>
+                    <a:lstStyle/>
+                    <a:p>
+                      <a:pPr algn="ctr"/>
+                      <a:r>
+                        <a:rPr sz="1300"/>
+                        <a:t>68.2%</a:t>
+                      </a:r>
+                    </a:p>
+                  </a:txBody>
+                  <a:tcPr/>
+                </a:tc>
+                <a:tc>
+                  <a:txBody>
+                    <a:bodyPr/>
+                    <a:lstStyle/>
+                    <a:p>
+                      <a:pPr algn="ctr"/>
+                      <a:r>
+                        <a:rPr sz="1300"/>
+                        <a:t>90.9%</a:t>
+                      </a:r>
+                    </a:p>
+                  </a:txBody>
+                  <a:tcPr/>
+                </a:tc>
+              </a:tr>
+            </a:tbl>
+          </a:graphicData>
+        </a:graphic>
+      </p:graphicFrame>
+      <p:sp>
+        <p:nvSpPr>
+          <p:cNvPr id="6" name="TextBox 5"/>
+          <p:cNvSpPr txBox="1"/>
+          <p:nvPr/>
+        </p:nvSpPr>
+        <p:spPr>
+          <a:xfrm>
+            <a:off x="457200" y="5074920"/>
+            <a:ext cx="8229600" cy="1188720"/>
+          </a:xfrm>
+          <a:prstGeom prst="rect">
+            <a:avLst/>
+          </a:prstGeom>
+          <a:noFill/>
+        </p:spPr>
+        <p:txBody>
+          <a:bodyPr wrap="square">
+            <a:spAutoFit/>
+          </a:bodyPr>
+          <a:lstStyle/>
+          <a:p>
+            <a:r>
+              <a:rPr sz="1300"/>
+              <a:t>This is the project's central finding: standard CP's marginal guarantee hides a severe undercoverage failure in exactly the highest-stakes operating regime. Mondrian CP - calibrating separately per staffing x arrival-rate category - closes that gap without sacrificing the marginal guarantee. Confirmed significant (30 repeats, paired t-test, p &lt; 0.001) and replicated at an independent second hospital department (Dept. B).</a:t>
+            </a:r>
+          </a:p>
+        </p:txBody>
+      </p:sp>
     </p:spTree>
   </p:cSld>
   <p:clrMapOvr>

--- a/slides/mid_sem_presentation.pptx
+++ b/slides/mid_sem_presentation.pptx
@@ -3223,83 +3223,215 @@
           <a:lstStyle/>
           <a:p>
             <a:r>
-              <a:t>Beyond the Original Roadmap</a:t>
-            </a:r>
-          </a:p>
-        </p:txBody>
-      </p:sp>
-      <p:sp>
-        <p:nvSpPr>
-          <p:cNvPr id="3" name="Content Placeholder 2"/>
-          <p:cNvSpPr>
-            <a:spLocks noGrp="1"/>
-          </p:cNvSpPr>
-          <p:nvPr>
-            <p:ph idx="1"/>
-          </p:nvPr>
-        </p:nvSpPr>
-        <p:spPr/>
-        <p:txBody>
-          <a:bodyPr wrap="square"/>
-          <a:lstStyle/>
-          <a:p>
-            <a:pPr/>
-            <a:r>
-              <a:rPr sz="1400"/>
-              <a:t>The end-sem plan (standard CP, Mondrian CP, exchangeability stress test, full comparison) is done - the project then went substantially further:</a:t>
-            </a:r>
-          </a:p>
-          <a:p>
-            <a:pPr lvl="1"/>
-            <a:r>
-              <a:rPr sz="1400"/>
-              <a:t>Conformalized Quantile Regression (CQR) and Mondrian-CQR, a stronger width-adaptive baseline</a:t>
-            </a:r>
-          </a:p>
-          <a:p>
-            <a:pPr lvl="1"/>
-            <a:r>
-              <a:rPr sz="1400"/>
-              <a:t>Conformal Risk Control (CRC) and Adaptive Conformal Inference (ACI) - ACI recovers out-of-range coverage from ~58% (static CP) to 84-89% under a real, time-ordered demand-surge stream</a:t>
-            </a:r>
-          </a:p>
-          <a:p>
-            <a:pPr lvl="1"/>
-            <a:r>
-              <a:rPr sz="1400"/>
-              <a:t>Likelihood-ratio weighted CP under covariate shift, with an honest infinite-width caveat outside calibration support</a:t>
-            </a:r>
-          </a:p>
-          <a:p>
-            <a:pPr lvl="1"/>
-            <a:r>
-              <a:rPr sz="1400"/>
-              <a:t>5-architecture surrogate benchmark: gradient boosting, MLP, Random Forest, XGBoost, LightGBM</a:t>
-            </a:r>
-          </a:p>
-          <a:p>
-            <a:pPr lvl="1"/>
-            <a:r>
-              <a:rPr sz="1400"/>
-              <a:t>Independent replication at a second real hospital department (Dept. B) - same coverage-gap finding, different volume and acuity mix</a:t>
-            </a:r>
-          </a:p>
-          <a:p>
-            <a:pPr lvl="1"/>
-            <a:r>
-              <a:rPr sz="1400"/>
-              <a:t>An interactive ops dashboard and a CP-constrained capacity-planning optimization, plus an FDA AI/ML SaMD regulatory framing</a:t>
-            </a:r>
-          </a:p>
-          <a:p>
-            <a:pPr/>
-            <a:r>
-              <a:rPr sz="1400"/>
-              <a:t>All of it written up in a single 200+ page book-format report, not just this deck.</a:t>
-            </a:r>
-          </a:p>
-        </p:txBody>
-      </p:sp>
+              <a:t>Future Scope - End-Sem</a:t>
+            </a:r>
+          </a:p>
+        </p:txBody>
+      </p:sp>
+      <p:graphicFrame>
+        <p:nvGraphicFramePr>
+          <p:cNvPr id="3" name="Table 2"/>
+          <p:cNvGraphicFramePr>
+            <a:graphicFrameLocks noGrp="1"/>
+          </p:cNvGraphicFramePr>
+          <p:nvPr/>
+        </p:nvGraphicFramePr>
+        <p:xfrm>
+          <a:off x="457200" y="1371600"/>
+          <a:ext cx="8229600" cy="4297680"/>
+        </p:xfrm>
+        <a:graphic>
+          <a:graphicData uri="http://schemas.openxmlformats.org/drawingml/2006/table">
+            <a:tbl>
+              <a:tblPr firstRow="1" bandRow="1">
+                <a:tableStyleId>{5C22544A-7EE6-4342-B048-85BDC9FD1C3A}</a:tableStyleId>
+              </a:tblPr>
+              <a:tblGrid>
+                <a:gridCol w="1005840"/>
+                <a:gridCol w="7223760"/>
+              </a:tblGrid>
+              <a:tr h="716280">
+                <a:tc>
+                  <a:txBody>
+                    <a:bodyPr/>
+                    <a:lstStyle/>
+                    <a:p>
+                      <a:r>
+                        <a:rPr b="1" sz="1300"/>
+                        <a:t>Weeks</a:t>
+                      </a:r>
+                    </a:p>
+                  </a:txBody>
+                  <a:tcPr/>
+                </a:tc>
+                <a:tc>
+                  <a:txBody>
+                    <a:bodyPr/>
+                    <a:lstStyle/>
+                    <a:p>
+                      <a:r>
+                        <a:rPr b="1" sz="1300"/>
+                        <a:t>Plan</a:t>
+                      </a:r>
+                    </a:p>
+                  </a:txBody>
+                  <a:tcPr/>
+                </a:tc>
+              </a:tr>
+              <a:tr h="716280">
+                <a:tc>
+                  <a:txBody>
+                    <a:bodyPr/>
+                    <a:lstStyle/>
+                    <a:p>
+                      <a:pPr algn="l"/>
+                      <a:r>
+                        <a:rPr sz="1300"/>
+                        <a:t>9-10</a:t>
+                      </a:r>
+                    </a:p>
+                  </a:txBody>
+                  <a:tcPr/>
+                </a:tc>
+                <a:tc>
+                  <a:txBody>
+                    <a:bodyPr/>
+                    <a:lstStyle/>
+                    <a:p>
+                      <a:pPr algn="ctr"/>
+                      <a:r>
+                        <a:rPr sz="1300"/>
+                        <a:t>Standard conformal prediction on surrogate residuals; try a few different nonconformity measures.</a:t>
+                      </a:r>
+                    </a:p>
+                  </a:txBody>
+                  <a:tcPr/>
+                </a:tc>
+              </a:tr>
+              <a:tr h="716280">
+                <a:tc>
+                  <a:txBody>
+                    <a:bodyPr/>
+                    <a:lstStyle/>
+                    <a:p>
+                      <a:pPr algn="l"/>
+                      <a:r>
+                        <a:rPr sz="1300"/>
+                        <a:t>11-12</a:t>
+                      </a:r>
+                    </a:p>
+                  </a:txBody>
+                  <a:tcPr/>
+                </a:tc>
+                <a:tc>
+                  <a:txBody>
+                    <a:bodyPr/>
+                    <a:lstStyle/>
+                    <a:p>
+                      <a:pPr algn="ctr"/>
+                      <a:r>
+                        <a:rPr sz="1300"/>
+                        <a:t>Mondrian CP - partition by staffing level / shift / arrival-rate category; measure per-category coverage.</a:t>
+                      </a:r>
+                    </a:p>
+                  </a:txBody>
+                  <a:tcPr/>
+                </a:tc>
+              </a:tr>
+              <a:tr h="716280">
+                <a:tc>
+                  <a:txBody>
+                    <a:bodyPr/>
+                    <a:lstStyle/>
+                    <a:p>
+                      <a:pPr algn="l"/>
+                      <a:r>
+                        <a:rPr sz="1300"/>
+                        <a:t>13</a:t>
+                      </a:r>
+                    </a:p>
+                  </a:txBody>
+                  <a:tcPr/>
+                </a:tc>
+                <a:tc>
+                  <a:txBody>
+                    <a:bodyPr/>
+                    <a:lstStyle/>
+                    <a:p>
+                      <a:pPr algn="ctr"/>
+                      <a:r>
+                        <a:rPr sz="1300"/>
+                        <a:t>Stress-test exchangeability with an out-of-distribution "surge day" scenario; see where standard CP and Mondrian CP hold or break.</a:t>
+                      </a:r>
+                    </a:p>
+                  </a:txBody>
+                  <a:tcPr/>
+                </a:tc>
+              </a:tr>
+              <a:tr h="716280">
+                <a:tc>
+                  <a:txBody>
+                    <a:bodyPr/>
+                    <a:lstStyle/>
+                    <a:p>
+                      <a:pPr algn="l"/>
+                      <a:r>
+                        <a:rPr sz="1300"/>
+                        <a:t>14-15</a:t>
+                      </a:r>
+                    </a:p>
+                  </a:txBody>
+                  <a:tcPr/>
+                </a:tc>
+                <a:tc>
+                  <a:txBody>
+                    <a:bodyPr/>
+                    <a:lstStyle/>
+                    <a:p>
+                      <a:pPr algn="ctr"/>
+                      <a:r>
+                        <a:rPr sz="1300"/>
+                        <a:t>Full comparison - GP vs. standard CP vs. Mondrian CP on coverage, interval width, and computation time.</a:t>
+                      </a:r>
+                    </a:p>
+                  </a:txBody>
+                  <a:tcPr/>
+                </a:tc>
+              </a:tr>
+              <a:tr h="716280">
+                <a:tc>
+                  <a:txBody>
+                    <a:bodyPr/>
+                    <a:lstStyle/>
+                    <a:p>
+                      <a:pPr algn="l"/>
+                      <a:r>
+                        <a:rPr sz="1300"/>
+                        <a:t>16</a:t>
+                      </a:r>
+                    </a:p>
+                  </a:txBody>
+                  <a:tcPr/>
+                </a:tc>
+                <a:tc>
+                  <a:txBody>
+                    <a:bodyPr/>
+                    <a:lstStyle/>
+                    <a:p>
+                      <a:pPr algn="ctr"/>
+                      <a:r>
+                        <a:rPr sz="1300"/>
+                        <a:t>End-sem PPT and report: a quantified answer on whether Mondrian CP closes the marginal-vs-conditional coverage gap in this domain.</a:t>
+                      </a:r>
+                    </a:p>
+                  </a:txBody>
+                  <a:tcPr/>
+                </a:tc>
+              </a:tr>
+            </a:tbl>
+          </a:graphicData>
+        </a:graphic>
+      </p:graphicFrame>
     </p:spTree>
   </p:cSld>
   <p:clrMapOvr>
@@ -4120,8 +4252,8 @@
           <a:lstStyle/>
           <a:p>
             <a:r>
-              <a:rPr sz="3000"/>
-              <a:t>Phase 1 Results: DES, Surrogate, GP Baseline</a:t>
+              <a:rPr sz="3200"/>
+              <a:t>Work Completed So Far (~50%)</a:t>
             </a:r>
           </a:p>
         </p:txBody>
@@ -4956,79 +5088,73 @@
           <a:lstStyle/>
           <a:p>
             <a:r>
-              <a:t>Literature Review Snapshot</a:t>
-            </a:r>
-          </a:p>
-        </p:txBody>
-      </p:sp>
-      <p:sp>
-        <p:nvSpPr>
-          <p:cNvPr id="3" name="Content Placeholder 2"/>
-          <p:cNvSpPr>
-            <a:spLocks noGrp="1"/>
-          </p:cNvSpPr>
-          <p:nvPr>
-            <p:ph idx="1"/>
-          </p:nvPr>
-        </p:nvSpPr>
-        <p:spPr/>
-        <p:txBody>
-          <a:bodyPr wrap="square"/>
-          <a:lstStyle/>
-          <a:p>
-            <a:pPr/>
-            <a:r>
-              <a:rPr sz="1500"/>
-              <a:t>Completed: 30 papers across 5 categories, 3 reviewed in depth (including Gopakumar et al. 2026).</a:t>
-            </a:r>
-          </a:p>
-          <a:p>
-            <a:pPr lvl="1"/>
-            <a:r>
-              <a:rPr sz="1500"/>
-              <a:t>Conformal prediction foundations: 8 papers</a:t>
-            </a:r>
-          </a:p>
-          <a:p>
-            <a:pPr lvl="1"/>
-            <a:r>
-              <a:rPr sz="1500"/>
-              <a:t>Mondrian / conditional-coverage CP: 4 papers</a:t>
-            </a:r>
-          </a:p>
-          <a:p>
-            <a:pPr lvl="1"/>
-            <a:r>
-              <a:rPr sz="1500"/>
-              <a:t>Surrogate modeling &amp; uncertainty quantification: 6 papers</a:t>
-            </a:r>
-          </a:p>
-          <a:p>
-            <a:pPr lvl="1"/>
-            <a:r>
-              <a:rPr sz="1500"/>
-              <a:t>Queueing theory &amp; ED operations research: 5 papers</a:t>
-            </a:r>
-          </a:p>
-          <a:p>
-            <a:pPr lvl="1"/>
-            <a:r>
-              <a:rPr sz="1500"/>
-              <a:t>Discrete-event simulation &amp; ED-specific ML: 7 papers</a:t>
-            </a:r>
-          </a:p>
-          <a:p>
-            <a:pPr/>
-            <a:r>
-              <a:rPr sz="1500"/>
-              <a:t>Plus 10 additional papers cross-checking the DES's real vs. literature-calibrated service-time parameters against published ED length-of-stay datasets, added after the initial 30-paper review.</a:t>
-            </a:r>
-          </a:p>
-          <a:p>
-            <a:pPr/>
-            <a:r>
-              <a:rPr sz="1500"/>
-              <a:t>Includes a critical assessment section (not just a summary): where the reviewed literature's own assumptions do or don't transfer to a discrete-event queueing domain.</a:t>
+              <a:rPr sz="3200"/>
+              <a:t>The Discrete-Event Simulation</a:t>
+            </a:r>
+          </a:p>
+        </p:txBody>
+      </p:sp>
+      <p:pic>
+        <p:nvPicPr>
+          <p:cNvPr id="3" name="Picture 2" descr="real_arrivals_by_hour.png"/>
+          <p:cNvPicPr>
+            <a:picLocks noChangeAspect="1"/>
+          </p:cNvPicPr>
+          <p:nvPr/>
+        </p:nvPicPr>
+        <p:blipFill>
+          <a:blip r:embed="rId2"/>
+          <a:stretch>
+            <a:fillRect/>
+          </a:stretch>
+        </p:blipFill>
+        <p:spPr>
+          <a:xfrm>
+            <a:off x="457200" y="1188720"/>
+            <a:ext cx="5687335" cy="3291840"/>
+          </a:xfrm>
+          <a:prstGeom prst="rect">
+            <a:avLst/>
+          </a:prstGeom>
+        </p:spPr>
+      </p:pic>
+      <p:sp>
+        <p:nvSpPr>
+          <p:cNvPr id="4" name="TextBox 3"/>
+          <p:cNvSpPr txBox="1"/>
+          <p:nvPr/>
+        </p:nvSpPr>
+        <p:spPr>
+          <a:xfrm>
+            <a:off x="457200" y="4617720"/>
+            <a:ext cx="8229600" cy="1737360"/>
+          </a:xfrm>
+          <a:prstGeom prst="rect">
+            <a:avLst/>
+          </a:prstGeom>
+          <a:noFill/>
+        </p:spPr>
+        <p:txBody>
+          <a:bodyPr wrap="square">
+            <a:spAutoFit/>
+          </a:bodyPr>
+          <a:lstStyle/>
+          <a:p>
+            <a:r>
+              <a:rPr sz="1400"/>
+              <a:t>SimPy discrete-event simulation of a single ED, calibrated directly on this real arrival pattern plus the real ESI acuity mix - not a generic queueing textbook example.</a:t>
+            </a:r>
+          </a:p>
+          <a:p>
+            <a:r>
+              <a:rPr sz="1400"/>
+              <a:t>Priority-resource pool: higher-acuity (lower ESI) patients get priority, matching real triage behavior.</a:t>
+            </a:r>
+          </a:p>
+          <a:p>
+            <a:r>
+              <a:rPr sz="1400"/>
+              <a:t>Validated against real aggregated daily volume: 91.0% match across 200 simulated days (previous slide) - the DES is the foundation everything downstream (surrogate, UQ) builds on.</a:t>
             </a:r>
           </a:p>
         </p:txBody>
@@ -5067,490 +5193,79 @@
           <a:lstStyle/>
           <a:p>
             <a:r>
-              <a:rPr sz="3200"/>
-              <a:t>Final Results: Closing the Coverage Gap</a:t>
-            </a:r>
-          </a:p>
-        </p:txBody>
-      </p:sp>
-      <p:graphicFrame>
-        <p:nvGraphicFramePr>
-          <p:cNvPr id="3" name="Table 2"/>
-          <p:cNvGraphicFramePr>
-            <a:graphicFrameLocks noGrp="1"/>
-          </p:cNvGraphicFramePr>
-          <p:nvPr/>
-        </p:nvGraphicFramePr>
-        <p:xfrm>
-          <a:off x="457200" y="1280160"/>
-          <a:ext cx="8229600" cy="1828800"/>
-        </p:xfrm>
-        <a:graphic>
-          <a:graphicData uri="http://schemas.openxmlformats.org/drawingml/2006/table">
-            <a:tbl>
-              <a:tblPr firstRow="1" bandRow="1">
-                <a:tableStyleId>{5C22544A-7EE6-4342-B048-85BDC9FD1C3A}</a:tableStyleId>
-              </a:tblPr>
-              <a:tblGrid>
-                <a:gridCol w="2377440"/>
-                <a:gridCol w="1463040"/>
-                <a:gridCol w="1554480"/>
-                <a:gridCol w="1554480"/>
-                <a:gridCol w="1280160"/>
-              </a:tblGrid>
-              <a:tr h="457200">
-                <a:tc>
-                  <a:txBody>
-                    <a:bodyPr/>
-                    <a:lstStyle/>
-                    <a:p>
-                      <a:r>
-                        <a:rPr b="1" sz="1200"/>
-                        <a:t>Method (30-repeat mean)</a:t>
-                      </a:r>
-                    </a:p>
-                  </a:txBody>
-                  <a:tcPr/>
-                </a:tc>
-                <a:tc>
-                  <a:txBody>
-                    <a:bodyPr/>
-                    <a:lstStyle/>
-                    <a:p>
-                      <a:r>
-                        <a:rPr b="1" sz="1200"/>
-                        <a:t>n_patients</a:t>
-                      </a:r>
-                    </a:p>
-                  </a:txBody>
-                  <a:tcPr/>
-                </a:tc>
-                <a:tc>
-                  <a:txBody>
-                    <a:bodyPr/>
-                    <a:lstStyle/>
-                    <a:p>
-                      <a:r>
-                        <a:rPr b="1" sz="1200"/>
-                        <a:t>mean_wait_min</a:t>
-                      </a:r>
-                    </a:p>
-                  </a:txBody>
-                  <a:tcPr/>
-                </a:tc>
-                <a:tc>
-                  <a:txBody>
-                    <a:bodyPr/>
-                    <a:lstStyle/>
-                    <a:p>
-                      <a:r>
-                        <a:rPr b="1" sz="1200"/>
-                        <a:t>mean_total_min</a:t>
-                      </a:r>
-                    </a:p>
-                  </a:txBody>
-                  <a:tcPr/>
-                </a:tc>
-                <a:tc>
-                  <a:txBody>
-                    <a:bodyPr/>
-                    <a:lstStyle/>
-                    <a:p>
-                      <a:r>
-                        <a:rPr b="1" sz="1200"/>
-                        <a:t>p95_wait_min</a:t>
-                      </a:r>
-                    </a:p>
-                  </a:txBody>
-                  <a:tcPr/>
-                </a:tc>
-              </a:tr>
-              <a:tr h="457200">
-                <a:tc>
-                  <a:txBody>
-                    <a:bodyPr/>
-                    <a:lstStyle/>
-                    <a:p>
-                      <a:pPr algn="l"/>
-                      <a:r>
-                        <a:rPr sz="1200"/>
-                        <a:t>GP baseline</a:t>
-                      </a:r>
-                    </a:p>
-                  </a:txBody>
-                  <a:tcPr/>
-                </a:tc>
-                <a:tc>
-                  <a:txBody>
-                    <a:bodyPr/>
-                    <a:lstStyle/>
-                    <a:p>
-                      <a:pPr algn="ctr"/>
-                      <a:r>
-                        <a:rPr sz="1200"/>
-                        <a:t>89.6%</a:t>
-                      </a:r>
-                    </a:p>
-                  </a:txBody>
-                  <a:tcPr/>
-                </a:tc>
-                <a:tc>
-                  <a:txBody>
-                    <a:bodyPr/>
-                    <a:lstStyle/>
-                    <a:p>
-                      <a:pPr algn="ctr"/>
-                      <a:r>
-                        <a:rPr sz="1200"/>
-                        <a:t>88.3%</a:t>
-                      </a:r>
-                    </a:p>
-                  </a:txBody>
-                  <a:tcPr/>
-                </a:tc>
-                <a:tc>
-                  <a:txBody>
-                    <a:bodyPr/>
-                    <a:lstStyle/>
-                    <a:p>
-                      <a:pPr algn="ctr"/>
-                      <a:r>
-                        <a:rPr sz="1200"/>
-                        <a:t>89.1%</a:t>
-                      </a:r>
-                    </a:p>
-                  </a:txBody>
-                  <a:tcPr/>
-                </a:tc>
-                <a:tc>
-                  <a:txBody>
-                    <a:bodyPr/>
-                    <a:lstStyle/>
-                    <a:p>
-                      <a:pPr algn="ctr"/>
-                      <a:r>
-                        <a:rPr sz="1200"/>
-                        <a:t>89.0%</a:t>
-                      </a:r>
-                    </a:p>
-                  </a:txBody>
-                  <a:tcPr/>
-                </a:tc>
-              </a:tr>
-              <a:tr h="457200">
-                <a:tc>
-                  <a:txBody>
-                    <a:bodyPr/>
-                    <a:lstStyle/>
-                    <a:p>
-                      <a:pPr algn="l"/>
-                      <a:r>
-                        <a:rPr sz="1200"/>
-                        <a:t>Standard CP</a:t>
-                      </a:r>
-                    </a:p>
-                  </a:txBody>
-                  <a:tcPr/>
-                </a:tc>
-                <a:tc>
-                  <a:txBody>
-                    <a:bodyPr/>
-                    <a:lstStyle/>
-                    <a:p>
-                      <a:pPr algn="ctr"/>
-                      <a:r>
-                        <a:rPr sz="1200"/>
-                        <a:t>90.1%</a:t>
-                      </a:r>
-                    </a:p>
-                  </a:txBody>
-                  <a:tcPr/>
-                </a:tc>
-                <a:tc>
-                  <a:txBody>
-                    <a:bodyPr/>
-                    <a:lstStyle/>
-                    <a:p>
-                      <a:pPr algn="ctr"/>
-                      <a:r>
-                        <a:rPr sz="1200"/>
-                        <a:t>90.1%</a:t>
-                      </a:r>
-                    </a:p>
-                  </a:txBody>
-                  <a:tcPr/>
-                </a:tc>
-                <a:tc>
-                  <a:txBody>
-                    <a:bodyPr/>
-                    <a:lstStyle/>
-                    <a:p>
-                      <a:pPr algn="ctr"/>
-                      <a:r>
-                        <a:rPr sz="1200"/>
-                        <a:t>89.8%</a:t>
-                      </a:r>
-                    </a:p>
-                  </a:txBody>
-                  <a:tcPr/>
-                </a:tc>
-                <a:tc>
-                  <a:txBody>
-                    <a:bodyPr/>
-                    <a:lstStyle/>
-                    <a:p>
-                      <a:pPr algn="ctr"/>
-                      <a:r>
-                        <a:rPr sz="1200"/>
-                        <a:t>90.1%</a:t>
-                      </a:r>
-                    </a:p>
-                  </a:txBody>
-                  <a:tcPr/>
-                </a:tc>
-              </a:tr>
-              <a:tr h="457200">
-                <a:tc>
-                  <a:txBody>
-                    <a:bodyPr/>
-                    <a:lstStyle/>
-                    <a:p>
-                      <a:pPr algn="l"/>
-                      <a:r>
-                        <a:rPr sz="1200"/>
-                        <a:t>Mondrian CP</a:t>
-                      </a:r>
-                    </a:p>
-                  </a:txBody>
-                  <a:tcPr/>
-                </a:tc>
-                <a:tc>
-                  <a:txBody>
-                    <a:bodyPr/>
-                    <a:lstStyle/>
-                    <a:p>
-                      <a:pPr algn="ctr"/>
-                      <a:r>
-                        <a:rPr sz="1200"/>
-                        <a:t>91.0%</a:t>
-                      </a:r>
-                    </a:p>
-                  </a:txBody>
-                  <a:tcPr/>
-                </a:tc>
-                <a:tc>
-                  <a:txBody>
-                    <a:bodyPr/>
-                    <a:lstStyle/>
-                    <a:p>
-                      <a:pPr algn="ctr"/>
-                      <a:r>
-                        <a:rPr sz="1200"/>
-                        <a:t>91.1%</a:t>
-                      </a:r>
-                    </a:p>
-                  </a:txBody>
-                  <a:tcPr/>
-                </a:tc>
-                <a:tc>
-                  <a:txBody>
-                    <a:bodyPr/>
-                    <a:lstStyle/>
-                    <a:p>
-                      <a:pPr algn="ctr"/>
-                      <a:r>
-                        <a:rPr sz="1200"/>
-                        <a:t>90.8%</a:t>
-                      </a:r>
-                    </a:p>
-                  </a:txBody>
-                  <a:tcPr/>
-                </a:tc>
-                <a:tc>
-                  <a:txBody>
-                    <a:bodyPr/>
-                    <a:lstStyle/>
-                    <a:p>
-                      <a:pPr algn="ctr"/>
-                      <a:r>
-                        <a:rPr sz="1200"/>
-                        <a:t>91.4%</a:t>
-                      </a:r>
-                    </a:p>
-                  </a:txBody>
-                  <a:tcPr/>
-                </a:tc>
-              </a:tr>
-            </a:tbl>
-          </a:graphicData>
-        </a:graphic>
-      </p:graphicFrame>
-      <p:sp>
-        <p:nvSpPr>
-          <p:cNvPr id="4" name="TextBox 3"/>
-          <p:cNvSpPr txBox="1"/>
-          <p:nvPr/>
-        </p:nvSpPr>
-        <p:spPr>
-          <a:xfrm>
-            <a:off x="457200" y="3246120"/>
-            <a:ext cx="8229600" cy="548640"/>
-          </a:xfrm>
-          <a:prstGeom prst="rect">
-            <a:avLst/>
-          </a:prstGeom>
-          <a:noFill/>
-        </p:spPr>
-        <p:txBody>
-          <a:bodyPr wrap="square">
-            <a:spAutoFit/>
-          </a:bodyPr>
-          <a:lstStyle/>
-          <a:p>
-            <a:r>
-              <a:rPr sz="1300" i="1"/>
-              <a:t>Marginal coverage: all three methods land close to the 90% target on average - the real gap only shows up when coverage is checked within each operating category.</a:t>
-            </a:r>
-          </a:p>
-        </p:txBody>
-      </p:sp>
-      <p:graphicFrame>
-        <p:nvGraphicFramePr>
-          <p:cNvPr id="5" name="Table 4"/>
-          <p:cNvGraphicFramePr>
-            <a:graphicFrameLocks noGrp="1"/>
-          </p:cNvGraphicFramePr>
-          <p:nvPr/>
-        </p:nvGraphicFramePr>
-        <p:xfrm>
-          <a:off x="457200" y="3886200"/>
-          <a:ext cx="8229600" cy="1051560"/>
-        </p:xfrm>
-        <a:graphic>
-          <a:graphicData uri="http://schemas.openxmlformats.org/drawingml/2006/table">
-            <a:tbl>
-              <a:tblPr firstRow="1" bandRow="1">
-                <a:tableStyleId>{5C22544A-7EE6-4342-B048-85BDC9FD1C3A}</a:tableStyleId>
-              </a:tblPr>
-              <a:tblGrid>
-                <a:gridCol w="4114800"/>
-                <a:gridCol w="2286000"/>
-                <a:gridCol w="1828800"/>
-              </a:tblGrid>
-              <a:tr h="525780">
-                <a:tc>
-                  <a:txBody>
-                    <a:bodyPr/>
-                    <a:lstStyle/>
-                    <a:p>
-                      <a:r>
-                        <a:rPr b="1" sz="1300"/>
-                        <a:t>Worst operating category (mean_wait_minutes)</a:t>
-                      </a:r>
-                    </a:p>
-                  </a:txBody>
-                  <a:tcPr/>
-                </a:tc>
-                <a:tc>
-                  <a:txBody>
-                    <a:bodyPr/>
-                    <a:lstStyle/>
-                    <a:p>
-                      <a:r>
-                        <a:rPr b="1" sz="1300"/>
-                        <a:t>Pooled (standard) CP coverage</a:t>
-                      </a:r>
-                    </a:p>
-                  </a:txBody>
-                  <a:tcPr/>
-                </a:tc>
-                <a:tc>
-                  <a:txBody>
-                    <a:bodyPr/>
-                    <a:lstStyle/>
-                    <a:p>
-                      <a:r>
-                        <a:rPr b="1" sz="1300"/>
-                        <a:t>Mondrian CP coverage</a:t>
-                      </a:r>
-                    </a:p>
-                  </a:txBody>
-                  <a:tcPr/>
-                </a:tc>
-              </a:tr>
-              <a:tr h="525780">
-                <a:tc>
-                  <a:txBody>
-                    <a:bodyPr/>
-                    <a:lstStyle/>
-                    <a:p>
-                      <a:pPr algn="l"/>
-                      <a:r>
-                        <a:rPr sz="1300"/>
-                        <a:t>Understaffed + high arrival-rate</a:t>
-                      </a:r>
-                    </a:p>
-                  </a:txBody>
-                  <a:tcPr/>
-                </a:tc>
-                <a:tc>
-                  <a:txBody>
-                    <a:bodyPr/>
-                    <a:lstStyle/>
-                    <a:p>
-                      <a:pPr algn="ctr"/>
-                      <a:r>
-                        <a:rPr sz="1300"/>
-                        <a:t>68.2%</a:t>
-                      </a:r>
-                    </a:p>
-                  </a:txBody>
-                  <a:tcPr/>
-                </a:tc>
-                <a:tc>
-                  <a:txBody>
-                    <a:bodyPr/>
-                    <a:lstStyle/>
-                    <a:p>
-                      <a:pPr algn="ctr"/>
-                      <a:r>
-                        <a:rPr sz="1300"/>
-                        <a:t>90.9%</a:t>
-                      </a:r>
-                    </a:p>
-                  </a:txBody>
-                  <a:tcPr/>
-                </a:tc>
-              </a:tr>
-            </a:tbl>
-          </a:graphicData>
-        </a:graphic>
-      </p:graphicFrame>
-      <p:sp>
-        <p:nvSpPr>
-          <p:cNvPr id="6" name="TextBox 5"/>
-          <p:cNvSpPr txBox="1"/>
-          <p:nvPr/>
-        </p:nvSpPr>
-        <p:spPr>
-          <a:xfrm>
-            <a:off x="457200" y="5074920"/>
-            <a:ext cx="8229600" cy="1188720"/>
-          </a:xfrm>
-          <a:prstGeom prst="rect">
-            <a:avLst/>
-          </a:prstGeom>
-          <a:noFill/>
-        </p:spPr>
-        <p:txBody>
-          <a:bodyPr wrap="square">
-            <a:spAutoFit/>
-          </a:bodyPr>
-          <a:lstStyle/>
-          <a:p>
-            <a:r>
-              <a:rPr sz="1300"/>
-              <a:t>This is the project's central finding: standard CP's marginal guarantee hides a severe undercoverage failure in exactly the highest-stakes operating regime. Mondrian CP - calibrating separately per staffing x arrival-rate category - closes that gap without sacrificing the marginal guarantee. Confirmed significant (30 repeats, paired t-test, p &lt; 0.001) and replicated at an independent second hospital department (Dept. B).</a:t>
+              <a:t>Literature Review Snapshot</a:t>
+            </a:r>
+          </a:p>
+        </p:txBody>
+      </p:sp>
+      <p:sp>
+        <p:nvSpPr>
+          <p:cNvPr id="3" name="Content Placeholder 2"/>
+          <p:cNvSpPr>
+            <a:spLocks noGrp="1"/>
+          </p:cNvSpPr>
+          <p:nvPr>
+            <p:ph idx="1"/>
+          </p:nvPr>
+        </p:nvSpPr>
+        <p:spPr/>
+        <p:txBody>
+          <a:bodyPr wrap="square"/>
+          <a:lstStyle/>
+          <a:p>
+            <a:pPr/>
+            <a:r>
+              <a:rPr sz="1500"/>
+              <a:t>Completed: 30 papers across 5 categories, 3 reviewed in depth (including Gopakumar et al. 2026).</a:t>
+            </a:r>
+          </a:p>
+          <a:p>
+            <a:pPr lvl="1"/>
+            <a:r>
+              <a:rPr sz="1500"/>
+              <a:t>Conformal prediction foundations: 8 papers</a:t>
+            </a:r>
+          </a:p>
+          <a:p>
+            <a:pPr lvl="1"/>
+            <a:r>
+              <a:rPr sz="1500"/>
+              <a:t>Mondrian / conditional-coverage CP: 4 papers</a:t>
+            </a:r>
+          </a:p>
+          <a:p>
+            <a:pPr lvl="1"/>
+            <a:r>
+              <a:rPr sz="1500"/>
+              <a:t>Surrogate modeling &amp; uncertainty quantification: 6 papers</a:t>
+            </a:r>
+          </a:p>
+          <a:p>
+            <a:pPr lvl="1"/>
+            <a:r>
+              <a:rPr sz="1500"/>
+              <a:t>Queueing theory &amp; ED operations research: 5 papers</a:t>
+            </a:r>
+          </a:p>
+          <a:p>
+            <a:pPr lvl="1"/>
+            <a:r>
+              <a:rPr sz="1500"/>
+              <a:t>Discrete-event simulation &amp; ED-specific ML: 7 papers</a:t>
+            </a:r>
+          </a:p>
+          <a:p>
+            <a:pPr/>
+            <a:r>
+              <a:rPr sz="1500"/>
+              <a:t>Plus 10 additional papers cross-checking the DES's real vs. literature-calibrated service-time parameters against published ED length-of-stay datasets, added after the initial 30-paper review.</a:t>
+            </a:r>
+          </a:p>
+          <a:p>
+            <a:pPr/>
+            <a:r>
+              <a:rPr sz="1500"/>
+              <a:t>Includes a critical assessment section (not just a summary): where the reviewed literature's own assumptions do or don't transfer to a discrete-event queueing domain.</a:t>
             </a:r>
           </a:p>
         </p:txBody>

--- a/slides/mid_sem_presentation.pptx
+++ b/slides/mid_sem_presentation.pptx
@@ -3090,6 +3090,14 @@
 <file path=ppt/slides/slide1.xml><?xml version="1.0" encoding="utf-8"?>
 <p:sld xmlns:a="http://schemas.openxmlformats.org/drawingml/2006/main" xmlns:p="http://schemas.openxmlformats.org/presentationml/2006/main" xmlns:r="http://schemas.openxmlformats.org/officeDocument/2006/relationships">
   <p:cSld>
+    <p:bg>
+      <p:bgPr>
+        <a:solidFill>
+          <a:srgbClr val="1B2238"/>
+        </a:solidFill>
+        <a:effectLst/>
+      </p:bgPr>
+    </p:bg>
     <p:spTree>
       <p:nvGrpSpPr>
         <p:cNvPr id="1" name=""/>
@@ -3118,13 +3126,21 @@
           <a:lstStyle/>
           <a:p>
             <a:r>
-              <a:rPr sz="2600"/>
+              <a:rPr sz="2600" b="1">
+                <a:solidFill>
+                  <a:srgbClr val="FFFFFF"/>
+                </a:solidFill>
+              </a:rPr>
               <a:t>Mondrian Conformal Prediction for Uncertainty Quantification</a:t>
             </a:r>
           </a:p>
           <a:p>
             <a:r>
-              <a:rPr sz="2600"/>
+              <a:rPr sz="2600" b="1">
+                <a:solidFill>
+                  <a:srgbClr val="FFFFFF"/>
+                </a:solidFill>
+              </a:rPr>
               <a:t>in ER Discrete-Event Simulation Surrogates</a:t>
             </a:r>
           </a:p>
@@ -3151,41 +3167,109 @@
           <a:lstStyle/>
           <a:p>
             <a:r>
-              <a:rPr sz="1600"/>
+              <a:rPr sz="1600">
+                <a:solidFill>
+                  <a:srgbClr val="93C5FD"/>
+                </a:solidFill>
+              </a:rPr>
               <a:t>Mid-Semester Review</a:t>
             </a:r>
           </a:p>
           <a:p/>
           <a:p>
             <a:r>
-              <a:rPr sz="1600"/>
+              <a:rPr sz="1600">
+                <a:solidFill>
+                  <a:srgbClr val="93C5FD"/>
+                </a:solidFill>
+              </a:rPr>
               <a:t>G Venugopalan (CB.AI.U4AID25115)</a:t>
             </a:r>
           </a:p>
           <a:p>
             <a:r>
-              <a:rPr sz="1600"/>
+              <a:rPr sz="1600">
+                <a:solidFill>
+                  <a:srgbClr val="93C5FD"/>
+                </a:solidFill>
+              </a:rPr>
               <a:t>Vipin Sudhakar (CB.AI.U4AID25166)</a:t>
             </a:r>
           </a:p>
           <a:p>
             <a:r>
-              <a:rPr sz="1600"/>
+              <a:rPr sz="1600">
+                <a:solidFill>
+                  <a:srgbClr val="93C5FD"/>
+                </a:solidFill>
+              </a:rPr>
               <a:t>Rithvik Arulprakash (CB.AI.U4AID25148)</a:t>
             </a:r>
           </a:p>
           <a:p>
             <a:r>
-              <a:rPr sz="1600"/>
+              <a:rPr sz="1600">
+                <a:solidFill>
+                  <a:srgbClr val="93C5FD"/>
+                </a:solidFill>
+              </a:rPr>
               <a:t>Harshith Kv (CB.AI.U4AID25119)</a:t>
             </a:r>
           </a:p>
           <a:p/>
           <a:p>
             <a:r>
-              <a:rPr sz="1600"/>
+              <a:rPr sz="1600">
+                <a:solidFill>
+                  <a:srgbClr val="93C5FD"/>
+                </a:solidFill>
+              </a:rPr>
               <a:t>Course: 23AID201</a:t>
             </a:r>
+          </a:p>
+        </p:txBody>
+      </p:sp>
+      <p:sp>
+        <p:nvSpPr>
+          <p:cNvPr id="4" name="Rectangle 3"/>
+          <p:cNvSpPr/>
+          <p:nvPr/>
+        </p:nvSpPr>
+        <p:spPr>
+          <a:xfrm>
+            <a:off x="457200" y="2788920"/>
+            <a:ext cx="1280160" cy="44450"/>
+          </a:xfrm>
+          <a:prstGeom prst="rect">
+            <a:avLst/>
+          </a:prstGeom>
+          <a:solidFill>
+            <a:srgbClr val="3B82F6"/>
+          </a:solidFill>
+          <a:ln>
+            <a:noFill/>
+          </a:ln>
+          <a:effectLst/>
+        </p:spPr>
+        <p:style>
+          <a:lnRef idx="1">
+            <a:schemeClr val="accent1"/>
+          </a:lnRef>
+          <a:fillRef idx="3">
+            <a:schemeClr val="accent1"/>
+          </a:fillRef>
+          <a:effectRef idx="2">
+            <a:schemeClr val="accent1"/>
+          </a:effectRef>
+          <a:fontRef idx="minor">
+            <a:schemeClr val="lt1"/>
+          </a:fontRef>
+        </p:style>
+        <p:txBody>
+          <a:bodyPr rtlCol="0" anchor="ctr"/>
+          <a:lstStyle/>
+          <a:p>
+            <a:pPr algn="ctr"/>
           </a:p>
         </p:txBody>
       </p:sp>
@@ -3223,215 +3307,145 @@
           <a:lstStyle/>
           <a:p>
             <a:r>
+              <a:rPr b="1">
+                <a:solidFill>
+                  <a:srgbClr val="1E40AF"/>
+                </a:solidFill>
+              </a:rPr>
               <a:t>Future Scope - End-Sem</a:t>
             </a:r>
           </a:p>
         </p:txBody>
       </p:sp>
-      <p:graphicFrame>
-        <p:nvGraphicFramePr>
-          <p:cNvPr id="3" name="Table 2"/>
-          <p:cNvGraphicFramePr>
-            <a:graphicFrameLocks noGrp="1"/>
-          </p:cNvGraphicFramePr>
+      <p:sp>
+        <p:nvSpPr>
+          <p:cNvPr id="3" name="Content Placeholder 2"/>
+          <p:cNvSpPr>
+            <a:spLocks noGrp="1"/>
+          </p:cNvSpPr>
+          <p:nvPr>
+            <p:ph idx="1"/>
+          </p:nvPr>
+        </p:nvSpPr>
+        <p:spPr/>
+        <p:txBody>
+          <a:bodyPr wrap="square"/>
+          <a:lstStyle/>
+          <a:p>
+            <a:pPr/>
+            <a:r>
+              <a:rPr sz="1800"/>
+              <a:t>Standard conformal prediction on surrogate residuals, using the DES/surrogate pipeline already built and validated in Phase 1.</a:t>
+            </a:r>
+          </a:p>
+          <a:p>
+            <a:pPr/>
+            <a:r>
+              <a:rPr sz="1800"/>
+              <a:t>Mondrian CP - partition calibration by staffing tercile x arrival-rate tercile (9 categories); measure whether per-category coverage holds where the pooled/marginal guarantee doesn't.</a:t>
+            </a:r>
+          </a:p>
+          <a:p>
+            <a:pPr/>
+            <a:r>
+              <a:rPr sz="1800"/>
+              <a:t>Stress-test exchangeability with an out-of-distribution demand-surge scenario; see where standard CP and Mondrian CP hold up or break down.</a:t>
+            </a:r>
+          </a:p>
+          <a:p>
+            <a:pPr/>
+            <a:r>
+              <a:rPr sz="1800"/>
+              <a:t>Full comparison - GP baseline vs. standard CP vs. Mondrian CP on coverage and interval width.</a:t>
+            </a:r>
+          </a:p>
+          <a:p>
+            <a:pPr/>
+            <a:r>
+              <a:rPr sz="1800"/>
+              <a:t>End-sem PPT and report: a quantified answer on whether Mondrian CP closes the marginal-vs-conditional coverage gap in this domain.</a:t>
+            </a:r>
+          </a:p>
+        </p:txBody>
+      </p:sp>
+      <p:sp>
+        <p:nvSpPr>
+          <p:cNvPr id="4" name="Rectangle 3"/>
+          <p:cNvSpPr/>
           <p:nvPr/>
-        </p:nvGraphicFramePr>
-        <p:xfrm>
-          <a:off x="457200" y="1371600"/>
-          <a:ext cx="8229600" cy="4297680"/>
-        </p:xfrm>
-        <a:graphic>
-          <a:graphicData uri="http://schemas.openxmlformats.org/drawingml/2006/table">
-            <a:tbl>
-              <a:tblPr firstRow="1" bandRow="1">
-                <a:tableStyleId>{5C22544A-7EE6-4342-B048-85BDC9FD1C3A}</a:tableStyleId>
-              </a:tblPr>
-              <a:tblGrid>
-                <a:gridCol w="1005840"/>
-                <a:gridCol w="7223760"/>
-              </a:tblGrid>
-              <a:tr h="716280">
-                <a:tc>
-                  <a:txBody>
-                    <a:bodyPr/>
-                    <a:lstStyle/>
-                    <a:p>
-                      <a:r>
-                        <a:rPr b="1" sz="1300"/>
-                        <a:t>Weeks</a:t>
-                      </a:r>
-                    </a:p>
-                  </a:txBody>
-                  <a:tcPr/>
-                </a:tc>
-                <a:tc>
-                  <a:txBody>
-                    <a:bodyPr/>
-                    <a:lstStyle/>
-                    <a:p>
-                      <a:r>
-                        <a:rPr b="1" sz="1300"/>
-                        <a:t>Plan</a:t>
-                      </a:r>
-                    </a:p>
-                  </a:txBody>
-                  <a:tcPr/>
-                </a:tc>
-              </a:tr>
-              <a:tr h="716280">
-                <a:tc>
-                  <a:txBody>
-                    <a:bodyPr/>
-                    <a:lstStyle/>
-                    <a:p>
-                      <a:pPr algn="l"/>
-                      <a:r>
-                        <a:rPr sz="1300"/>
-                        <a:t>9-10</a:t>
-                      </a:r>
-                    </a:p>
-                  </a:txBody>
-                  <a:tcPr/>
-                </a:tc>
-                <a:tc>
-                  <a:txBody>
-                    <a:bodyPr/>
-                    <a:lstStyle/>
-                    <a:p>
-                      <a:pPr algn="ctr"/>
-                      <a:r>
-                        <a:rPr sz="1300"/>
-                        <a:t>Standard conformal prediction on surrogate residuals; try a few different nonconformity measures.</a:t>
-                      </a:r>
-                    </a:p>
-                  </a:txBody>
-                  <a:tcPr/>
-                </a:tc>
-              </a:tr>
-              <a:tr h="716280">
-                <a:tc>
-                  <a:txBody>
-                    <a:bodyPr/>
-                    <a:lstStyle/>
-                    <a:p>
-                      <a:pPr algn="l"/>
-                      <a:r>
-                        <a:rPr sz="1300"/>
-                        <a:t>11-12</a:t>
-                      </a:r>
-                    </a:p>
-                  </a:txBody>
-                  <a:tcPr/>
-                </a:tc>
-                <a:tc>
-                  <a:txBody>
-                    <a:bodyPr/>
-                    <a:lstStyle/>
-                    <a:p>
-                      <a:pPr algn="ctr"/>
-                      <a:r>
-                        <a:rPr sz="1300"/>
-                        <a:t>Mondrian CP - partition by staffing level / shift / arrival-rate category; measure per-category coverage.</a:t>
-                      </a:r>
-                    </a:p>
-                  </a:txBody>
-                  <a:tcPr/>
-                </a:tc>
-              </a:tr>
-              <a:tr h="716280">
-                <a:tc>
-                  <a:txBody>
-                    <a:bodyPr/>
-                    <a:lstStyle/>
-                    <a:p>
-                      <a:pPr algn="l"/>
-                      <a:r>
-                        <a:rPr sz="1300"/>
-                        <a:t>13</a:t>
-                      </a:r>
-                    </a:p>
-                  </a:txBody>
-                  <a:tcPr/>
-                </a:tc>
-                <a:tc>
-                  <a:txBody>
-                    <a:bodyPr/>
-                    <a:lstStyle/>
-                    <a:p>
-                      <a:pPr algn="ctr"/>
-                      <a:r>
-                        <a:rPr sz="1300"/>
-                        <a:t>Stress-test exchangeability with an out-of-distribution "surge day" scenario; see where standard CP and Mondrian CP hold or break.</a:t>
-                      </a:r>
-                    </a:p>
-                  </a:txBody>
-                  <a:tcPr/>
-                </a:tc>
-              </a:tr>
-              <a:tr h="716280">
-                <a:tc>
-                  <a:txBody>
-                    <a:bodyPr/>
-                    <a:lstStyle/>
-                    <a:p>
-                      <a:pPr algn="l"/>
-                      <a:r>
-                        <a:rPr sz="1300"/>
-                        <a:t>14-15</a:t>
-                      </a:r>
-                    </a:p>
-                  </a:txBody>
-                  <a:tcPr/>
-                </a:tc>
-                <a:tc>
-                  <a:txBody>
-                    <a:bodyPr/>
-                    <a:lstStyle/>
-                    <a:p>
-                      <a:pPr algn="ctr"/>
-                      <a:r>
-                        <a:rPr sz="1300"/>
-                        <a:t>Full comparison - GP vs. standard CP vs. Mondrian CP on coverage, interval width, and computation time.</a:t>
-                      </a:r>
-                    </a:p>
-                  </a:txBody>
-                  <a:tcPr/>
-                </a:tc>
-              </a:tr>
-              <a:tr h="716280">
-                <a:tc>
-                  <a:txBody>
-                    <a:bodyPr/>
-                    <a:lstStyle/>
-                    <a:p>
-                      <a:pPr algn="l"/>
-                      <a:r>
-                        <a:rPr sz="1300"/>
-                        <a:t>16</a:t>
-                      </a:r>
-                    </a:p>
-                  </a:txBody>
-                  <a:tcPr/>
-                </a:tc>
-                <a:tc>
-                  <a:txBody>
-                    <a:bodyPr/>
-                    <a:lstStyle/>
-                    <a:p>
-                      <a:pPr algn="ctr"/>
-                      <a:r>
-                        <a:rPr sz="1300"/>
-                        <a:t>End-sem PPT and report: a quantified answer on whether Mondrian CP closes the marginal-vs-conditional coverage gap in this domain.</a:t>
-                      </a:r>
-                    </a:p>
-                  </a:txBody>
-                  <a:tcPr/>
-                </a:tc>
-              </a:tr>
-            </a:tbl>
-          </a:graphicData>
-        </a:graphic>
-      </p:graphicFrame>
+        </p:nvSpPr>
+        <p:spPr>
+          <a:xfrm>
+            <a:off x="457200" y="1170432"/>
+            <a:ext cx="1280160" cy="44450"/>
+          </a:xfrm>
+          <a:prstGeom prst="rect">
+            <a:avLst/>
+          </a:prstGeom>
+          <a:solidFill>
+            <a:srgbClr val="3B82F6"/>
+          </a:solidFill>
+          <a:ln>
+            <a:noFill/>
+          </a:ln>
+          <a:effectLst/>
+        </p:spPr>
+        <p:style>
+          <a:lnRef idx="1">
+            <a:schemeClr val="accent1"/>
+          </a:lnRef>
+          <a:fillRef idx="3">
+            <a:schemeClr val="accent1"/>
+          </a:fillRef>
+          <a:effectRef idx="2">
+            <a:schemeClr val="accent1"/>
+          </a:effectRef>
+          <a:fontRef idx="minor">
+            <a:schemeClr val="lt1"/>
+          </a:fontRef>
+        </p:style>
+        <p:txBody>
+          <a:bodyPr rtlCol="0" anchor="ctr"/>
+          <a:lstStyle/>
+          <a:p>
+            <a:pPr algn="ctr"/>
+          </a:p>
+        </p:txBody>
+      </p:sp>
+      <p:sp>
+        <p:nvSpPr>
+          <p:cNvPr id="5" name="TextBox 4"/>
+          <p:cNvSpPr txBox="1"/>
+          <p:nvPr/>
+        </p:nvSpPr>
+        <p:spPr>
+          <a:xfrm>
+            <a:off x="7955279" y="6446520"/>
+            <a:ext cx="1005840" cy="320040"/>
+          </a:xfrm>
+          <a:prstGeom prst="rect">
+            <a:avLst/>
+          </a:prstGeom>
+          <a:noFill/>
+        </p:spPr>
+        <p:txBody>
+          <a:bodyPr wrap="none">
+            <a:spAutoFit/>
+          </a:bodyPr>
+          <a:lstStyle/>
+          <a:p>
+            <a:pPr algn="r"/>
+            <a:r>
+              <a:rPr sz="900">
+                <a:solidFill>
+                  <a:srgbClr val="6B7280"/>
+                </a:solidFill>
+              </a:rPr>
+              <a:t>23AID201  ·  10/10</a:t>
+            </a:r>
+          </a:p>
+        </p:txBody>
+      </p:sp>
     </p:spTree>
   </p:cSld>
   <p:clrMapOvr>
@@ -3466,6 +3480,11 @@
           <a:lstStyle/>
           <a:p>
             <a:r>
+              <a:rPr b="1">
+                <a:solidFill>
+                  <a:srgbClr val="1E40AF"/>
+                </a:solidFill>
+              </a:rPr>
               <a:t>Problem Statement</a:t>
             </a:r>
           </a:p>
@@ -3525,6 +3544,84 @@
             <a:r>
               <a:rPr sz="1700"/>
               <a:t>That's the question this project is built around: does CP still hold up when the surrogate is trained on a discrete-event / queueing simulation instead of the domains it's been tested on?</a:t>
+            </a:r>
+          </a:p>
+        </p:txBody>
+      </p:sp>
+      <p:sp>
+        <p:nvSpPr>
+          <p:cNvPr id="4" name="Rectangle 3"/>
+          <p:cNvSpPr/>
+          <p:nvPr/>
+        </p:nvSpPr>
+        <p:spPr>
+          <a:xfrm>
+            <a:off x="457200" y="1170432"/>
+            <a:ext cx="1280160" cy="44450"/>
+          </a:xfrm>
+          <a:prstGeom prst="rect">
+            <a:avLst/>
+          </a:prstGeom>
+          <a:solidFill>
+            <a:srgbClr val="3B82F6"/>
+          </a:solidFill>
+          <a:ln>
+            <a:noFill/>
+          </a:ln>
+          <a:effectLst/>
+        </p:spPr>
+        <p:style>
+          <a:lnRef idx="1">
+            <a:schemeClr val="accent1"/>
+          </a:lnRef>
+          <a:fillRef idx="3">
+            <a:schemeClr val="accent1"/>
+          </a:fillRef>
+          <a:effectRef idx="2">
+            <a:schemeClr val="accent1"/>
+          </a:effectRef>
+          <a:fontRef idx="minor">
+            <a:schemeClr val="lt1"/>
+          </a:fontRef>
+        </p:style>
+        <p:txBody>
+          <a:bodyPr rtlCol="0" anchor="ctr"/>
+          <a:lstStyle/>
+          <a:p>
+            <a:pPr algn="ctr"/>
+          </a:p>
+        </p:txBody>
+      </p:sp>
+      <p:sp>
+        <p:nvSpPr>
+          <p:cNvPr id="5" name="TextBox 4"/>
+          <p:cNvSpPr txBox="1"/>
+          <p:nvPr/>
+        </p:nvSpPr>
+        <p:spPr>
+          <a:xfrm>
+            <a:off x="7955279" y="6446520"/>
+            <a:ext cx="1005840" cy="320040"/>
+          </a:xfrm>
+          <a:prstGeom prst="rect">
+            <a:avLst/>
+          </a:prstGeom>
+          <a:noFill/>
+        </p:spPr>
+        <p:txBody>
+          <a:bodyPr wrap="none">
+            <a:spAutoFit/>
+          </a:bodyPr>
+          <a:lstStyle/>
+          <a:p>
+            <a:pPr algn="r"/>
+            <a:r>
+              <a:rPr sz="900">
+                <a:solidFill>
+                  <a:srgbClr val="6B7280"/>
+                </a:solidFill>
+              </a:rPr>
+              <a:t>23AID201  ·  2/10</a:t>
             </a:r>
           </a:p>
         </p:txBody>
@@ -3563,6 +3660,11 @@
           <a:lstStyle/>
           <a:p>
             <a:r>
+              <a:rPr b="1">
+                <a:solidFill>
+                  <a:srgbClr val="1E40AF"/>
+                </a:solidFill>
+              </a:rPr>
               <a:t>Research Gap</a:t>
             </a:r>
           </a:p>
@@ -3615,6 +3717,84 @@
             <a:r>
               <a:rPr sz="1700"/>
               <a:t>Neither of those has been checked outside physics simulation. Discrete-event / queueing systems are a genuinely different kind of domain - discrete stochastic arrivals and departures, resource contention, priority queues - not a continuous PDE field. That's the gap this project sits in.</a:t>
+            </a:r>
+          </a:p>
+        </p:txBody>
+      </p:sp>
+      <p:sp>
+        <p:nvSpPr>
+          <p:cNvPr id="4" name="Rectangle 3"/>
+          <p:cNvSpPr/>
+          <p:nvPr/>
+        </p:nvSpPr>
+        <p:spPr>
+          <a:xfrm>
+            <a:off x="457200" y="1170432"/>
+            <a:ext cx="1280160" cy="44450"/>
+          </a:xfrm>
+          <a:prstGeom prst="rect">
+            <a:avLst/>
+          </a:prstGeom>
+          <a:solidFill>
+            <a:srgbClr val="3B82F6"/>
+          </a:solidFill>
+          <a:ln>
+            <a:noFill/>
+          </a:ln>
+          <a:effectLst/>
+        </p:spPr>
+        <p:style>
+          <a:lnRef idx="1">
+            <a:schemeClr val="accent1"/>
+          </a:lnRef>
+          <a:fillRef idx="3">
+            <a:schemeClr val="accent1"/>
+          </a:fillRef>
+          <a:effectRef idx="2">
+            <a:schemeClr val="accent1"/>
+          </a:effectRef>
+          <a:fontRef idx="minor">
+            <a:schemeClr val="lt1"/>
+          </a:fontRef>
+        </p:style>
+        <p:txBody>
+          <a:bodyPr rtlCol="0" anchor="ctr"/>
+          <a:lstStyle/>
+          <a:p>
+            <a:pPr algn="ctr"/>
+          </a:p>
+        </p:txBody>
+      </p:sp>
+      <p:sp>
+        <p:nvSpPr>
+          <p:cNvPr id="5" name="TextBox 4"/>
+          <p:cNvSpPr txBox="1"/>
+          <p:nvPr/>
+        </p:nvSpPr>
+        <p:spPr>
+          <a:xfrm>
+            <a:off x="7955279" y="6446520"/>
+            <a:ext cx="1005840" cy="320040"/>
+          </a:xfrm>
+          <a:prstGeom prst="rect">
+            <a:avLst/>
+          </a:prstGeom>
+          <a:noFill/>
+        </p:spPr>
+        <p:txBody>
+          <a:bodyPr wrap="none">
+            <a:spAutoFit/>
+          </a:bodyPr>
+          <a:lstStyle/>
+          <a:p>
+            <a:pPr algn="r"/>
+            <a:r>
+              <a:rPr sz="900">
+                <a:solidFill>
+                  <a:srgbClr val="6B7280"/>
+                </a:solidFill>
+              </a:rPr>
+              <a:t>23AID201  ·  3/10</a:t>
             </a:r>
           </a:p>
         </p:txBody>
@@ -3653,6 +3833,11 @@
           <a:lstStyle/>
           <a:p>
             <a:r>
+              <a:rPr b="1">
+                <a:solidFill>
+                  <a:srgbClr val="1E40AF"/>
+                </a:solidFill>
+              </a:rPr>
               <a:t>Our Bridging Approach</a:t>
             </a:r>
           </a:p>
@@ -3688,7 +3873,7 @@
             <a:pPr lvl="1"/>
             <a:r>
               <a:rPr sz="1300"/>
-              <a:t>Mondrian CP partitions calibration by category - staffing level, shift, arrival-rate regime - instead of lumping everything into one marginal guarantee.</a:t>
+              <a:t>Mondrian CP partitions calibration by category - staffing tercile x arrival-rate tercile - instead of lumping everything into one marginal guarantee.</a:t>
             </a:r>
           </a:p>
           <a:p>
@@ -3744,7 +3929,85 @@
       </p:sp>
       <p:sp>
         <p:nvSpPr>
-          <p:cNvPr id="5" name="TextBox 4"/>
+          <p:cNvPr id="5" name="Rectangle 4"/>
+          <p:cNvSpPr/>
+          <p:nvPr/>
+        </p:nvSpPr>
+        <p:spPr>
+          <a:xfrm>
+            <a:off x="457200" y="1170432"/>
+            <a:ext cx="1280160" cy="44450"/>
+          </a:xfrm>
+          <a:prstGeom prst="rect">
+            <a:avLst/>
+          </a:prstGeom>
+          <a:solidFill>
+            <a:srgbClr val="3B82F6"/>
+          </a:solidFill>
+          <a:ln>
+            <a:noFill/>
+          </a:ln>
+          <a:effectLst/>
+        </p:spPr>
+        <p:style>
+          <a:lnRef idx="1">
+            <a:schemeClr val="accent1"/>
+          </a:lnRef>
+          <a:fillRef idx="3">
+            <a:schemeClr val="accent1"/>
+          </a:fillRef>
+          <a:effectRef idx="2">
+            <a:schemeClr val="accent1"/>
+          </a:effectRef>
+          <a:fontRef idx="minor">
+            <a:schemeClr val="lt1"/>
+          </a:fontRef>
+        </p:style>
+        <p:txBody>
+          <a:bodyPr rtlCol="0" anchor="ctr"/>
+          <a:lstStyle/>
+          <a:p>
+            <a:pPr algn="ctr"/>
+          </a:p>
+        </p:txBody>
+      </p:sp>
+      <p:sp>
+        <p:nvSpPr>
+          <p:cNvPr id="6" name="TextBox 5"/>
+          <p:cNvSpPr txBox="1"/>
+          <p:nvPr/>
+        </p:nvSpPr>
+        <p:spPr>
+          <a:xfrm>
+            <a:off x="7955279" y="6446520"/>
+            <a:ext cx="1005840" cy="320040"/>
+          </a:xfrm>
+          <a:prstGeom prst="rect">
+            <a:avLst/>
+          </a:prstGeom>
+          <a:noFill/>
+        </p:spPr>
+        <p:txBody>
+          <a:bodyPr wrap="none">
+            <a:spAutoFit/>
+          </a:bodyPr>
+          <a:lstStyle/>
+          <a:p>
+            <a:pPr algn="r"/>
+            <a:r>
+              <a:rPr sz="900">
+                <a:solidFill>
+                  <a:srgbClr val="6B7280"/>
+                </a:solidFill>
+              </a:rPr>
+              <a:t>23AID201  ·  4/10</a:t>
+            </a:r>
+          </a:p>
+        </p:txBody>
+      </p:sp>
+      <p:sp>
+        <p:nvSpPr>
+          <p:cNvPr id="7" name="TextBox 6"/>
           <p:cNvSpPr txBox="1"/>
           <p:nvPr/>
         </p:nvSpPr>
@@ -3809,6 +4072,11 @@
           <a:lstStyle/>
           <a:p>
             <a:r>
+              <a:rPr b="1">
+                <a:solidFill>
+                  <a:srgbClr val="1E40AF"/>
+                </a:solidFill>
+              </a:rPr>
               <a:t>Methodology Overview</a:t>
             </a:r>
           </a:p>
@@ -3817,6 +4085,84 @@
       <p:sp>
         <p:nvSpPr>
           <p:cNvPr id="3" name="Rectangle 2"/>
+          <p:cNvSpPr/>
+          <p:nvPr/>
+        </p:nvSpPr>
+        <p:spPr>
+          <a:xfrm>
+            <a:off x="457200" y="1170432"/>
+            <a:ext cx="1280160" cy="44450"/>
+          </a:xfrm>
+          <a:prstGeom prst="rect">
+            <a:avLst/>
+          </a:prstGeom>
+          <a:solidFill>
+            <a:srgbClr val="3B82F6"/>
+          </a:solidFill>
+          <a:ln>
+            <a:noFill/>
+          </a:ln>
+          <a:effectLst/>
+        </p:spPr>
+        <p:style>
+          <a:lnRef idx="1">
+            <a:schemeClr val="accent1"/>
+          </a:lnRef>
+          <a:fillRef idx="3">
+            <a:schemeClr val="accent1"/>
+          </a:fillRef>
+          <a:effectRef idx="2">
+            <a:schemeClr val="accent1"/>
+          </a:effectRef>
+          <a:fontRef idx="minor">
+            <a:schemeClr val="lt1"/>
+          </a:fontRef>
+        </p:style>
+        <p:txBody>
+          <a:bodyPr rtlCol="0" anchor="ctr"/>
+          <a:lstStyle/>
+          <a:p>
+            <a:pPr algn="ctr"/>
+          </a:p>
+        </p:txBody>
+      </p:sp>
+      <p:sp>
+        <p:nvSpPr>
+          <p:cNvPr id="4" name="TextBox 3"/>
+          <p:cNvSpPr txBox="1"/>
+          <p:nvPr/>
+        </p:nvSpPr>
+        <p:spPr>
+          <a:xfrm>
+            <a:off x="7955279" y="6446520"/>
+            <a:ext cx="1005840" cy="320040"/>
+          </a:xfrm>
+          <a:prstGeom prst="rect">
+            <a:avLst/>
+          </a:prstGeom>
+          <a:noFill/>
+        </p:spPr>
+        <p:txBody>
+          <a:bodyPr wrap="none">
+            <a:spAutoFit/>
+          </a:bodyPr>
+          <a:lstStyle/>
+          <a:p>
+            <a:pPr algn="r"/>
+            <a:r>
+              <a:rPr sz="900">
+                <a:solidFill>
+                  <a:srgbClr val="6B7280"/>
+                </a:solidFill>
+              </a:rPr>
+              <a:t>23AID201  ·  5/10</a:t>
+            </a:r>
+          </a:p>
+        </p:txBody>
+      </p:sp>
+      <p:sp>
+        <p:nvSpPr>
+          <p:cNvPr id="5" name="Rectangle 4"/>
           <p:cNvSpPr/>
           <p:nvPr/>
         </p:nvSpPr>
@@ -3881,7 +4227,7 @@
       </p:sp>
       <p:sp>
         <p:nvSpPr>
-          <p:cNvPr id="4" name="Rectangle 3"/>
+          <p:cNvPr id="6" name="Rectangle 5"/>
           <p:cNvSpPr/>
           <p:nvPr/>
         </p:nvSpPr>
@@ -3945,7 +4291,7 @@
       </p:sp>
       <p:sp>
         <p:nvSpPr>
-          <p:cNvPr id="5" name="Rectangle 4"/>
+          <p:cNvPr id="7" name="Rectangle 6"/>
           <p:cNvSpPr/>
           <p:nvPr/>
         </p:nvSpPr>
@@ -4010,7 +4356,7 @@
       </p:sp>
       <p:cxnSp>
         <p:nvCxnSpPr>
-          <p:cNvPr id="6" name="Connector 5"/>
+          <p:cNvPr id="8" name="Connector 7"/>
           <p:cNvCxnSpPr/>
           <p:nvPr/>
         </p:nvCxnSpPr>
@@ -4045,7 +4391,7 @@
       </p:cxnSp>
       <p:cxnSp>
         <p:nvCxnSpPr>
-          <p:cNvPr id="7" name="Connector 6"/>
+          <p:cNvPr id="9" name="Connector 8"/>
           <p:cNvCxnSpPr/>
           <p:nvPr/>
         </p:nvCxnSpPr>
@@ -4080,7 +4426,7 @@
       </p:cxnSp>
       <p:sp>
         <p:nvSpPr>
-          <p:cNvPr id="8" name="TextBox 7"/>
+          <p:cNvPr id="10" name="TextBox 9"/>
           <p:cNvSpPr txBox="1"/>
           <p:nvPr/>
         </p:nvSpPr>
@@ -4162,6 +4508,11 @@
           <a:lstStyle/>
           <a:p>
             <a:r>
+              <a:rPr b="1">
+                <a:solidFill>
+                  <a:srgbClr val="1E40AF"/>
+                </a:solidFill>
+              </a:rPr>
               <a:t>Real-World Data Used</a:t>
             </a:r>
           </a:p>
@@ -4214,6 +4565,84 @@
             <a:r>
               <a:rPr sz="1600"/>
               <a:t>From literature: service/treatment time per ESI level (log-normal). The dataset has no discharge timestamp - checked across all 972 columns to be sure before falling back to literature values.</a:t>
+            </a:r>
+          </a:p>
+        </p:txBody>
+      </p:sp>
+      <p:sp>
+        <p:nvSpPr>
+          <p:cNvPr id="4" name="Rectangle 3"/>
+          <p:cNvSpPr/>
+          <p:nvPr/>
+        </p:nvSpPr>
+        <p:spPr>
+          <a:xfrm>
+            <a:off x="457200" y="1170432"/>
+            <a:ext cx="1280160" cy="44450"/>
+          </a:xfrm>
+          <a:prstGeom prst="rect">
+            <a:avLst/>
+          </a:prstGeom>
+          <a:solidFill>
+            <a:srgbClr val="3B82F6"/>
+          </a:solidFill>
+          <a:ln>
+            <a:noFill/>
+          </a:ln>
+          <a:effectLst/>
+        </p:spPr>
+        <p:style>
+          <a:lnRef idx="1">
+            <a:schemeClr val="accent1"/>
+          </a:lnRef>
+          <a:fillRef idx="3">
+            <a:schemeClr val="accent1"/>
+          </a:fillRef>
+          <a:effectRef idx="2">
+            <a:schemeClr val="accent1"/>
+          </a:effectRef>
+          <a:fontRef idx="minor">
+            <a:schemeClr val="lt1"/>
+          </a:fontRef>
+        </p:style>
+        <p:txBody>
+          <a:bodyPr rtlCol="0" anchor="ctr"/>
+          <a:lstStyle/>
+          <a:p>
+            <a:pPr algn="ctr"/>
+          </a:p>
+        </p:txBody>
+      </p:sp>
+      <p:sp>
+        <p:nvSpPr>
+          <p:cNvPr id="5" name="TextBox 4"/>
+          <p:cNvSpPr txBox="1"/>
+          <p:nvPr/>
+        </p:nvSpPr>
+        <p:spPr>
+          <a:xfrm>
+            <a:off x="7955279" y="6446520"/>
+            <a:ext cx="1005840" cy="320040"/>
+          </a:xfrm>
+          <a:prstGeom prst="rect">
+            <a:avLst/>
+          </a:prstGeom>
+          <a:noFill/>
+        </p:spPr>
+        <p:txBody>
+          <a:bodyPr wrap="none">
+            <a:spAutoFit/>
+          </a:bodyPr>
+          <a:lstStyle/>
+          <a:p>
+            <a:pPr algn="r"/>
+            <a:r>
+              <a:rPr sz="900">
+                <a:solidFill>
+                  <a:srgbClr val="6B7280"/>
+                </a:solidFill>
+              </a:rPr>
+              <a:t>23AID201  ·  6/10</a:t>
             </a:r>
           </a:p>
         </p:txBody>
@@ -4252,15 +4681,97 @@
           <a:lstStyle/>
           <a:p>
             <a:r>
-              <a:rPr sz="3200"/>
+              <a:rPr b="1" sz="3200">
+                <a:solidFill>
+                  <a:srgbClr val="1E40AF"/>
+                </a:solidFill>
+              </a:rPr>
               <a:t>Work Completed So Far (~50%)</a:t>
+            </a:r>
+          </a:p>
+        </p:txBody>
+      </p:sp>
+      <p:sp>
+        <p:nvSpPr>
+          <p:cNvPr id="3" name="Rectangle 2"/>
+          <p:cNvSpPr/>
+          <p:nvPr/>
+        </p:nvSpPr>
+        <p:spPr>
+          <a:xfrm>
+            <a:off x="457200" y="1170432"/>
+            <a:ext cx="1280160" cy="44450"/>
+          </a:xfrm>
+          <a:prstGeom prst="rect">
+            <a:avLst/>
+          </a:prstGeom>
+          <a:solidFill>
+            <a:srgbClr val="3B82F6"/>
+          </a:solidFill>
+          <a:ln>
+            <a:noFill/>
+          </a:ln>
+          <a:effectLst/>
+        </p:spPr>
+        <p:style>
+          <a:lnRef idx="1">
+            <a:schemeClr val="accent1"/>
+          </a:lnRef>
+          <a:fillRef idx="3">
+            <a:schemeClr val="accent1"/>
+          </a:fillRef>
+          <a:effectRef idx="2">
+            <a:schemeClr val="accent1"/>
+          </a:effectRef>
+          <a:fontRef idx="minor">
+            <a:schemeClr val="lt1"/>
+          </a:fontRef>
+        </p:style>
+        <p:txBody>
+          <a:bodyPr rtlCol="0" anchor="ctr"/>
+          <a:lstStyle/>
+          <a:p>
+            <a:pPr algn="ctr"/>
+          </a:p>
+        </p:txBody>
+      </p:sp>
+      <p:sp>
+        <p:nvSpPr>
+          <p:cNvPr id="4" name="TextBox 3"/>
+          <p:cNvSpPr txBox="1"/>
+          <p:nvPr/>
+        </p:nvSpPr>
+        <p:spPr>
+          <a:xfrm>
+            <a:off x="7955279" y="6446520"/>
+            <a:ext cx="1005840" cy="320040"/>
+          </a:xfrm>
+          <a:prstGeom prst="rect">
+            <a:avLst/>
+          </a:prstGeom>
+          <a:noFill/>
+        </p:spPr>
+        <p:txBody>
+          <a:bodyPr wrap="none">
+            <a:spAutoFit/>
+          </a:bodyPr>
+          <a:lstStyle/>
+          <a:p>
+            <a:pPr algn="r"/>
+            <a:r>
+              <a:rPr sz="900">
+                <a:solidFill>
+                  <a:srgbClr val="6B7280"/>
+                </a:solidFill>
+              </a:rPr>
+              <a:t>23AID201  ·  7/10</a:t>
             </a:r>
           </a:p>
         </p:txBody>
       </p:sp>
       <p:graphicFrame>
         <p:nvGraphicFramePr>
-          <p:cNvPr id="3" name="Table 2"/>
+          <p:cNvPr id="5" name="Table 4"/>
           <p:cNvGraphicFramePr>
             <a:graphicFrameLocks noGrp="1"/>
           </p:cNvGraphicFramePr>
@@ -4287,12 +4798,20 @@
                     <a:lstStyle/>
                     <a:p>
                       <a:r>
-                        <a:rPr b="1" sz="1200"/>
+                        <a:rPr b="1" sz="1200">
+                          <a:solidFill>
+                            <a:srgbClr val="FFFFFF"/>
+                          </a:solidFill>
+                        </a:rPr>
                         <a:t>DES validation (200 sim. days)</a:t>
                       </a:r>
                     </a:p>
                   </a:txBody>
-                  <a:tcPr/>
+                  <a:tcPr>
+                    <a:solidFill>
+                      <a:srgbClr val="1E40AF"/>
+                    </a:solidFill>
+                  </a:tcPr>
                 </a:tc>
                 <a:tc>
                   <a:txBody>
@@ -4300,7 +4819,11 @@
                     <a:lstStyle/>
                     <a:p/>
                   </a:txBody>
-                  <a:tcPr/>
+                  <a:tcPr>
+                    <a:solidFill>
+                      <a:srgbClr val="1E40AF"/>
+                    </a:solidFill>
+                  </a:tcPr>
                 </a:tc>
               </a:tr>
               <a:tr h="251460">
@@ -4399,7 +4922,7 @@
       </p:graphicFrame>
       <p:graphicFrame>
         <p:nvGraphicFramePr>
-          <p:cNvPr id="4" name="Table 3"/>
+          <p:cNvPr id="6" name="Table 5"/>
           <p:cNvGraphicFramePr>
             <a:graphicFrameLocks noGrp="1"/>
           </p:cNvGraphicFramePr>
@@ -4428,12 +4951,20 @@
                     <a:lstStyle/>
                     <a:p>
                       <a:r>
-                        <a:rPr b="1" sz="1100"/>
+                        <a:rPr b="1" sz="1100">
+                          <a:solidFill>
+                            <a:srgbClr val="FFFFFF"/>
+                          </a:solidFill>
+                        </a:rPr>
                         <a:t>Surrogate target</a:t>
                       </a:r>
                     </a:p>
                   </a:txBody>
-                  <a:tcPr/>
+                  <a:tcPr>
+                    <a:solidFill>
+                      <a:srgbClr val="1E40AF"/>
+                    </a:solidFill>
+                  </a:tcPr>
                 </a:tc>
                 <a:tc>
                   <a:txBody>
@@ -4441,12 +4972,20 @@
                     <a:lstStyle/>
                     <a:p>
                       <a:r>
-                        <a:rPr b="1" sz="1100"/>
+                        <a:rPr b="1" sz="1100">
+                          <a:solidFill>
+                            <a:srgbClr val="FFFFFF"/>
+                          </a:solidFill>
+                        </a:rPr>
                         <a:t>MAE</a:t>
                       </a:r>
                     </a:p>
                   </a:txBody>
-                  <a:tcPr/>
+                  <a:tcPr>
+                    <a:solidFill>
+                      <a:srgbClr val="1E40AF"/>
+                    </a:solidFill>
+                  </a:tcPr>
                 </a:tc>
                 <a:tc>
                   <a:txBody>
@@ -4454,12 +4993,20 @@
                     <a:lstStyle/>
                     <a:p>
                       <a:r>
-                        <a:rPr b="1" sz="1100"/>
+                        <a:rPr b="1" sz="1100">
+                          <a:solidFill>
+                            <a:srgbClr val="FFFFFF"/>
+                          </a:solidFill>
+                        </a:rPr>
                         <a:t>RMSE</a:t>
                       </a:r>
                     </a:p>
                   </a:txBody>
-                  <a:tcPr/>
+                  <a:tcPr>
+                    <a:solidFill>
+                      <a:srgbClr val="1E40AF"/>
+                    </a:solidFill>
+                  </a:tcPr>
                 </a:tc>
                 <a:tc>
                   <a:txBody>
@@ -4467,12 +5014,20 @@
                     <a:lstStyle/>
                     <a:p>
                       <a:r>
-                        <a:rPr b="1" sz="1100"/>
+                        <a:rPr b="1" sz="1100">
+                          <a:solidFill>
+                            <a:srgbClr val="FFFFFF"/>
+                          </a:solidFill>
+                        </a:rPr>
                         <a:t>R²</a:t>
                       </a:r>
                     </a:p>
                   </a:txBody>
-                  <a:tcPr/>
+                  <a:tcPr>
+                    <a:solidFill>
+                      <a:srgbClr val="1E40AF"/>
+                    </a:solidFill>
+                  </a:tcPr>
                 </a:tc>
               </a:tr>
               <a:tr h="283464">
@@ -4713,7 +5268,7 @@
       </p:graphicFrame>
       <p:graphicFrame>
         <p:nvGraphicFramePr>
-          <p:cNvPr id="5" name="Table 4"/>
+          <p:cNvPr id="7" name="Table 6"/>
           <p:cNvGraphicFramePr>
             <a:graphicFrameLocks noGrp="1"/>
           </p:cNvGraphicFramePr>
@@ -4742,12 +5297,20 @@
                     <a:lstStyle/>
                     <a:p>
                       <a:r>
-                        <a:rPr b="1" sz="1200"/>
+                        <a:rPr b="1" sz="1200">
+                          <a:solidFill>
+                            <a:srgbClr val="FFFFFF"/>
+                          </a:solidFill>
+                        </a:rPr>
                         <a:t>GP baseline (alpha = 0.1)</a:t>
                       </a:r>
                     </a:p>
                   </a:txBody>
-                  <a:tcPr/>
+                  <a:tcPr>
+                    <a:solidFill>
+                      <a:srgbClr val="1E40AF"/>
+                    </a:solidFill>
+                  </a:tcPr>
                 </a:tc>
                 <a:tc>
                   <a:txBody>
@@ -4755,12 +5318,20 @@
                     <a:lstStyle/>
                     <a:p>
                       <a:r>
-                        <a:rPr b="1" sz="1200"/>
+                        <a:rPr b="1" sz="1200">
+                          <a:solidFill>
+                            <a:srgbClr val="FFFFFF"/>
+                          </a:solidFill>
+                        </a:rPr>
                         <a:t>Target coverage</a:t>
                       </a:r>
                     </a:p>
                   </a:txBody>
-                  <a:tcPr/>
+                  <a:tcPr>
+                    <a:solidFill>
+                      <a:srgbClr val="1E40AF"/>
+                    </a:solidFill>
+                  </a:tcPr>
                 </a:tc>
                 <a:tc>
                   <a:txBody>
@@ -4768,12 +5339,20 @@
                     <a:lstStyle/>
                     <a:p>
                       <a:r>
-                        <a:rPr b="1" sz="1200"/>
+                        <a:rPr b="1" sz="1200">
+                          <a:solidFill>
+                            <a:srgbClr val="FFFFFF"/>
+                          </a:solidFill>
+                        </a:rPr>
                         <a:t>Empirical coverage</a:t>
                       </a:r>
                     </a:p>
                   </a:txBody>
-                  <a:tcPr/>
+                  <a:tcPr>
+                    <a:solidFill>
+                      <a:srgbClr val="1E40AF"/>
+                    </a:solidFill>
+                  </a:tcPr>
                 </a:tc>
                 <a:tc>
                   <a:txBody>
@@ -4781,12 +5360,20 @@
                     <a:lstStyle/>
                     <a:p>
                       <a:r>
-                        <a:rPr b="1" sz="1200"/>
+                        <a:rPr b="1" sz="1200">
+                          <a:solidFill>
+                            <a:srgbClr val="FFFFFF"/>
+                          </a:solidFill>
+                        </a:rPr>
                         <a:t>Mean interval width</a:t>
                       </a:r>
                     </a:p>
                   </a:txBody>
-                  <a:tcPr/>
+                  <a:tcPr>
+                    <a:solidFill>
+                      <a:srgbClr val="1E40AF"/>
+                    </a:solidFill>
+                  </a:tcPr>
                 </a:tc>
               </a:tr>
               <a:tr h="310896">
@@ -5027,7 +5614,7 @@
       </p:graphicFrame>
       <p:sp>
         <p:nvSpPr>
-          <p:cNvPr id="6" name="TextBox 5"/>
+          <p:cNvPr id="8" name="TextBox 7"/>
           <p:cNvSpPr txBox="1"/>
           <p:nvPr/>
         </p:nvSpPr>
@@ -5088,15 +5675,97 @@
           <a:lstStyle/>
           <a:p>
             <a:r>
-              <a:rPr sz="3200"/>
+              <a:rPr b="1" sz="3200">
+                <a:solidFill>
+                  <a:srgbClr val="1E40AF"/>
+                </a:solidFill>
+              </a:rPr>
               <a:t>The Discrete-Event Simulation</a:t>
+            </a:r>
+          </a:p>
+        </p:txBody>
+      </p:sp>
+      <p:sp>
+        <p:nvSpPr>
+          <p:cNvPr id="3" name="Rectangle 2"/>
+          <p:cNvSpPr/>
+          <p:nvPr/>
+        </p:nvSpPr>
+        <p:spPr>
+          <a:xfrm>
+            <a:off x="457200" y="1170432"/>
+            <a:ext cx="1280160" cy="44450"/>
+          </a:xfrm>
+          <a:prstGeom prst="rect">
+            <a:avLst/>
+          </a:prstGeom>
+          <a:solidFill>
+            <a:srgbClr val="3B82F6"/>
+          </a:solidFill>
+          <a:ln>
+            <a:noFill/>
+          </a:ln>
+          <a:effectLst/>
+        </p:spPr>
+        <p:style>
+          <a:lnRef idx="1">
+            <a:schemeClr val="accent1"/>
+          </a:lnRef>
+          <a:fillRef idx="3">
+            <a:schemeClr val="accent1"/>
+          </a:fillRef>
+          <a:effectRef idx="2">
+            <a:schemeClr val="accent1"/>
+          </a:effectRef>
+          <a:fontRef idx="minor">
+            <a:schemeClr val="lt1"/>
+          </a:fontRef>
+        </p:style>
+        <p:txBody>
+          <a:bodyPr rtlCol="0" anchor="ctr"/>
+          <a:lstStyle/>
+          <a:p>
+            <a:pPr algn="ctr"/>
+          </a:p>
+        </p:txBody>
+      </p:sp>
+      <p:sp>
+        <p:nvSpPr>
+          <p:cNvPr id="4" name="TextBox 3"/>
+          <p:cNvSpPr txBox="1"/>
+          <p:nvPr/>
+        </p:nvSpPr>
+        <p:spPr>
+          <a:xfrm>
+            <a:off x="7955279" y="6446520"/>
+            <a:ext cx="1005840" cy="320040"/>
+          </a:xfrm>
+          <a:prstGeom prst="rect">
+            <a:avLst/>
+          </a:prstGeom>
+          <a:noFill/>
+        </p:spPr>
+        <p:txBody>
+          <a:bodyPr wrap="none">
+            <a:spAutoFit/>
+          </a:bodyPr>
+          <a:lstStyle/>
+          <a:p>
+            <a:pPr algn="r"/>
+            <a:r>
+              <a:rPr sz="900">
+                <a:solidFill>
+                  <a:srgbClr val="6B7280"/>
+                </a:solidFill>
+              </a:rPr>
+              <a:t>23AID201  ·  8/10</a:t>
             </a:r>
           </a:p>
         </p:txBody>
       </p:sp>
       <p:pic>
         <p:nvPicPr>
-          <p:cNvPr id="3" name="Picture 2" descr="real_arrivals_by_hour.png"/>
+          <p:cNvPr id="5" name="Picture 4" descr="real_arrivals_by_hour.png"/>
           <p:cNvPicPr>
             <a:picLocks noChangeAspect="1"/>
           </p:cNvPicPr>
@@ -5120,7 +5789,7 @@
       </p:pic>
       <p:sp>
         <p:nvSpPr>
-          <p:cNvPr id="4" name="TextBox 3"/>
+          <p:cNvPr id="6" name="TextBox 5"/>
           <p:cNvSpPr txBox="1"/>
           <p:nvPr/>
         </p:nvSpPr>
@@ -5193,6 +5862,11 @@
           <a:lstStyle/>
           <a:p>
             <a:r>
+              <a:rPr b="1">
+                <a:solidFill>
+                  <a:srgbClr val="1E40AF"/>
+                </a:solidFill>
+              </a:rPr>
               <a:t>Literature Review Snapshot</a:t>
             </a:r>
           </a:p>
@@ -5216,14 +5890,14 @@
             <a:pPr/>
             <a:r>
               <a:rPr sz="1500"/>
-              <a:t>Completed: 30 papers across 5 categories, 3 reviewed in depth (including Gopakumar et al. 2026).</a:t>
+              <a:t>Focused core review: 20 papers across 5 categories, 3 reviewed in depth (including Gopakumar et al. 2026), plus 10 real-dataset papers below.</a:t>
             </a:r>
           </a:p>
           <a:p>
             <a:pPr lvl="1"/>
             <a:r>
               <a:rPr sz="1500"/>
-              <a:t>Conformal prediction foundations: 8 papers</a:t>
+              <a:t>Conformal prediction foundations: 5 papers</a:t>
             </a:r>
           </a:p>
           <a:p>
@@ -5237,35 +5911,113 @@
             <a:pPr lvl="1"/>
             <a:r>
               <a:rPr sz="1500"/>
-              <a:t>Surrogate modeling &amp; uncertainty quantification: 6 papers</a:t>
+              <a:t>Surrogate modeling &amp; uncertainty quantification: 4 papers</a:t>
             </a:r>
           </a:p>
           <a:p>
             <a:pPr lvl="1"/>
             <a:r>
               <a:rPr sz="1500"/>
-              <a:t>Queueing theory &amp; ED operations research: 5 papers</a:t>
+              <a:t>Queueing theory &amp; ED operations research: 3 papers</a:t>
             </a:r>
           </a:p>
           <a:p>
             <a:pPr lvl="1"/>
             <a:r>
               <a:rPr sz="1500"/>
-              <a:t>Discrete-event simulation &amp; ED-specific ML: 7 papers</a:t>
+              <a:t>Discrete-event simulation &amp; ED-specific ML: 4 papers</a:t>
             </a:r>
           </a:p>
           <a:p>
             <a:pPr/>
             <a:r>
               <a:rPr sz="1500"/>
-              <a:t>Plus 10 additional papers cross-checking the DES's real vs. literature-calibrated service-time parameters against published ED length-of-stay datasets, added after the initial 30-paper review.</a:t>
+              <a:t>Plus 10 papers each reporting real ED service-time / length-of-stay data from their own hospital datasets, used to cross-check this project's own DES calibration numerically, not just cite them.</a:t>
             </a:r>
           </a:p>
           <a:p>
             <a:pPr/>
             <a:r>
               <a:rPr sz="1500"/>
-              <a:t>Includes a critical assessment section (not just a summary): where the reviewed literature's own assumptions do or don't transfer to a discrete-event queueing domain.</a:t>
+              <a:t>Includes a critical assessment: where the reviewed literature's own assumptions do or don't transfer to a discrete-event queueing domain.</a:t>
+            </a:r>
+          </a:p>
+        </p:txBody>
+      </p:sp>
+      <p:sp>
+        <p:nvSpPr>
+          <p:cNvPr id="4" name="Rectangle 3"/>
+          <p:cNvSpPr/>
+          <p:nvPr/>
+        </p:nvSpPr>
+        <p:spPr>
+          <a:xfrm>
+            <a:off x="457200" y="1170432"/>
+            <a:ext cx="1280160" cy="44450"/>
+          </a:xfrm>
+          <a:prstGeom prst="rect">
+            <a:avLst/>
+          </a:prstGeom>
+          <a:solidFill>
+            <a:srgbClr val="3B82F6"/>
+          </a:solidFill>
+          <a:ln>
+            <a:noFill/>
+          </a:ln>
+          <a:effectLst/>
+        </p:spPr>
+        <p:style>
+          <a:lnRef idx="1">
+            <a:schemeClr val="accent1"/>
+          </a:lnRef>
+          <a:fillRef idx="3">
+            <a:schemeClr val="accent1"/>
+          </a:fillRef>
+          <a:effectRef idx="2">
+            <a:schemeClr val="accent1"/>
+          </a:effectRef>
+          <a:fontRef idx="minor">
+            <a:schemeClr val="lt1"/>
+          </a:fontRef>
+        </p:style>
+        <p:txBody>
+          <a:bodyPr rtlCol="0" anchor="ctr"/>
+          <a:lstStyle/>
+          <a:p>
+            <a:pPr algn="ctr"/>
+          </a:p>
+        </p:txBody>
+      </p:sp>
+      <p:sp>
+        <p:nvSpPr>
+          <p:cNvPr id="5" name="TextBox 4"/>
+          <p:cNvSpPr txBox="1"/>
+          <p:nvPr/>
+        </p:nvSpPr>
+        <p:spPr>
+          <a:xfrm>
+            <a:off x="7955279" y="6446520"/>
+            <a:ext cx="1005840" cy="320040"/>
+          </a:xfrm>
+          <a:prstGeom prst="rect">
+            <a:avLst/>
+          </a:prstGeom>
+          <a:noFill/>
+        </p:spPr>
+        <p:txBody>
+          <a:bodyPr wrap="none">
+            <a:spAutoFit/>
+          </a:bodyPr>
+          <a:lstStyle/>
+          <a:p>
+            <a:pPr algn="r"/>
+            <a:r>
+              <a:rPr sz="900">
+                <a:solidFill>
+                  <a:srgbClr val="6B7280"/>
+                </a:solidFill>
+              </a:rPr>
+              <a:t>23AID201  ·  9/10</a:t>
             </a:r>
           </a:p>
         </p:txBody>

--- a/slides/mid_sem_presentation.pptx
+++ b/slides/mid_sem_presentation.pptx
@@ -15,6 +15,9 @@
     <p:sldId id="263" r:id="rId14"/>
     <p:sldId id="264" r:id="rId15"/>
     <p:sldId id="265" r:id="rId16"/>
+    <p:sldId id="266" r:id="rId17"/>
+    <p:sldId id="267" r:id="rId18"/>
+    <p:sldId id="268" r:id="rId19"/>
   </p:sldIdLst>
   <p:sldSz cx="9144000" cy="6858000" type="screen4x3"/>
   <p:notesSz cx="6858000" cy="9144000"/>
@@ -3307,70 +3310,19 @@
           <a:lstStyle/>
           <a:p>
             <a:r>
-              <a:rPr b="1">
+              <a:rPr b="1" sz="3200">
                 <a:solidFill>
                   <a:srgbClr val="1E40AF"/>
                 </a:solidFill>
               </a:rPr>
-              <a:t>Future Scope - End-Sem</a:t>
-            </a:r>
-          </a:p>
-        </p:txBody>
-      </p:sp>
-      <p:sp>
-        <p:nvSpPr>
-          <p:cNvPr id="3" name="Content Placeholder 2"/>
-          <p:cNvSpPr>
-            <a:spLocks noGrp="1"/>
-          </p:cNvSpPr>
-          <p:nvPr>
-            <p:ph idx="1"/>
-          </p:nvPr>
-        </p:nvSpPr>
-        <p:spPr/>
-        <p:txBody>
-          <a:bodyPr wrap="square"/>
-          <a:lstStyle/>
-          <a:p>
-            <a:pPr/>
-            <a:r>
-              <a:rPr sz="1800"/>
-              <a:t>Standard conformal prediction on surrogate residuals, using the DES/surrogate pipeline already built and validated in Phase 1.</a:t>
-            </a:r>
-          </a:p>
-          <a:p>
-            <a:pPr/>
-            <a:r>
-              <a:rPr sz="1800"/>
-              <a:t>Mondrian CP - partition calibration by staffing tercile x arrival-rate tercile (9 categories); measure whether per-category coverage holds where the pooled/marginal guarantee doesn't.</a:t>
-            </a:r>
-          </a:p>
-          <a:p>
-            <a:pPr/>
-            <a:r>
-              <a:rPr sz="1800"/>
-              <a:t>Stress-test exchangeability with an out-of-distribution demand-surge scenario; see where standard CP and Mondrian CP hold up or break down.</a:t>
-            </a:r>
-          </a:p>
-          <a:p>
-            <a:pPr/>
-            <a:r>
-              <a:rPr sz="1800"/>
-              <a:t>Full comparison - GP baseline vs. standard CP vs. Mondrian CP on coverage and interval width.</a:t>
-            </a:r>
-          </a:p>
-          <a:p>
-            <a:pPr/>
-            <a:r>
-              <a:rPr sz="1800"/>
-              <a:t>End-sem PPT and report: a quantified answer on whether Mondrian CP closes the marginal-vs-conditional coverage gap in this domain.</a:t>
-            </a:r>
-          </a:p>
-        </p:txBody>
-      </p:sp>
-      <p:sp>
-        <p:nvSpPr>
-          <p:cNvPr id="4" name="Rectangle 3"/>
+              <a:t>Work Completed So Far (~50%)</a:t>
+            </a:r>
+          </a:p>
+        </p:txBody>
+      </p:sp>
+      <p:sp>
+        <p:nvSpPr>
+          <p:cNvPr id="3" name="Rectangle 2"/>
           <p:cNvSpPr/>
           <p:nvPr/>
         </p:nvSpPr>
@@ -3414,7 +3366,7 @@
       </p:sp>
       <p:sp>
         <p:nvSpPr>
-          <p:cNvPr id="5" name="TextBox 4"/>
+          <p:cNvPr id="4" name="TextBox 3"/>
           <p:cNvSpPr txBox="1"/>
           <p:nvPr/>
         </p:nvSpPr>
@@ -3441,1330 +3393,7 @@
                   <a:srgbClr val="6B7280"/>
                 </a:solidFill>
               </a:rPr>
-              <a:t>23AID201  ·  10/10</a:t>
-            </a:r>
-          </a:p>
-        </p:txBody>
-      </p:sp>
-    </p:spTree>
-  </p:cSld>
-  <p:clrMapOvr>
-    <a:masterClrMapping/>
-  </p:clrMapOvr>
-</p:sld>
-</file>
-
-<file path=ppt/slides/slide2.xml><?xml version="1.0" encoding="utf-8"?>
-<p:sld xmlns:a="http://schemas.openxmlformats.org/drawingml/2006/main" xmlns:p="http://schemas.openxmlformats.org/presentationml/2006/main" xmlns:r="http://schemas.openxmlformats.org/officeDocument/2006/relationships">
-  <p:cSld>
-    <p:spTree>
-      <p:nvGrpSpPr>
-        <p:cNvPr id="1" name=""/>
-        <p:cNvGrpSpPr/>
-        <p:nvPr/>
-      </p:nvGrpSpPr>
-      <p:grpSpPr/>
-      <p:sp>
-        <p:nvSpPr>
-          <p:cNvPr id="2" name="Title 1"/>
-          <p:cNvSpPr>
-            <a:spLocks noGrp="1"/>
-          </p:cNvSpPr>
-          <p:nvPr>
-            <p:ph type="title"/>
-          </p:nvPr>
-        </p:nvSpPr>
-        <p:spPr/>
-        <p:txBody>
-          <a:bodyPr/>
-          <a:lstStyle/>
-          <a:p>
-            <a:r>
-              <a:rPr b="1">
-                <a:solidFill>
-                  <a:srgbClr val="1E40AF"/>
-                </a:solidFill>
-              </a:rPr>
-              <a:t>Problem Statement</a:t>
-            </a:r>
-          </a:p>
-        </p:txBody>
-      </p:sp>
-      <p:sp>
-        <p:nvSpPr>
-          <p:cNvPr id="3" name="Content Placeholder 2"/>
-          <p:cNvSpPr>
-            <a:spLocks noGrp="1"/>
-          </p:cNvSpPr>
-          <p:nvPr>
-            <p:ph idx="1"/>
-          </p:nvPr>
-        </p:nvSpPr>
-        <p:spPr/>
-        <p:txBody>
-          <a:bodyPr wrap="square"/>
-          <a:lstStyle/>
-          <a:p>
-            <a:pPr/>
-            <a:r>
-              <a:rPr sz="1700"/>
-              <a:t>Surrogate models are fast, learned approximations of expensive simulations. They're used more and more to guide decisions in stochastic service systems - ER staffing, queueing networks, etc.</a:t>
-            </a:r>
-          </a:p>
-          <a:p>
-            <a:pPr/>
-            <a:r>
-              <a:rPr sz="1700"/>
-              <a:t>A point prediction from a surrogate isn't enough on its own for a decision like "will adding 2 more doctors actually bring the wait time down?" You need a calibrated interval, not just a number.</a:t>
-            </a:r>
-          </a:p>
-          <a:p>
-            <a:pPr/>
-            <a:r>
-              <a:rPr sz="1700"/>
-              <a:t>Two common ways to get that interval, and where they fall short:</a:t>
-            </a:r>
-          </a:p>
-          <a:p>
-            <a:pPr lvl="1"/>
-            <a:r>
-              <a:rPr sz="1700"/>
-              <a:t>Gaussian Processes - solid theoretically, but expensive to train (cubic cost) and the coverage guarantee depends on distributional assumptions, not a hard finite-sample bound.</a:t>
-            </a:r>
-          </a:p>
-          <a:p>
-            <a:pPr lvl="1"/>
-            <a:r>
-              <a:rPr sz="1700"/>
-              <a:t>Conformal Prediction - distribution-free, comes with a finite-sample coverage guarantee, cheap to calibrate. But it's only been validated for surrogate models in a narrow set of domains so far.</a:t>
-            </a:r>
-          </a:p>
-          <a:p>
-            <a:pPr/>
-            <a:r>
-              <a:rPr sz="1700"/>
-              <a:t>That's the question this project is built around: does CP still hold up when the surrogate is trained on a discrete-event / queueing simulation instead of the domains it's been tested on?</a:t>
-            </a:r>
-          </a:p>
-        </p:txBody>
-      </p:sp>
-      <p:sp>
-        <p:nvSpPr>
-          <p:cNvPr id="4" name="Rectangle 3"/>
-          <p:cNvSpPr/>
-          <p:nvPr/>
-        </p:nvSpPr>
-        <p:spPr>
-          <a:xfrm>
-            <a:off x="457200" y="1170432"/>
-            <a:ext cx="1280160" cy="44450"/>
-          </a:xfrm>
-          <a:prstGeom prst="rect">
-            <a:avLst/>
-          </a:prstGeom>
-          <a:solidFill>
-            <a:srgbClr val="3B82F6"/>
-          </a:solidFill>
-          <a:ln>
-            <a:noFill/>
-          </a:ln>
-          <a:effectLst/>
-        </p:spPr>
-        <p:style>
-          <a:lnRef idx="1">
-            <a:schemeClr val="accent1"/>
-          </a:lnRef>
-          <a:fillRef idx="3">
-            <a:schemeClr val="accent1"/>
-          </a:fillRef>
-          <a:effectRef idx="2">
-            <a:schemeClr val="accent1"/>
-          </a:effectRef>
-          <a:fontRef idx="minor">
-            <a:schemeClr val="lt1"/>
-          </a:fontRef>
-        </p:style>
-        <p:txBody>
-          <a:bodyPr rtlCol="0" anchor="ctr"/>
-          <a:lstStyle/>
-          <a:p>
-            <a:pPr algn="ctr"/>
-          </a:p>
-        </p:txBody>
-      </p:sp>
-      <p:sp>
-        <p:nvSpPr>
-          <p:cNvPr id="5" name="TextBox 4"/>
-          <p:cNvSpPr txBox="1"/>
-          <p:nvPr/>
-        </p:nvSpPr>
-        <p:spPr>
-          <a:xfrm>
-            <a:off x="7955279" y="6446520"/>
-            <a:ext cx="1005840" cy="320040"/>
-          </a:xfrm>
-          <a:prstGeom prst="rect">
-            <a:avLst/>
-          </a:prstGeom>
-          <a:noFill/>
-        </p:spPr>
-        <p:txBody>
-          <a:bodyPr wrap="none">
-            <a:spAutoFit/>
-          </a:bodyPr>
-          <a:lstStyle/>
-          <a:p>
-            <a:pPr algn="r"/>
-            <a:r>
-              <a:rPr sz="900">
-                <a:solidFill>
-                  <a:srgbClr val="6B7280"/>
-                </a:solidFill>
-              </a:rPr>
-              <a:t>23AID201  ·  2/10</a:t>
-            </a:r>
-          </a:p>
-        </p:txBody>
-      </p:sp>
-    </p:spTree>
-  </p:cSld>
-  <p:clrMapOvr>
-    <a:masterClrMapping/>
-  </p:clrMapOvr>
-</p:sld>
-</file>
-
-<file path=ppt/slides/slide3.xml><?xml version="1.0" encoding="utf-8"?>
-<p:sld xmlns:a="http://schemas.openxmlformats.org/drawingml/2006/main" xmlns:p="http://schemas.openxmlformats.org/presentationml/2006/main" xmlns:r="http://schemas.openxmlformats.org/officeDocument/2006/relationships">
-  <p:cSld>
-    <p:spTree>
-      <p:nvGrpSpPr>
-        <p:cNvPr id="1" name=""/>
-        <p:cNvGrpSpPr/>
-        <p:nvPr/>
-      </p:nvGrpSpPr>
-      <p:grpSpPr/>
-      <p:sp>
-        <p:nvSpPr>
-          <p:cNvPr id="2" name="Title 1"/>
-          <p:cNvSpPr>
-            <a:spLocks noGrp="1"/>
-          </p:cNvSpPr>
-          <p:nvPr>
-            <p:ph type="title"/>
-          </p:nvPr>
-        </p:nvSpPr>
-        <p:spPr/>
-        <p:txBody>
-          <a:bodyPr/>
-          <a:lstStyle/>
-          <a:p>
-            <a:r>
-              <a:rPr b="1">
-                <a:solidFill>
-                  <a:srgbClr val="1E40AF"/>
-                </a:solidFill>
-              </a:rPr>
-              <a:t>Research Gap</a:t>
-            </a:r>
-          </a:p>
-        </p:txBody>
-      </p:sp>
-      <p:sp>
-        <p:nvSpPr>
-          <p:cNvPr id="3" name="Content Placeholder 2"/>
-          <p:cNvSpPr>
-            <a:spLocks noGrp="1"/>
-          </p:cNvSpPr>
-          <p:nvPr>
-            <p:ph idx="1"/>
-          </p:nvPr>
-        </p:nvSpPr>
-        <p:spPr/>
-        <p:txBody>
-          <a:bodyPr wrap="square"/>
-          <a:lstStyle/>
-          <a:p>
-            <a:pPr/>
-            <a:r>
-              <a:rPr sz="1700"/>
-              <a:t>Gopakumar et al. (2026) validate conformal prediction for surrogate-model UQ, but only in physics domains - PDEs, magnetohydrodynamics, weather, fusion.</a:t>
-            </a:r>
-          </a:p>
-          <a:p>
-            <a:pPr/>
-            <a:r>
-              <a:rPr sz="1700"/>
-              <a:t>They call out two limitations explicitly:</a:t>
-            </a:r>
-          </a:p>
-          <a:p>
-            <a:pPr lvl="1"/>
-            <a:r>
-              <a:rPr sz="1700"/>
-              <a:t>Marginal coverage only - no guarantee that coverage holds within a specific subgroup or condition, only on average across everything.</a:t>
-            </a:r>
-          </a:p>
-          <a:p>
-            <a:pPr lvl="1"/>
-            <a:r>
-              <a:rPr sz="1700"/>
-              <a:t>An exchangeability assumption between calibration and test data, which they don't test under distribution shift.</a:t>
-            </a:r>
-          </a:p>
-          <a:p>
-            <a:pPr/>
-            <a:r>
-              <a:rPr sz="1700"/>
-              <a:t>Neither of those has been checked outside physics simulation. Discrete-event / queueing systems are a genuinely different kind of domain - discrete stochastic arrivals and departures, resource contention, priority queues - not a continuous PDE field. That's the gap this project sits in.</a:t>
-            </a:r>
-          </a:p>
-        </p:txBody>
-      </p:sp>
-      <p:sp>
-        <p:nvSpPr>
-          <p:cNvPr id="4" name="Rectangle 3"/>
-          <p:cNvSpPr/>
-          <p:nvPr/>
-        </p:nvSpPr>
-        <p:spPr>
-          <a:xfrm>
-            <a:off x="457200" y="1170432"/>
-            <a:ext cx="1280160" cy="44450"/>
-          </a:xfrm>
-          <a:prstGeom prst="rect">
-            <a:avLst/>
-          </a:prstGeom>
-          <a:solidFill>
-            <a:srgbClr val="3B82F6"/>
-          </a:solidFill>
-          <a:ln>
-            <a:noFill/>
-          </a:ln>
-          <a:effectLst/>
-        </p:spPr>
-        <p:style>
-          <a:lnRef idx="1">
-            <a:schemeClr val="accent1"/>
-          </a:lnRef>
-          <a:fillRef idx="3">
-            <a:schemeClr val="accent1"/>
-          </a:fillRef>
-          <a:effectRef idx="2">
-            <a:schemeClr val="accent1"/>
-          </a:effectRef>
-          <a:fontRef idx="minor">
-            <a:schemeClr val="lt1"/>
-          </a:fontRef>
-        </p:style>
-        <p:txBody>
-          <a:bodyPr rtlCol="0" anchor="ctr"/>
-          <a:lstStyle/>
-          <a:p>
-            <a:pPr algn="ctr"/>
-          </a:p>
-        </p:txBody>
-      </p:sp>
-      <p:sp>
-        <p:nvSpPr>
-          <p:cNvPr id="5" name="TextBox 4"/>
-          <p:cNvSpPr txBox="1"/>
-          <p:nvPr/>
-        </p:nvSpPr>
-        <p:spPr>
-          <a:xfrm>
-            <a:off x="7955279" y="6446520"/>
-            <a:ext cx="1005840" cy="320040"/>
-          </a:xfrm>
-          <a:prstGeom prst="rect">
-            <a:avLst/>
-          </a:prstGeom>
-          <a:noFill/>
-        </p:spPr>
-        <p:txBody>
-          <a:bodyPr wrap="none">
-            <a:spAutoFit/>
-          </a:bodyPr>
-          <a:lstStyle/>
-          <a:p>
-            <a:pPr algn="r"/>
-            <a:r>
-              <a:rPr sz="900">
-                <a:solidFill>
-                  <a:srgbClr val="6B7280"/>
-                </a:solidFill>
-              </a:rPr>
-              <a:t>23AID201  ·  3/10</a:t>
-            </a:r>
-          </a:p>
-        </p:txBody>
-      </p:sp>
-    </p:spTree>
-  </p:cSld>
-  <p:clrMapOvr>
-    <a:masterClrMapping/>
-  </p:clrMapOvr>
-</p:sld>
-</file>
-
-<file path=ppt/slides/slide4.xml><?xml version="1.0" encoding="utf-8"?>
-<p:sld xmlns:a="http://schemas.openxmlformats.org/drawingml/2006/main" xmlns:p="http://schemas.openxmlformats.org/presentationml/2006/main" xmlns:r="http://schemas.openxmlformats.org/officeDocument/2006/relationships">
-  <p:cSld>
-    <p:spTree>
-      <p:nvGrpSpPr>
-        <p:cNvPr id="1" name=""/>
-        <p:cNvGrpSpPr/>
-        <p:nvPr/>
-      </p:nvGrpSpPr>
-      <p:grpSpPr/>
-      <p:sp>
-        <p:nvSpPr>
-          <p:cNvPr id="2" name="Title 1"/>
-          <p:cNvSpPr>
-            <a:spLocks noGrp="1"/>
-          </p:cNvSpPr>
-          <p:nvPr>
-            <p:ph type="title"/>
-          </p:nvPr>
-        </p:nvSpPr>
-        <p:spPr/>
-        <p:txBody>
-          <a:bodyPr/>
-          <a:lstStyle/>
-          <a:p>
-            <a:r>
-              <a:rPr b="1">
-                <a:solidFill>
-                  <a:srgbClr val="1E40AF"/>
-                </a:solidFill>
-              </a:rPr>
-              <a:t>Our Bridging Approach</a:t>
-            </a:r>
-          </a:p>
-        </p:txBody>
-      </p:sp>
-      <p:sp>
-        <p:nvSpPr>
-          <p:cNvPr id="3" name="Content Placeholder 2"/>
-          <p:cNvSpPr>
-            <a:spLocks noGrp="1"/>
-          </p:cNvSpPr>
-          <p:nvPr>
-            <p:ph idx="1" sz="half"/>
-          </p:nvPr>
-        </p:nvSpPr>
-        <p:spPr>
-          <a:xfrm>
-            <a:off x="457200" y="2240280"/>
-            <a:ext cx="4037716" cy="4206240"/>
-          </a:xfrm>
-        </p:spPr>
-        <p:txBody>
-          <a:bodyPr wrap="square"/>
-          <a:lstStyle/>
-          <a:p>
-            <a:pPr/>
-            <a:r>
-              <a:rPr sz="1500"/>
-              <a:t>Addresses marginal coverage</a:t>
-            </a:r>
-          </a:p>
-          <a:p>
-            <a:pPr lvl="1"/>
-            <a:r>
-              <a:rPr sz="1300"/>
-              <a:t>Mondrian CP partitions calibration by category - staffing tercile x arrival-rate tercile - instead of lumping everything into one marginal guarantee.</a:t>
-            </a:r>
-          </a:p>
-          <a:p>
-            <a:pPr lvl="1"/>
-            <a:r>
-              <a:rPr sz="1300"/>
-              <a:t>Goal: coverage that holds up close to nominal within each category, not just on average.</a:t>
-            </a:r>
-          </a:p>
-        </p:txBody>
-      </p:sp>
-      <p:sp>
-        <p:nvSpPr>
-          <p:cNvPr id="4" name="Content Placeholder 3"/>
-          <p:cNvSpPr>
-            <a:spLocks noGrp="1"/>
-          </p:cNvSpPr>
-          <p:nvPr>
-            <p:ph idx="2" sz="half"/>
-          </p:nvPr>
-        </p:nvSpPr>
-        <p:spPr>
-          <a:xfrm>
-            <a:off x="4647895" y="2240280"/>
-            <a:ext cx="4037716" cy="4206240"/>
-          </a:xfrm>
-        </p:spPr>
-        <p:txBody>
-          <a:bodyPr wrap="square"/>
-          <a:lstStyle/>
-          <a:p>
-            <a:pPr/>
-            <a:r>
-              <a:rPr sz="1500"/>
-              <a:t>Addresses exchangeability</a:t>
-            </a:r>
-          </a:p>
-          <a:p>
-            <a:pPr lvl="1"/>
-            <a:r>
-              <a:rPr sz="1300"/>
-              <a:t>Phase 2 includes a stress test: an out-of-distribution "surge day" scenario outside the normal training range.</a:t>
-            </a:r>
-          </a:p>
-          <a:p>
-            <a:pPr lvl="1"/>
-            <a:r>
-              <a:rPr sz="1300"/>
-              <a:t>That's where we actually get to see whether standard CP and Mondrian CP hold up or break when exchangeability is violated.</a:t>
-            </a:r>
-          </a:p>
-        </p:txBody>
-      </p:sp>
-      <p:sp>
-        <p:nvSpPr>
-          <p:cNvPr id="5" name="Rectangle 4"/>
-          <p:cNvSpPr/>
-          <p:nvPr/>
-        </p:nvSpPr>
-        <p:spPr>
-          <a:xfrm>
-            <a:off x="457200" y="1170432"/>
-            <a:ext cx="1280160" cy="44450"/>
-          </a:xfrm>
-          <a:prstGeom prst="rect">
-            <a:avLst/>
-          </a:prstGeom>
-          <a:solidFill>
-            <a:srgbClr val="3B82F6"/>
-          </a:solidFill>
-          <a:ln>
-            <a:noFill/>
-          </a:ln>
-          <a:effectLst/>
-        </p:spPr>
-        <p:style>
-          <a:lnRef idx="1">
-            <a:schemeClr val="accent1"/>
-          </a:lnRef>
-          <a:fillRef idx="3">
-            <a:schemeClr val="accent1"/>
-          </a:fillRef>
-          <a:effectRef idx="2">
-            <a:schemeClr val="accent1"/>
-          </a:effectRef>
-          <a:fontRef idx="minor">
-            <a:schemeClr val="lt1"/>
-          </a:fontRef>
-        </p:style>
-        <p:txBody>
-          <a:bodyPr rtlCol="0" anchor="ctr"/>
-          <a:lstStyle/>
-          <a:p>
-            <a:pPr algn="ctr"/>
-          </a:p>
-        </p:txBody>
-      </p:sp>
-      <p:sp>
-        <p:nvSpPr>
-          <p:cNvPr id="6" name="TextBox 5"/>
-          <p:cNvSpPr txBox="1"/>
-          <p:nvPr/>
-        </p:nvSpPr>
-        <p:spPr>
-          <a:xfrm>
-            <a:off x="7955279" y="6446520"/>
-            <a:ext cx="1005840" cy="320040"/>
-          </a:xfrm>
-          <a:prstGeom prst="rect">
-            <a:avLst/>
-          </a:prstGeom>
-          <a:noFill/>
-        </p:spPr>
-        <p:txBody>
-          <a:bodyPr wrap="none">
-            <a:spAutoFit/>
-          </a:bodyPr>
-          <a:lstStyle/>
-          <a:p>
-            <a:pPr algn="r"/>
-            <a:r>
-              <a:rPr sz="900">
-                <a:solidFill>
-                  <a:srgbClr val="6B7280"/>
-                </a:solidFill>
-              </a:rPr>
-              <a:t>23AID201  ·  4/10</a:t>
-            </a:r>
-          </a:p>
-        </p:txBody>
-      </p:sp>
-      <p:sp>
-        <p:nvSpPr>
-          <p:cNvPr id="7" name="TextBox 6"/>
-          <p:cNvSpPr txBox="1"/>
-          <p:nvPr/>
-        </p:nvSpPr>
-        <p:spPr>
-          <a:xfrm>
-            <a:off x="457200" y="1234440"/>
-            <a:ext cx="8229600" cy="822960"/>
-          </a:xfrm>
-          <a:prstGeom prst="rect">
-            <a:avLst/>
-          </a:prstGeom>
-          <a:noFill/>
-        </p:spPr>
-        <p:txBody>
-          <a:bodyPr wrap="square">
-            <a:spAutoFit/>
-          </a:bodyPr>
-          <a:lstStyle/>
-          <a:p>
-            <a:r>
-              <a:rPr sz="1500" i="1">
-                <a:solidFill>
-                  <a:srgbClr val="404040"/>
-                </a:solidFill>
-              </a:rPr>
-              <a:t>Core idea: apply CP, specifically Mondrian CP, to an ER queueing surrogate, and test directly whether Gopakumar et al.'s two limitations hold here.</a:t>
-            </a:r>
-          </a:p>
-        </p:txBody>
-      </p:sp>
-    </p:spTree>
-  </p:cSld>
-  <p:clrMapOvr>
-    <a:masterClrMapping/>
-  </p:clrMapOvr>
-</p:sld>
-</file>
-
-<file path=ppt/slides/slide5.xml><?xml version="1.0" encoding="utf-8"?>
-<p:sld xmlns:a="http://schemas.openxmlformats.org/drawingml/2006/main" xmlns:p="http://schemas.openxmlformats.org/presentationml/2006/main" xmlns:r="http://schemas.openxmlformats.org/officeDocument/2006/relationships">
-  <p:cSld>
-    <p:spTree>
-      <p:nvGrpSpPr>
-        <p:cNvPr id="1" name=""/>
-        <p:cNvGrpSpPr/>
-        <p:nvPr/>
-      </p:nvGrpSpPr>
-      <p:grpSpPr/>
-      <p:sp>
-        <p:nvSpPr>
-          <p:cNvPr id="2" name="Title 1"/>
-          <p:cNvSpPr>
-            <a:spLocks noGrp="1"/>
-          </p:cNvSpPr>
-          <p:nvPr>
-            <p:ph type="title"/>
-          </p:nvPr>
-        </p:nvSpPr>
-        <p:spPr/>
-        <p:txBody>
-          <a:bodyPr/>
-          <a:lstStyle/>
-          <a:p>
-            <a:r>
-              <a:rPr b="1">
-                <a:solidFill>
-                  <a:srgbClr val="1E40AF"/>
-                </a:solidFill>
-              </a:rPr>
-              <a:t>Methodology Overview</a:t>
-            </a:r>
-          </a:p>
-        </p:txBody>
-      </p:sp>
-      <p:sp>
-        <p:nvSpPr>
-          <p:cNvPr id="3" name="Rectangle 2"/>
-          <p:cNvSpPr/>
-          <p:nvPr/>
-        </p:nvSpPr>
-        <p:spPr>
-          <a:xfrm>
-            <a:off x="457200" y="1170432"/>
-            <a:ext cx="1280160" cy="44450"/>
-          </a:xfrm>
-          <a:prstGeom prst="rect">
-            <a:avLst/>
-          </a:prstGeom>
-          <a:solidFill>
-            <a:srgbClr val="3B82F6"/>
-          </a:solidFill>
-          <a:ln>
-            <a:noFill/>
-          </a:ln>
-          <a:effectLst/>
-        </p:spPr>
-        <p:style>
-          <a:lnRef idx="1">
-            <a:schemeClr val="accent1"/>
-          </a:lnRef>
-          <a:fillRef idx="3">
-            <a:schemeClr val="accent1"/>
-          </a:fillRef>
-          <a:effectRef idx="2">
-            <a:schemeClr val="accent1"/>
-          </a:effectRef>
-          <a:fontRef idx="minor">
-            <a:schemeClr val="lt1"/>
-          </a:fontRef>
-        </p:style>
-        <p:txBody>
-          <a:bodyPr rtlCol="0" anchor="ctr"/>
-          <a:lstStyle/>
-          <a:p>
-            <a:pPr algn="ctr"/>
-          </a:p>
-        </p:txBody>
-      </p:sp>
-      <p:sp>
-        <p:nvSpPr>
-          <p:cNvPr id="4" name="TextBox 3"/>
-          <p:cNvSpPr txBox="1"/>
-          <p:nvPr/>
-        </p:nvSpPr>
-        <p:spPr>
-          <a:xfrm>
-            <a:off x="7955279" y="6446520"/>
-            <a:ext cx="1005840" cy="320040"/>
-          </a:xfrm>
-          <a:prstGeom prst="rect">
-            <a:avLst/>
-          </a:prstGeom>
-          <a:noFill/>
-        </p:spPr>
-        <p:txBody>
-          <a:bodyPr wrap="none">
-            <a:spAutoFit/>
-          </a:bodyPr>
-          <a:lstStyle/>
-          <a:p>
-            <a:pPr algn="r"/>
-            <a:r>
-              <a:rPr sz="900">
-                <a:solidFill>
-                  <a:srgbClr val="6B7280"/>
-                </a:solidFill>
-              </a:rPr>
-              <a:t>23AID201  ·  5/10</a:t>
-            </a:r>
-          </a:p>
-        </p:txBody>
-      </p:sp>
-      <p:sp>
-        <p:nvSpPr>
-          <p:cNvPr id="5" name="Rectangle 4"/>
-          <p:cNvSpPr/>
-          <p:nvPr/>
-        </p:nvSpPr>
-        <p:spPr>
-          <a:xfrm>
-            <a:off x="457200" y="2103120"/>
-            <a:ext cx="2377440" cy="1188720"/>
-          </a:xfrm>
-          <a:prstGeom prst="rect">
-            <a:avLst/>
-          </a:prstGeom>
-          <a:noFill/>
-          <a:ln w="15875">
-            <a:solidFill>
-              <a:srgbClr val="404040"/>
-            </a:solidFill>
-          </a:ln>
-          <a:effectLst/>
-        </p:spPr>
-        <p:style>
-          <a:lnRef idx="1">
-            <a:schemeClr val="accent1"/>
-          </a:lnRef>
-          <a:fillRef idx="3">
-            <a:schemeClr val="accent1"/>
-          </a:fillRef>
-          <a:effectRef idx="2">
-            <a:schemeClr val="accent1"/>
-          </a:effectRef>
-          <a:fontRef idx="minor">
-            <a:schemeClr val="lt1"/>
-          </a:fontRef>
-        </p:style>
-        <p:txBody>
-          <a:bodyPr rtlCol="0" anchor="ctr" wrap="square"/>
-          <a:lstStyle/>
-          <a:p>
-            <a:pPr algn="ctr"/>
-            <a:r>
-              <a:rPr sz="1400" b="1">
-                <a:solidFill>
-                  <a:srgbClr val="000000"/>
-                </a:solidFill>
-              </a:rPr>
-              <a:t>Discrete-Event
-Simulation</a:t>
-            </a:r>
-          </a:p>
-          <a:p>
-            <a:pPr algn="ctr"/>
-            <a:r>
-              <a:rPr sz="1050">
-                <a:solidFill>
-                  <a:srgbClr val="404040"/>
-                </a:solidFill>
-              </a:rPr>
-              <a:t>SimPy, calibrated on
-real ED data</a:t>
-            </a:r>
-          </a:p>
-        </p:txBody>
-      </p:sp>
-      <p:sp>
-        <p:nvSpPr>
-          <p:cNvPr id="6" name="Rectangle 5"/>
-          <p:cNvSpPr/>
-          <p:nvPr/>
-        </p:nvSpPr>
-        <p:spPr>
-          <a:xfrm>
-            <a:off x="3383280" y="2103120"/>
-            <a:ext cx="2377440" cy="1188720"/>
-          </a:xfrm>
-          <a:prstGeom prst="rect">
-            <a:avLst/>
-          </a:prstGeom>
-          <a:noFill/>
-          <a:ln w="15875">
-            <a:solidFill>
-              <a:srgbClr val="404040"/>
-            </a:solidFill>
-          </a:ln>
-          <a:effectLst/>
-        </p:spPr>
-        <p:style>
-          <a:lnRef idx="1">
-            <a:schemeClr val="accent1"/>
-          </a:lnRef>
-          <a:fillRef idx="3">
-            <a:schemeClr val="accent1"/>
-          </a:fillRef>
-          <a:effectRef idx="2">
-            <a:schemeClr val="accent1"/>
-          </a:effectRef>
-          <a:fontRef idx="minor">
-            <a:schemeClr val="lt1"/>
-          </a:fontRef>
-        </p:style>
-        <p:txBody>
-          <a:bodyPr rtlCol="0" anchor="ctr" wrap="square"/>
-          <a:lstStyle/>
-          <a:p>
-            <a:pPr algn="ctr"/>
-            <a:r>
-              <a:rPr sz="1400" b="1">
-                <a:solidFill>
-                  <a:srgbClr val="000000"/>
-                </a:solidFill>
-              </a:rPr>
-              <a:t>Surrogate Model</a:t>
-            </a:r>
-          </a:p>
-          <a:p>
-            <a:pPr algn="ctr"/>
-            <a:r>
-              <a:rPr sz="1050">
-                <a:solidFill>
-                  <a:srgbClr val="404040"/>
-                </a:solidFill>
-              </a:rPr>
-              <a:t>Gradient boosting on the
-DES scenario sweep</a:t>
-            </a:r>
-          </a:p>
-        </p:txBody>
-      </p:sp>
-      <p:sp>
-        <p:nvSpPr>
-          <p:cNvPr id="7" name="Rectangle 6"/>
-          <p:cNvSpPr/>
-          <p:nvPr/>
-        </p:nvSpPr>
-        <p:spPr>
-          <a:xfrm>
-            <a:off x="6309360" y="2103120"/>
-            <a:ext cx="2377440" cy="1188720"/>
-          </a:xfrm>
-          <a:prstGeom prst="rect">
-            <a:avLst/>
-          </a:prstGeom>
-          <a:noFill/>
-          <a:ln w="15875">
-            <a:solidFill>
-              <a:srgbClr val="404040"/>
-            </a:solidFill>
-          </a:ln>
-          <a:effectLst/>
-        </p:spPr>
-        <p:style>
-          <a:lnRef idx="1">
-            <a:schemeClr val="accent1"/>
-          </a:lnRef>
-          <a:fillRef idx="3">
-            <a:schemeClr val="accent1"/>
-          </a:fillRef>
-          <a:effectRef idx="2">
-            <a:schemeClr val="accent1"/>
-          </a:effectRef>
-          <a:fontRef idx="minor">
-            <a:schemeClr val="lt1"/>
-          </a:fontRef>
-        </p:style>
-        <p:txBody>
-          <a:bodyPr rtlCol="0" anchor="ctr" wrap="square"/>
-          <a:lstStyle/>
-          <a:p>
-            <a:pPr algn="ctr"/>
-            <a:r>
-              <a:rPr sz="1400" b="1">
-                <a:solidFill>
-                  <a:srgbClr val="000000"/>
-                </a:solidFill>
-              </a:rPr>
-              <a:t>Uncertainty
-Quantification</a:t>
-            </a:r>
-          </a:p>
-          <a:p>
-            <a:pPr algn="ctr"/>
-            <a:r>
-              <a:rPr sz="1050">
-                <a:solidFill>
-                  <a:srgbClr val="404040"/>
-                </a:solidFill>
-              </a:rPr>
-              <a:t>GP baseline vs.
-standard CP vs. Mondrian CP</a:t>
-            </a:r>
-          </a:p>
-        </p:txBody>
-      </p:sp>
-      <p:cxnSp>
-        <p:nvCxnSpPr>
-          <p:cNvPr id="8" name="Connector 7"/>
-          <p:cNvCxnSpPr/>
-          <p:nvPr/>
-        </p:nvCxnSpPr>
-        <p:spPr>
-          <a:xfrm>
-            <a:off x="2834640" y="2697480"/>
-            <a:ext cx="548640" cy="0"/>
-          </a:xfrm>
-          <a:prstGeom prst="line">
-            <a:avLst/>
-          </a:prstGeom>
-          <a:ln w="19050">
-            <a:solidFill>
-              <a:srgbClr val="404040"/>
-            </a:solidFill>
-          </a:ln>
-        </p:spPr>
-        <p:style>
-          <a:lnRef idx="2">
-            <a:schemeClr val="accent1"/>
-          </a:lnRef>
-          <a:fillRef idx="0">
-            <a:schemeClr val="accent1"/>
-          </a:fillRef>
-          <a:effectRef idx="1">
-            <a:schemeClr val="accent1"/>
-          </a:effectRef>
-          <a:fontRef idx="minor">
-            <a:schemeClr val="tx1"/>
-          </a:fontRef>
-        </p:style>
-      </p:cxnSp>
-      <p:cxnSp>
-        <p:nvCxnSpPr>
-          <p:cNvPr id="9" name="Connector 8"/>
-          <p:cNvCxnSpPr/>
-          <p:nvPr/>
-        </p:nvCxnSpPr>
-        <p:spPr>
-          <a:xfrm>
-            <a:off x="5760720" y="2697480"/>
-            <a:ext cx="548640" cy="0"/>
-          </a:xfrm>
-          <a:prstGeom prst="line">
-            <a:avLst/>
-          </a:prstGeom>
-          <a:ln w="19050">
-            <a:solidFill>
-              <a:srgbClr val="404040"/>
-            </a:solidFill>
-          </a:ln>
-        </p:spPr>
-        <p:style>
-          <a:lnRef idx="2">
-            <a:schemeClr val="accent1"/>
-          </a:lnRef>
-          <a:fillRef idx="0">
-            <a:schemeClr val="accent1"/>
-          </a:fillRef>
-          <a:effectRef idx="1">
-            <a:schemeClr val="accent1"/>
-          </a:effectRef>
-          <a:fontRef idx="minor">
-            <a:schemeClr val="tx1"/>
-          </a:fontRef>
-        </p:style>
-      </p:cxnSp>
-      <p:sp>
-        <p:nvSpPr>
-          <p:cNvPr id="10" name="TextBox 9"/>
-          <p:cNvSpPr txBox="1"/>
-          <p:nvPr/>
-        </p:nvSpPr>
-        <p:spPr>
-          <a:xfrm>
-            <a:off x="457200" y="3657600"/>
-            <a:ext cx="8229600" cy="2651760"/>
-          </a:xfrm>
-          <a:prstGeom prst="rect">
-            <a:avLst/>
-          </a:prstGeom>
-          <a:noFill/>
-        </p:spPr>
-        <p:txBody>
-          <a:bodyPr wrap="square">
-            <a:spAutoFit/>
-          </a:bodyPr>
-          <a:lstStyle/>
-          <a:p>
-            <a:r>
-              <a:rPr i="1" sz="1400"/>
-              <a:t>Each stage is checked against the previous one before moving on:</a:t>
-            </a:r>
-          </a:p>
-          <a:p>
-            <a:pPr/>
-            <a:r>
-              <a:rPr sz="1500"/>
-              <a:t>- DES output checked against real aggregated ED stats (91.0% match on daily volume)</a:t>
-            </a:r>
-          </a:p>
-          <a:p>
-            <a:pPr/>
-            <a:r>
-              <a:rPr sz="1500"/>
-              <a:t>- Surrogate accuracy checked against DES outputs held out from training (MAE / RMSE / R²)</a:t>
-            </a:r>
-          </a:p>
-          <a:p>
-            <a:pPr/>
-            <a:r>
-              <a:rPr sz="1500"/>
-              <a:t>- All UQ methods use the same fixed test split and the same target coverage (alpha = 0.1), so GP, standard CP and Mondrian CP end up directly comparable</a:t>
-            </a:r>
-          </a:p>
-        </p:txBody>
-      </p:sp>
-    </p:spTree>
-  </p:cSld>
-  <p:clrMapOvr>
-    <a:masterClrMapping/>
-  </p:clrMapOvr>
-</p:sld>
-</file>
-
-<file path=ppt/slides/slide6.xml><?xml version="1.0" encoding="utf-8"?>
-<p:sld xmlns:a="http://schemas.openxmlformats.org/drawingml/2006/main" xmlns:p="http://schemas.openxmlformats.org/presentationml/2006/main" xmlns:r="http://schemas.openxmlformats.org/officeDocument/2006/relationships">
-  <p:cSld>
-    <p:spTree>
-      <p:nvGrpSpPr>
-        <p:cNvPr id="1" name=""/>
-        <p:cNvGrpSpPr/>
-        <p:nvPr/>
-      </p:nvGrpSpPr>
-      <p:grpSpPr/>
-      <p:sp>
-        <p:nvSpPr>
-          <p:cNvPr id="2" name="Title 1"/>
-          <p:cNvSpPr>
-            <a:spLocks noGrp="1"/>
-          </p:cNvSpPr>
-          <p:nvPr>
-            <p:ph type="title"/>
-          </p:nvPr>
-        </p:nvSpPr>
-        <p:spPr/>
-        <p:txBody>
-          <a:bodyPr/>
-          <a:lstStyle/>
-          <a:p>
-            <a:r>
-              <a:rPr b="1">
-                <a:solidFill>
-                  <a:srgbClr val="1E40AF"/>
-                </a:solidFill>
-              </a:rPr>
-              <a:t>Real-World Data Used</a:t>
-            </a:r>
-          </a:p>
-        </p:txBody>
-      </p:sp>
-      <p:sp>
-        <p:nvSpPr>
-          <p:cNvPr id="3" name="Content Placeholder 2"/>
-          <p:cNvSpPr>
-            <a:spLocks noGrp="1"/>
-          </p:cNvSpPr>
-          <p:nvPr>
-            <p:ph idx="1"/>
-          </p:nvPr>
-        </p:nvSpPr>
-        <p:spPr/>
-        <p:txBody>
-          <a:bodyPr wrap="square"/>
-          <a:lstStyle/>
-          <a:p>
-            <a:pPr/>
-            <a:r>
-              <a:rPr sz="1600"/>
-              <a:t>Hospital Triage and Patient History Data, Kaggle (maalona) - Yale New Haven Health System, retrospective, March 2014 to July 2017.</a:t>
-            </a:r>
-          </a:p>
-          <a:p>
-            <a:pPr/>
-            <a:r>
-              <a:rPr sz="1600"/>
-              <a:t>560,486 ED visits total, 972 variables per visit, across 3 EDs (1 academic + 2 community). We calibrate on Department A only, the largest / academic site: 322,283 visits, ~258.2/day.</a:t>
-            </a:r>
-          </a:p>
-          <a:p>
-            <a:pPr/>
-            <a:r>
-              <a:rPr sz="1600"/>
-              <a:t>Real vs. literature - kept separate on purpose, not blended silently:</a:t>
-            </a:r>
-          </a:p>
-          <a:p>
-            <a:pPr lvl="1"/>
-            <a:r>
-              <a:rPr sz="1600"/>
-              <a:t>From the real data: arrival pattern by 4-hour bin, day of week, and month; ESI acuity mix; department-level daily visit rate.</a:t>
-            </a:r>
-          </a:p>
-          <a:p>
-            <a:pPr lvl="1"/>
-            <a:r>
-              <a:rPr sz="1600"/>
-              <a:t>From literature: service/treatment time per ESI level (log-normal). The dataset has no discharge timestamp - checked across all 972 columns to be sure before falling back to literature values.</a:t>
-            </a:r>
-          </a:p>
-        </p:txBody>
-      </p:sp>
-      <p:sp>
-        <p:nvSpPr>
-          <p:cNvPr id="4" name="Rectangle 3"/>
-          <p:cNvSpPr/>
-          <p:nvPr/>
-        </p:nvSpPr>
-        <p:spPr>
-          <a:xfrm>
-            <a:off x="457200" y="1170432"/>
-            <a:ext cx="1280160" cy="44450"/>
-          </a:xfrm>
-          <a:prstGeom prst="rect">
-            <a:avLst/>
-          </a:prstGeom>
-          <a:solidFill>
-            <a:srgbClr val="3B82F6"/>
-          </a:solidFill>
-          <a:ln>
-            <a:noFill/>
-          </a:ln>
-          <a:effectLst/>
-        </p:spPr>
-        <p:style>
-          <a:lnRef idx="1">
-            <a:schemeClr val="accent1"/>
-          </a:lnRef>
-          <a:fillRef idx="3">
-            <a:schemeClr val="accent1"/>
-          </a:fillRef>
-          <a:effectRef idx="2">
-            <a:schemeClr val="accent1"/>
-          </a:effectRef>
-          <a:fontRef idx="minor">
-            <a:schemeClr val="lt1"/>
-          </a:fontRef>
-        </p:style>
-        <p:txBody>
-          <a:bodyPr rtlCol="0" anchor="ctr"/>
-          <a:lstStyle/>
-          <a:p>
-            <a:pPr algn="ctr"/>
-          </a:p>
-        </p:txBody>
-      </p:sp>
-      <p:sp>
-        <p:nvSpPr>
-          <p:cNvPr id="5" name="TextBox 4"/>
-          <p:cNvSpPr txBox="1"/>
-          <p:nvPr/>
-        </p:nvSpPr>
-        <p:spPr>
-          <a:xfrm>
-            <a:off x="7955279" y="6446520"/>
-            <a:ext cx="1005840" cy="320040"/>
-          </a:xfrm>
-          <a:prstGeom prst="rect">
-            <a:avLst/>
-          </a:prstGeom>
-          <a:noFill/>
-        </p:spPr>
-        <p:txBody>
-          <a:bodyPr wrap="none">
-            <a:spAutoFit/>
-          </a:bodyPr>
-          <a:lstStyle/>
-          <a:p>
-            <a:pPr algn="r"/>
-            <a:r>
-              <a:rPr sz="900">
-                <a:solidFill>
-                  <a:srgbClr val="6B7280"/>
-                </a:solidFill>
-              </a:rPr>
-              <a:t>23AID201  ·  6/10</a:t>
-            </a:r>
-          </a:p>
-        </p:txBody>
-      </p:sp>
-    </p:spTree>
-  </p:cSld>
-  <p:clrMapOvr>
-    <a:masterClrMapping/>
-  </p:clrMapOvr>
-</p:sld>
-</file>
-
-<file path=ppt/slides/slide7.xml><?xml version="1.0" encoding="utf-8"?>
-<p:sld xmlns:a="http://schemas.openxmlformats.org/drawingml/2006/main" xmlns:p="http://schemas.openxmlformats.org/presentationml/2006/main" xmlns:r="http://schemas.openxmlformats.org/officeDocument/2006/relationships">
-  <p:cSld>
-    <p:spTree>
-      <p:nvGrpSpPr>
-        <p:cNvPr id="1" name=""/>
-        <p:cNvGrpSpPr/>
-        <p:nvPr/>
-      </p:nvGrpSpPr>
-      <p:grpSpPr/>
-      <p:sp>
-        <p:nvSpPr>
-          <p:cNvPr id="2" name="Title 1"/>
-          <p:cNvSpPr>
-            <a:spLocks noGrp="1"/>
-          </p:cNvSpPr>
-          <p:nvPr>
-            <p:ph type="title"/>
-          </p:nvPr>
-        </p:nvSpPr>
-        <p:spPr/>
-        <p:txBody>
-          <a:bodyPr/>
-          <a:lstStyle/>
-          <a:p>
-            <a:r>
-              <a:rPr b="1" sz="3200">
-                <a:solidFill>
-                  <a:srgbClr val="1E40AF"/>
-                </a:solidFill>
-              </a:rPr>
-              <a:t>Work Completed So Far (~50%)</a:t>
-            </a:r>
-          </a:p>
-        </p:txBody>
-      </p:sp>
-      <p:sp>
-        <p:nvSpPr>
-          <p:cNvPr id="3" name="Rectangle 2"/>
-          <p:cNvSpPr/>
-          <p:nvPr/>
-        </p:nvSpPr>
-        <p:spPr>
-          <a:xfrm>
-            <a:off x="457200" y="1170432"/>
-            <a:ext cx="1280160" cy="44450"/>
-          </a:xfrm>
-          <a:prstGeom prst="rect">
-            <a:avLst/>
-          </a:prstGeom>
-          <a:solidFill>
-            <a:srgbClr val="3B82F6"/>
-          </a:solidFill>
-          <a:ln>
-            <a:noFill/>
-          </a:ln>
-          <a:effectLst/>
-        </p:spPr>
-        <p:style>
-          <a:lnRef idx="1">
-            <a:schemeClr val="accent1"/>
-          </a:lnRef>
-          <a:fillRef idx="3">
-            <a:schemeClr val="accent1"/>
-          </a:fillRef>
-          <a:effectRef idx="2">
-            <a:schemeClr val="accent1"/>
-          </a:effectRef>
-          <a:fontRef idx="minor">
-            <a:schemeClr val="lt1"/>
-          </a:fontRef>
-        </p:style>
-        <p:txBody>
-          <a:bodyPr rtlCol="0" anchor="ctr"/>
-          <a:lstStyle/>
-          <a:p>
-            <a:pPr algn="ctr"/>
-          </a:p>
-        </p:txBody>
-      </p:sp>
-      <p:sp>
-        <p:nvSpPr>
-          <p:cNvPr id="4" name="TextBox 3"/>
-          <p:cNvSpPr txBox="1"/>
-          <p:nvPr/>
-        </p:nvSpPr>
-        <p:spPr>
-          <a:xfrm>
-            <a:off x="7955279" y="6446520"/>
-            <a:ext cx="1005840" cy="320040"/>
-          </a:xfrm>
-          <a:prstGeom prst="rect">
-            <a:avLst/>
-          </a:prstGeom>
-          <a:noFill/>
-        </p:spPr>
-        <p:txBody>
-          <a:bodyPr wrap="none">
-            <a:spAutoFit/>
-          </a:bodyPr>
-          <a:lstStyle/>
-          <a:p>
-            <a:pPr algn="r"/>
-            <a:r>
-              <a:rPr sz="900">
-                <a:solidFill>
-                  <a:srgbClr val="6B7280"/>
-                </a:solidFill>
-              </a:rPr>
-              <a:t>23AID201  ·  7/10</a:t>
+              <a:t>23AID201  ·  10/13</a:t>
             </a:r>
           </a:p>
         </p:txBody>
@@ -5649,7 +4278,7 @@
 </p:sld>
 </file>
 
-<file path=ppt/slides/slide8.xml><?xml version="1.0" encoding="utf-8"?>
+<file path=ppt/slides/slide11.xml><?xml version="1.0" encoding="utf-8"?>
 <p:sld xmlns:a="http://schemas.openxmlformats.org/drawingml/2006/main" xmlns:p="http://schemas.openxmlformats.org/presentationml/2006/main" xmlns:r="http://schemas.openxmlformats.org/officeDocument/2006/relationships">
   <p:cSld>
     <p:spTree>
@@ -5758,7 +4387,7 @@
                   <a:srgbClr val="6B7280"/>
                 </a:solidFill>
               </a:rPr>
-              <a:t>23AID201  ·  8/10</a:t>
+              <a:t>23AID201  ·  11/13</a:t>
             </a:r>
           </a:p>
         </p:txBody>
@@ -5824,6 +4453,3097 @@
             <a:r>
               <a:rPr sz="1400"/>
               <a:t>Validated against real aggregated daily volume: 91.0% match across 200 simulated days (previous slide) - the DES is the foundation everything downstream (surrogate, UQ) builds on.</a:t>
+            </a:r>
+          </a:p>
+        </p:txBody>
+      </p:sp>
+    </p:spTree>
+  </p:cSld>
+  <p:clrMapOvr>
+    <a:masterClrMapping/>
+  </p:clrMapOvr>
+</p:sld>
+</file>
+
+<file path=ppt/slides/slide12.xml><?xml version="1.0" encoding="utf-8"?>
+<p:sld xmlns:a="http://schemas.openxmlformats.org/drawingml/2006/main" xmlns:p="http://schemas.openxmlformats.org/presentationml/2006/main" xmlns:r="http://schemas.openxmlformats.org/officeDocument/2006/relationships">
+  <p:cSld>
+    <p:spTree>
+      <p:nvGrpSpPr>
+        <p:cNvPr id="1" name=""/>
+        <p:cNvGrpSpPr/>
+        <p:nvPr/>
+      </p:nvGrpSpPr>
+      <p:grpSpPr/>
+      <p:sp>
+        <p:nvSpPr>
+          <p:cNvPr id="2" name="Title 1"/>
+          <p:cNvSpPr>
+            <a:spLocks noGrp="1"/>
+          </p:cNvSpPr>
+          <p:nvPr>
+            <p:ph type="title"/>
+          </p:nvPr>
+        </p:nvSpPr>
+        <p:spPr/>
+        <p:txBody>
+          <a:bodyPr/>
+          <a:lstStyle/>
+          <a:p>
+            <a:r>
+              <a:rPr b="1">
+                <a:solidFill>
+                  <a:srgbClr val="1E40AF"/>
+                </a:solidFill>
+              </a:rPr>
+              <a:t>Literature Review Snapshot</a:t>
+            </a:r>
+          </a:p>
+        </p:txBody>
+      </p:sp>
+      <p:sp>
+        <p:nvSpPr>
+          <p:cNvPr id="3" name="Content Placeholder 2"/>
+          <p:cNvSpPr>
+            <a:spLocks noGrp="1"/>
+          </p:cNvSpPr>
+          <p:nvPr>
+            <p:ph idx="1"/>
+          </p:nvPr>
+        </p:nvSpPr>
+        <p:spPr/>
+        <p:txBody>
+          <a:bodyPr wrap="square"/>
+          <a:lstStyle/>
+          <a:p>
+            <a:pPr/>
+            <a:r>
+              <a:rPr sz="1500"/>
+              <a:t>Focused core review: 20 papers across 5 categories, 3 reviewed in depth (including Gopakumar et al. 2026), plus 10 real-dataset papers below.</a:t>
+            </a:r>
+          </a:p>
+          <a:p>
+            <a:pPr lvl="1"/>
+            <a:r>
+              <a:rPr sz="1500"/>
+              <a:t>Conformal prediction foundations: 5 papers</a:t>
+            </a:r>
+          </a:p>
+          <a:p>
+            <a:pPr lvl="1"/>
+            <a:r>
+              <a:rPr sz="1500"/>
+              <a:t>Mondrian / conditional-coverage CP: 4 papers</a:t>
+            </a:r>
+          </a:p>
+          <a:p>
+            <a:pPr lvl="1"/>
+            <a:r>
+              <a:rPr sz="1500"/>
+              <a:t>Surrogate modeling &amp; uncertainty quantification: 4 papers</a:t>
+            </a:r>
+          </a:p>
+          <a:p>
+            <a:pPr lvl="1"/>
+            <a:r>
+              <a:rPr sz="1500"/>
+              <a:t>Queueing theory &amp; ED operations research: 3 papers</a:t>
+            </a:r>
+          </a:p>
+          <a:p>
+            <a:pPr lvl="1"/>
+            <a:r>
+              <a:rPr sz="1500"/>
+              <a:t>Discrete-event simulation &amp; ED-specific ML: 4 papers</a:t>
+            </a:r>
+          </a:p>
+          <a:p>
+            <a:pPr/>
+            <a:r>
+              <a:rPr sz="1500"/>
+              <a:t>Plus 10 papers each reporting real ED service-time / length-of-stay data from their own hospital datasets, used to cross-check this project's own DES calibration numerically, not just cite them.</a:t>
+            </a:r>
+          </a:p>
+          <a:p>
+            <a:pPr/>
+            <a:r>
+              <a:rPr sz="1500"/>
+              <a:t>Includes a critical assessment: where the reviewed literature's own assumptions do or don't transfer to a discrete-event queueing domain.</a:t>
+            </a:r>
+          </a:p>
+        </p:txBody>
+      </p:sp>
+      <p:sp>
+        <p:nvSpPr>
+          <p:cNvPr id="4" name="Rectangle 3"/>
+          <p:cNvSpPr/>
+          <p:nvPr/>
+        </p:nvSpPr>
+        <p:spPr>
+          <a:xfrm>
+            <a:off x="457200" y="1170432"/>
+            <a:ext cx="1280160" cy="44450"/>
+          </a:xfrm>
+          <a:prstGeom prst="rect">
+            <a:avLst/>
+          </a:prstGeom>
+          <a:solidFill>
+            <a:srgbClr val="3B82F6"/>
+          </a:solidFill>
+          <a:ln>
+            <a:noFill/>
+          </a:ln>
+          <a:effectLst/>
+        </p:spPr>
+        <p:style>
+          <a:lnRef idx="1">
+            <a:schemeClr val="accent1"/>
+          </a:lnRef>
+          <a:fillRef idx="3">
+            <a:schemeClr val="accent1"/>
+          </a:fillRef>
+          <a:effectRef idx="2">
+            <a:schemeClr val="accent1"/>
+          </a:effectRef>
+          <a:fontRef idx="minor">
+            <a:schemeClr val="lt1"/>
+          </a:fontRef>
+        </p:style>
+        <p:txBody>
+          <a:bodyPr rtlCol="0" anchor="ctr"/>
+          <a:lstStyle/>
+          <a:p>
+            <a:pPr algn="ctr"/>
+          </a:p>
+        </p:txBody>
+      </p:sp>
+      <p:sp>
+        <p:nvSpPr>
+          <p:cNvPr id="5" name="TextBox 4"/>
+          <p:cNvSpPr txBox="1"/>
+          <p:nvPr/>
+        </p:nvSpPr>
+        <p:spPr>
+          <a:xfrm>
+            <a:off x="7955279" y="6446520"/>
+            <a:ext cx="1005840" cy="320040"/>
+          </a:xfrm>
+          <a:prstGeom prst="rect">
+            <a:avLst/>
+          </a:prstGeom>
+          <a:noFill/>
+        </p:spPr>
+        <p:txBody>
+          <a:bodyPr wrap="none">
+            <a:spAutoFit/>
+          </a:bodyPr>
+          <a:lstStyle/>
+          <a:p>
+            <a:pPr algn="r"/>
+            <a:r>
+              <a:rPr sz="900">
+                <a:solidFill>
+                  <a:srgbClr val="6B7280"/>
+                </a:solidFill>
+              </a:rPr>
+              <a:t>23AID201  ·  12/13</a:t>
+            </a:r>
+          </a:p>
+        </p:txBody>
+      </p:sp>
+    </p:spTree>
+  </p:cSld>
+  <p:clrMapOvr>
+    <a:masterClrMapping/>
+  </p:clrMapOvr>
+</p:sld>
+</file>
+
+<file path=ppt/slides/slide13.xml><?xml version="1.0" encoding="utf-8"?>
+<p:sld xmlns:a="http://schemas.openxmlformats.org/drawingml/2006/main" xmlns:p="http://schemas.openxmlformats.org/presentationml/2006/main" xmlns:r="http://schemas.openxmlformats.org/officeDocument/2006/relationships">
+  <p:cSld>
+    <p:spTree>
+      <p:nvGrpSpPr>
+        <p:cNvPr id="1" name=""/>
+        <p:cNvGrpSpPr/>
+        <p:nvPr/>
+      </p:nvGrpSpPr>
+      <p:grpSpPr/>
+      <p:sp>
+        <p:nvSpPr>
+          <p:cNvPr id="2" name="Title 1"/>
+          <p:cNvSpPr>
+            <a:spLocks noGrp="1"/>
+          </p:cNvSpPr>
+          <p:nvPr>
+            <p:ph type="title"/>
+          </p:nvPr>
+        </p:nvSpPr>
+        <p:spPr/>
+        <p:txBody>
+          <a:bodyPr/>
+          <a:lstStyle/>
+          <a:p>
+            <a:r>
+              <a:rPr b="1">
+                <a:solidFill>
+                  <a:srgbClr val="1E40AF"/>
+                </a:solidFill>
+              </a:rPr>
+              <a:t>Future Scope - End-Sem</a:t>
+            </a:r>
+          </a:p>
+        </p:txBody>
+      </p:sp>
+      <p:sp>
+        <p:nvSpPr>
+          <p:cNvPr id="3" name="Content Placeholder 2"/>
+          <p:cNvSpPr>
+            <a:spLocks noGrp="1"/>
+          </p:cNvSpPr>
+          <p:nvPr>
+            <p:ph idx="1"/>
+          </p:nvPr>
+        </p:nvSpPr>
+        <p:spPr/>
+        <p:txBody>
+          <a:bodyPr wrap="square"/>
+          <a:lstStyle/>
+          <a:p>
+            <a:pPr/>
+            <a:r>
+              <a:rPr sz="1800"/>
+              <a:t>Standard conformal prediction on surrogate residuals, using the DES/surrogate pipeline already built and validated in Phase 1.</a:t>
+            </a:r>
+          </a:p>
+          <a:p>
+            <a:pPr/>
+            <a:r>
+              <a:rPr sz="1800"/>
+              <a:t>Mondrian CP - partition calibration by staffing tercile x arrival-rate tercile (9 categories); measure whether per-category coverage holds where the pooled/marginal guarantee doesn't.</a:t>
+            </a:r>
+          </a:p>
+          <a:p>
+            <a:pPr/>
+            <a:r>
+              <a:rPr sz="1800"/>
+              <a:t>Stress-test exchangeability with an out-of-distribution demand-surge scenario; see where standard CP and Mondrian CP hold up or break down.</a:t>
+            </a:r>
+          </a:p>
+          <a:p>
+            <a:pPr/>
+            <a:r>
+              <a:rPr sz="1800"/>
+              <a:t>Full comparison - GP baseline vs. standard CP vs. Mondrian CP on coverage and interval width.</a:t>
+            </a:r>
+          </a:p>
+          <a:p>
+            <a:pPr/>
+            <a:r>
+              <a:rPr sz="1800"/>
+              <a:t>End-sem PPT and report: a quantified answer on whether Mondrian CP closes the marginal-vs-conditional coverage gap in this domain.</a:t>
+            </a:r>
+          </a:p>
+        </p:txBody>
+      </p:sp>
+      <p:sp>
+        <p:nvSpPr>
+          <p:cNvPr id="4" name="Rectangle 3"/>
+          <p:cNvSpPr/>
+          <p:nvPr/>
+        </p:nvSpPr>
+        <p:spPr>
+          <a:xfrm>
+            <a:off x="457200" y="1170432"/>
+            <a:ext cx="1280160" cy="44450"/>
+          </a:xfrm>
+          <a:prstGeom prst="rect">
+            <a:avLst/>
+          </a:prstGeom>
+          <a:solidFill>
+            <a:srgbClr val="3B82F6"/>
+          </a:solidFill>
+          <a:ln>
+            <a:noFill/>
+          </a:ln>
+          <a:effectLst/>
+        </p:spPr>
+        <p:style>
+          <a:lnRef idx="1">
+            <a:schemeClr val="accent1"/>
+          </a:lnRef>
+          <a:fillRef idx="3">
+            <a:schemeClr val="accent1"/>
+          </a:fillRef>
+          <a:effectRef idx="2">
+            <a:schemeClr val="accent1"/>
+          </a:effectRef>
+          <a:fontRef idx="minor">
+            <a:schemeClr val="lt1"/>
+          </a:fontRef>
+        </p:style>
+        <p:txBody>
+          <a:bodyPr rtlCol="0" anchor="ctr"/>
+          <a:lstStyle/>
+          <a:p>
+            <a:pPr algn="ctr"/>
+          </a:p>
+        </p:txBody>
+      </p:sp>
+      <p:sp>
+        <p:nvSpPr>
+          <p:cNvPr id="5" name="TextBox 4"/>
+          <p:cNvSpPr txBox="1"/>
+          <p:nvPr/>
+        </p:nvSpPr>
+        <p:spPr>
+          <a:xfrm>
+            <a:off x="7955279" y="6446520"/>
+            <a:ext cx="1005840" cy="320040"/>
+          </a:xfrm>
+          <a:prstGeom prst="rect">
+            <a:avLst/>
+          </a:prstGeom>
+          <a:noFill/>
+        </p:spPr>
+        <p:txBody>
+          <a:bodyPr wrap="none">
+            <a:spAutoFit/>
+          </a:bodyPr>
+          <a:lstStyle/>
+          <a:p>
+            <a:pPr algn="r"/>
+            <a:r>
+              <a:rPr sz="900">
+                <a:solidFill>
+                  <a:srgbClr val="6B7280"/>
+                </a:solidFill>
+              </a:rPr>
+              <a:t>23AID201  ·  13/13</a:t>
+            </a:r>
+          </a:p>
+        </p:txBody>
+      </p:sp>
+    </p:spTree>
+  </p:cSld>
+  <p:clrMapOvr>
+    <a:masterClrMapping/>
+  </p:clrMapOvr>
+</p:sld>
+</file>
+
+<file path=ppt/slides/slide2.xml><?xml version="1.0" encoding="utf-8"?>
+<p:sld xmlns:a="http://schemas.openxmlformats.org/drawingml/2006/main" xmlns:p="http://schemas.openxmlformats.org/presentationml/2006/main" xmlns:r="http://schemas.openxmlformats.org/officeDocument/2006/relationships">
+  <p:cSld>
+    <p:spTree>
+      <p:nvGrpSpPr>
+        <p:cNvPr id="1" name=""/>
+        <p:cNvGrpSpPr/>
+        <p:nvPr/>
+      </p:nvGrpSpPr>
+      <p:grpSpPr/>
+      <p:sp>
+        <p:nvSpPr>
+          <p:cNvPr id="2" name="Title 1"/>
+          <p:cNvSpPr>
+            <a:spLocks noGrp="1"/>
+          </p:cNvSpPr>
+          <p:nvPr>
+            <p:ph type="title"/>
+          </p:nvPr>
+        </p:nvSpPr>
+        <p:spPr/>
+        <p:txBody>
+          <a:bodyPr/>
+          <a:lstStyle/>
+          <a:p>
+            <a:r>
+              <a:rPr b="1">
+                <a:solidFill>
+                  <a:srgbClr val="1E40AF"/>
+                </a:solidFill>
+              </a:rPr>
+              <a:t>Contents</a:t>
+            </a:r>
+          </a:p>
+        </p:txBody>
+      </p:sp>
+      <p:sp>
+        <p:nvSpPr>
+          <p:cNvPr id="3" name="Content Placeholder 2"/>
+          <p:cNvSpPr>
+            <a:spLocks noGrp="1"/>
+          </p:cNvSpPr>
+          <p:nvPr>
+            <p:ph idx="1"/>
+          </p:nvPr>
+        </p:nvSpPr>
+        <p:spPr/>
+        <p:txBody>
+          <a:bodyPr wrap="square"/>
+          <a:lstStyle/>
+          <a:p>
+            <a:pPr/>
+            <a:r>
+              <a:rPr sz="1800"/>
+              <a:t>1. Problem Statement</a:t>
+            </a:r>
+          </a:p>
+          <a:p>
+            <a:pPr/>
+            <a:r>
+              <a:rPr sz="1800"/>
+              <a:t>2. Research Gap</a:t>
+            </a:r>
+          </a:p>
+          <a:p>
+            <a:pPr/>
+            <a:r>
+              <a:rPr sz="1800"/>
+              <a:t>3. Why Marginal Coverage Isn't Enough (concept)</a:t>
+            </a:r>
+          </a:p>
+          <a:p>
+            <a:pPr/>
+            <a:r>
+              <a:rPr sz="1800"/>
+              <a:t>4. Our Bridging Approach</a:t>
+            </a:r>
+          </a:p>
+          <a:p>
+            <a:pPr/>
+            <a:r>
+              <a:rPr sz="1800"/>
+              <a:t>5. The Mondrian Partition (concept)</a:t>
+            </a:r>
+          </a:p>
+          <a:p>
+            <a:pPr/>
+            <a:r>
+              <a:rPr sz="1800"/>
+              <a:t>6. Methodology Overview</a:t>
+            </a:r>
+          </a:p>
+          <a:p>
+            <a:pPr/>
+            <a:r>
+              <a:rPr sz="1800"/>
+              <a:t>7. Real-World Data Used</a:t>
+            </a:r>
+          </a:p>
+          <a:p>
+            <a:pPr/>
+            <a:r>
+              <a:rPr sz="1800"/>
+              <a:t>8. Work Completed So Far (~50%)</a:t>
+            </a:r>
+          </a:p>
+          <a:p>
+            <a:pPr/>
+            <a:r>
+              <a:rPr sz="1800"/>
+              <a:t>9. The Discrete-Event Simulation</a:t>
+            </a:r>
+          </a:p>
+          <a:p>
+            <a:pPr/>
+            <a:r>
+              <a:rPr sz="1800"/>
+              <a:t>10. Literature Review Snapshot</a:t>
+            </a:r>
+          </a:p>
+          <a:p>
+            <a:pPr/>
+            <a:r>
+              <a:rPr sz="1800"/>
+              <a:t>11. Future Scope - End-Sem</a:t>
+            </a:r>
+          </a:p>
+        </p:txBody>
+      </p:sp>
+      <p:sp>
+        <p:nvSpPr>
+          <p:cNvPr id="4" name="Rectangle 3"/>
+          <p:cNvSpPr/>
+          <p:nvPr/>
+        </p:nvSpPr>
+        <p:spPr>
+          <a:xfrm>
+            <a:off x="457200" y="1170432"/>
+            <a:ext cx="1280160" cy="44450"/>
+          </a:xfrm>
+          <a:prstGeom prst="rect">
+            <a:avLst/>
+          </a:prstGeom>
+          <a:solidFill>
+            <a:srgbClr val="3B82F6"/>
+          </a:solidFill>
+          <a:ln>
+            <a:noFill/>
+          </a:ln>
+          <a:effectLst/>
+        </p:spPr>
+        <p:style>
+          <a:lnRef idx="1">
+            <a:schemeClr val="accent1"/>
+          </a:lnRef>
+          <a:fillRef idx="3">
+            <a:schemeClr val="accent1"/>
+          </a:fillRef>
+          <a:effectRef idx="2">
+            <a:schemeClr val="accent1"/>
+          </a:effectRef>
+          <a:fontRef idx="minor">
+            <a:schemeClr val="lt1"/>
+          </a:fontRef>
+        </p:style>
+        <p:txBody>
+          <a:bodyPr rtlCol="0" anchor="ctr"/>
+          <a:lstStyle/>
+          <a:p>
+            <a:pPr algn="ctr"/>
+          </a:p>
+        </p:txBody>
+      </p:sp>
+      <p:sp>
+        <p:nvSpPr>
+          <p:cNvPr id="5" name="TextBox 4"/>
+          <p:cNvSpPr txBox="1"/>
+          <p:nvPr/>
+        </p:nvSpPr>
+        <p:spPr>
+          <a:xfrm>
+            <a:off x="7955279" y="6446520"/>
+            <a:ext cx="1005840" cy="320040"/>
+          </a:xfrm>
+          <a:prstGeom prst="rect">
+            <a:avLst/>
+          </a:prstGeom>
+          <a:noFill/>
+        </p:spPr>
+        <p:txBody>
+          <a:bodyPr wrap="none">
+            <a:spAutoFit/>
+          </a:bodyPr>
+          <a:lstStyle/>
+          <a:p>
+            <a:pPr algn="r"/>
+            <a:r>
+              <a:rPr sz="900">
+                <a:solidFill>
+                  <a:srgbClr val="6B7280"/>
+                </a:solidFill>
+              </a:rPr>
+              <a:t>23AID201  ·  2/13</a:t>
+            </a:r>
+          </a:p>
+        </p:txBody>
+      </p:sp>
+    </p:spTree>
+  </p:cSld>
+  <p:clrMapOvr>
+    <a:masterClrMapping/>
+  </p:clrMapOvr>
+</p:sld>
+</file>
+
+<file path=ppt/slides/slide3.xml><?xml version="1.0" encoding="utf-8"?>
+<p:sld xmlns:a="http://schemas.openxmlformats.org/drawingml/2006/main" xmlns:p="http://schemas.openxmlformats.org/presentationml/2006/main" xmlns:r="http://schemas.openxmlformats.org/officeDocument/2006/relationships">
+  <p:cSld>
+    <p:spTree>
+      <p:nvGrpSpPr>
+        <p:cNvPr id="1" name=""/>
+        <p:cNvGrpSpPr/>
+        <p:nvPr/>
+      </p:nvGrpSpPr>
+      <p:grpSpPr/>
+      <p:sp>
+        <p:nvSpPr>
+          <p:cNvPr id="2" name="Title 1"/>
+          <p:cNvSpPr>
+            <a:spLocks noGrp="1"/>
+          </p:cNvSpPr>
+          <p:nvPr>
+            <p:ph type="title"/>
+          </p:nvPr>
+        </p:nvSpPr>
+        <p:spPr/>
+        <p:txBody>
+          <a:bodyPr/>
+          <a:lstStyle/>
+          <a:p>
+            <a:r>
+              <a:rPr b="1">
+                <a:solidFill>
+                  <a:srgbClr val="1E40AF"/>
+                </a:solidFill>
+              </a:rPr>
+              <a:t>Problem Statement</a:t>
+            </a:r>
+          </a:p>
+        </p:txBody>
+      </p:sp>
+      <p:sp>
+        <p:nvSpPr>
+          <p:cNvPr id="3" name="Content Placeholder 2"/>
+          <p:cNvSpPr>
+            <a:spLocks noGrp="1"/>
+          </p:cNvSpPr>
+          <p:nvPr>
+            <p:ph idx="1"/>
+          </p:nvPr>
+        </p:nvSpPr>
+        <p:spPr/>
+        <p:txBody>
+          <a:bodyPr wrap="square"/>
+          <a:lstStyle/>
+          <a:p>
+            <a:pPr/>
+            <a:r>
+              <a:rPr sz="1700"/>
+              <a:t>Surrogate models are fast, learned approximations of expensive simulations. They're used more and more to guide decisions in stochastic service systems - ER staffing, queueing networks, etc.</a:t>
+            </a:r>
+          </a:p>
+          <a:p>
+            <a:pPr/>
+            <a:r>
+              <a:rPr sz="1700"/>
+              <a:t>A point prediction from a surrogate isn't enough on its own for a decision like "will adding 2 more doctors actually bring the wait time down?" You need a calibrated interval, not just a number.</a:t>
+            </a:r>
+          </a:p>
+          <a:p>
+            <a:pPr/>
+            <a:r>
+              <a:rPr sz="1700"/>
+              <a:t>Two common ways to get that interval, and where they fall short:</a:t>
+            </a:r>
+          </a:p>
+          <a:p>
+            <a:pPr lvl="1"/>
+            <a:r>
+              <a:rPr sz="1700"/>
+              <a:t>Gaussian Processes - solid theoretically, but expensive to train (cubic cost) and the coverage guarantee depends on distributional assumptions, not a hard finite-sample bound.</a:t>
+            </a:r>
+          </a:p>
+          <a:p>
+            <a:pPr lvl="1"/>
+            <a:r>
+              <a:rPr sz="1700"/>
+              <a:t>Conformal Prediction - distribution-free, comes with a finite-sample coverage guarantee, cheap to calibrate. But it's only been validated for surrogate models in a narrow set of domains so far.</a:t>
+            </a:r>
+          </a:p>
+          <a:p>
+            <a:pPr/>
+            <a:r>
+              <a:rPr sz="1700"/>
+              <a:t>That's the question this project is built around: does CP still hold up when the surrogate is trained on a discrete-event / queueing simulation instead of the domains it's been tested on?</a:t>
+            </a:r>
+          </a:p>
+        </p:txBody>
+      </p:sp>
+      <p:sp>
+        <p:nvSpPr>
+          <p:cNvPr id="4" name="Rectangle 3"/>
+          <p:cNvSpPr/>
+          <p:nvPr/>
+        </p:nvSpPr>
+        <p:spPr>
+          <a:xfrm>
+            <a:off x="457200" y="1170432"/>
+            <a:ext cx="1280160" cy="44450"/>
+          </a:xfrm>
+          <a:prstGeom prst="rect">
+            <a:avLst/>
+          </a:prstGeom>
+          <a:solidFill>
+            <a:srgbClr val="3B82F6"/>
+          </a:solidFill>
+          <a:ln>
+            <a:noFill/>
+          </a:ln>
+          <a:effectLst/>
+        </p:spPr>
+        <p:style>
+          <a:lnRef idx="1">
+            <a:schemeClr val="accent1"/>
+          </a:lnRef>
+          <a:fillRef idx="3">
+            <a:schemeClr val="accent1"/>
+          </a:fillRef>
+          <a:effectRef idx="2">
+            <a:schemeClr val="accent1"/>
+          </a:effectRef>
+          <a:fontRef idx="minor">
+            <a:schemeClr val="lt1"/>
+          </a:fontRef>
+        </p:style>
+        <p:txBody>
+          <a:bodyPr rtlCol="0" anchor="ctr"/>
+          <a:lstStyle/>
+          <a:p>
+            <a:pPr algn="ctr"/>
+          </a:p>
+        </p:txBody>
+      </p:sp>
+      <p:sp>
+        <p:nvSpPr>
+          <p:cNvPr id="5" name="TextBox 4"/>
+          <p:cNvSpPr txBox="1"/>
+          <p:nvPr/>
+        </p:nvSpPr>
+        <p:spPr>
+          <a:xfrm>
+            <a:off x="7955279" y="6446520"/>
+            <a:ext cx="1005840" cy="320040"/>
+          </a:xfrm>
+          <a:prstGeom prst="rect">
+            <a:avLst/>
+          </a:prstGeom>
+          <a:noFill/>
+        </p:spPr>
+        <p:txBody>
+          <a:bodyPr wrap="none">
+            <a:spAutoFit/>
+          </a:bodyPr>
+          <a:lstStyle/>
+          <a:p>
+            <a:pPr algn="r"/>
+            <a:r>
+              <a:rPr sz="900">
+                <a:solidFill>
+                  <a:srgbClr val="6B7280"/>
+                </a:solidFill>
+              </a:rPr>
+              <a:t>23AID201  ·  3/13</a:t>
+            </a:r>
+          </a:p>
+        </p:txBody>
+      </p:sp>
+    </p:spTree>
+  </p:cSld>
+  <p:clrMapOvr>
+    <a:masterClrMapping/>
+  </p:clrMapOvr>
+</p:sld>
+</file>
+
+<file path=ppt/slides/slide4.xml><?xml version="1.0" encoding="utf-8"?>
+<p:sld xmlns:a="http://schemas.openxmlformats.org/drawingml/2006/main" xmlns:p="http://schemas.openxmlformats.org/presentationml/2006/main" xmlns:r="http://schemas.openxmlformats.org/officeDocument/2006/relationships">
+  <p:cSld>
+    <p:spTree>
+      <p:nvGrpSpPr>
+        <p:cNvPr id="1" name=""/>
+        <p:cNvGrpSpPr/>
+        <p:nvPr/>
+      </p:nvGrpSpPr>
+      <p:grpSpPr/>
+      <p:sp>
+        <p:nvSpPr>
+          <p:cNvPr id="2" name="Title 1"/>
+          <p:cNvSpPr>
+            <a:spLocks noGrp="1"/>
+          </p:cNvSpPr>
+          <p:nvPr>
+            <p:ph type="title"/>
+          </p:nvPr>
+        </p:nvSpPr>
+        <p:spPr/>
+        <p:txBody>
+          <a:bodyPr/>
+          <a:lstStyle/>
+          <a:p>
+            <a:r>
+              <a:rPr b="1">
+                <a:solidFill>
+                  <a:srgbClr val="1E40AF"/>
+                </a:solidFill>
+              </a:rPr>
+              <a:t>Research Gap</a:t>
+            </a:r>
+          </a:p>
+        </p:txBody>
+      </p:sp>
+      <p:sp>
+        <p:nvSpPr>
+          <p:cNvPr id="3" name="Content Placeholder 2"/>
+          <p:cNvSpPr>
+            <a:spLocks noGrp="1"/>
+          </p:cNvSpPr>
+          <p:nvPr>
+            <p:ph idx="1"/>
+          </p:nvPr>
+        </p:nvSpPr>
+        <p:spPr/>
+        <p:txBody>
+          <a:bodyPr wrap="square"/>
+          <a:lstStyle/>
+          <a:p>
+            <a:pPr/>
+            <a:r>
+              <a:rPr sz="1700"/>
+              <a:t>Gopakumar et al. (2026) validate conformal prediction for surrogate-model UQ, but only in physics domains - PDEs, magnetohydrodynamics, weather, fusion.</a:t>
+            </a:r>
+          </a:p>
+          <a:p>
+            <a:pPr/>
+            <a:r>
+              <a:rPr sz="1700"/>
+              <a:t>They call out two limitations explicitly:</a:t>
+            </a:r>
+          </a:p>
+          <a:p>
+            <a:pPr lvl="1"/>
+            <a:r>
+              <a:rPr sz="1700"/>
+              <a:t>Marginal coverage only - no guarantee that coverage holds within a specific subgroup or condition, only on average across everything.</a:t>
+            </a:r>
+          </a:p>
+          <a:p>
+            <a:pPr lvl="1"/>
+            <a:r>
+              <a:rPr sz="1700"/>
+              <a:t>An exchangeability assumption between calibration and test data, which they don't test under distribution shift.</a:t>
+            </a:r>
+          </a:p>
+          <a:p>
+            <a:pPr/>
+            <a:r>
+              <a:rPr sz="1700"/>
+              <a:t>Neither of those has been checked outside physics simulation. Discrete-event / queueing systems are a genuinely different kind of domain - discrete stochastic arrivals and departures, resource contention, priority queues - not a continuous PDE field. That's the gap this project sits in.</a:t>
+            </a:r>
+          </a:p>
+        </p:txBody>
+      </p:sp>
+      <p:sp>
+        <p:nvSpPr>
+          <p:cNvPr id="4" name="Rectangle 3"/>
+          <p:cNvSpPr/>
+          <p:nvPr/>
+        </p:nvSpPr>
+        <p:spPr>
+          <a:xfrm>
+            <a:off x="457200" y="1170432"/>
+            <a:ext cx="1280160" cy="44450"/>
+          </a:xfrm>
+          <a:prstGeom prst="rect">
+            <a:avLst/>
+          </a:prstGeom>
+          <a:solidFill>
+            <a:srgbClr val="3B82F6"/>
+          </a:solidFill>
+          <a:ln>
+            <a:noFill/>
+          </a:ln>
+          <a:effectLst/>
+        </p:spPr>
+        <p:style>
+          <a:lnRef idx="1">
+            <a:schemeClr val="accent1"/>
+          </a:lnRef>
+          <a:fillRef idx="3">
+            <a:schemeClr val="accent1"/>
+          </a:fillRef>
+          <a:effectRef idx="2">
+            <a:schemeClr val="accent1"/>
+          </a:effectRef>
+          <a:fontRef idx="minor">
+            <a:schemeClr val="lt1"/>
+          </a:fontRef>
+        </p:style>
+        <p:txBody>
+          <a:bodyPr rtlCol="0" anchor="ctr"/>
+          <a:lstStyle/>
+          <a:p>
+            <a:pPr algn="ctr"/>
+          </a:p>
+        </p:txBody>
+      </p:sp>
+      <p:sp>
+        <p:nvSpPr>
+          <p:cNvPr id="5" name="TextBox 4"/>
+          <p:cNvSpPr txBox="1"/>
+          <p:nvPr/>
+        </p:nvSpPr>
+        <p:spPr>
+          <a:xfrm>
+            <a:off x="7955279" y="6446520"/>
+            <a:ext cx="1005840" cy="320040"/>
+          </a:xfrm>
+          <a:prstGeom prst="rect">
+            <a:avLst/>
+          </a:prstGeom>
+          <a:noFill/>
+        </p:spPr>
+        <p:txBody>
+          <a:bodyPr wrap="none">
+            <a:spAutoFit/>
+          </a:bodyPr>
+          <a:lstStyle/>
+          <a:p>
+            <a:pPr algn="r"/>
+            <a:r>
+              <a:rPr sz="900">
+                <a:solidFill>
+                  <a:srgbClr val="6B7280"/>
+                </a:solidFill>
+              </a:rPr>
+              <a:t>23AID201  ·  4/13</a:t>
+            </a:r>
+          </a:p>
+        </p:txBody>
+      </p:sp>
+    </p:spTree>
+  </p:cSld>
+  <p:clrMapOvr>
+    <a:masterClrMapping/>
+  </p:clrMapOvr>
+</p:sld>
+</file>
+
+<file path=ppt/slides/slide5.xml><?xml version="1.0" encoding="utf-8"?>
+<p:sld xmlns:a="http://schemas.openxmlformats.org/drawingml/2006/main" xmlns:p="http://schemas.openxmlformats.org/presentationml/2006/main" xmlns:r="http://schemas.openxmlformats.org/officeDocument/2006/relationships">
+  <p:cSld>
+    <p:spTree>
+      <p:nvGrpSpPr>
+        <p:cNvPr id="1" name=""/>
+        <p:cNvGrpSpPr/>
+        <p:nvPr/>
+      </p:nvGrpSpPr>
+      <p:grpSpPr/>
+      <p:sp>
+        <p:nvSpPr>
+          <p:cNvPr id="2" name="Title 1"/>
+          <p:cNvSpPr>
+            <a:spLocks noGrp="1"/>
+          </p:cNvSpPr>
+          <p:nvPr>
+            <p:ph type="title"/>
+          </p:nvPr>
+        </p:nvSpPr>
+        <p:spPr/>
+        <p:txBody>
+          <a:bodyPr/>
+          <a:lstStyle/>
+          <a:p>
+            <a:r>
+              <a:rPr b="1" sz="3000">
+                <a:solidFill>
+                  <a:srgbClr val="1E40AF"/>
+                </a:solidFill>
+              </a:rPr>
+              <a:t>Why Marginal Coverage Isn't Enough</a:t>
+            </a:r>
+          </a:p>
+        </p:txBody>
+      </p:sp>
+      <p:sp>
+        <p:nvSpPr>
+          <p:cNvPr id="3" name="Rectangle 2"/>
+          <p:cNvSpPr/>
+          <p:nvPr/>
+        </p:nvSpPr>
+        <p:spPr>
+          <a:xfrm>
+            <a:off x="457200" y="1170432"/>
+            <a:ext cx="1280160" cy="44450"/>
+          </a:xfrm>
+          <a:prstGeom prst="rect">
+            <a:avLst/>
+          </a:prstGeom>
+          <a:solidFill>
+            <a:srgbClr val="3B82F6"/>
+          </a:solidFill>
+          <a:ln>
+            <a:noFill/>
+          </a:ln>
+          <a:effectLst/>
+        </p:spPr>
+        <p:style>
+          <a:lnRef idx="1">
+            <a:schemeClr val="accent1"/>
+          </a:lnRef>
+          <a:fillRef idx="3">
+            <a:schemeClr val="accent1"/>
+          </a:fillRef>
+          <a:effectRef idx="2">
+            <a:schemeClr val="accent1"/>
+          </a:effectRef>
+          <a:fontRef idx="minor">
+            <a:schemeClr val="lt1"/>
+          </a:fontRef>
+        </p:style>
+        <p:txBody>
+          <a:bodyPr rtlCol="0" anchor="ctr"/>
+          <a:lstStyle/>
+          <a:p>
+            <a:pPr algn="ctr"/>
+          </a:p>
+        </p:txBody>
+      </p:sp>
+      <p:sp>
+        <p:nvSpPr>
+          <p:cNvPr id="4" name="TextBox 3"/>
+          <p:cNvSpPr txBox="1"/>
+          <p:nvPr/>
+        </p:nvSpPr>
+        <p:spPr>
+          <a:xfrm>
+            <a:off x="7955279" y="6446520"/>
+            <a:ext cx="1005840" cy="320040"/>
+          </a:xfrm>
+          <a:prstGeom prst="rect">
+            <a:avLst/>
+          </a:prstGeom>
+          <a:noFill/>
+        </p:spPr>
+        <p:txBody>
+          <a:bodyPr wrap="none">
+            <a:spAutoFit/>
+          </a:bodyPr>
+          <a:lstStyle/>
+          <a:p>
+            <a:pPr algn="r"/>
+            <a:r>
+              <a:rPr sz="900">
+                <a:solidFill>
+                  <a:srgbClr val="6B7280"/>
+                </a:solidFill>
+              </a:rPr>
+              <a:t>23AID201  ·  5/13</a:t>
+            </a:r>
+          </a:p>
+        </p:txBody>
+      </p:sp>
+      <p:cxnSp>
+        <p:nvCxnSpPr>
+          <p:cNvPr id="5" name="Connector 4"/>
+          <p:cNvCxnSpPr/>
+          <p:nvPr/>
+        </p:nvCxnSpPr>
+        <p:spPr>
+          <a:xfrm>
+            <a:off x="457200" y="2240280"/>
+            <a:ext cx="6858000" cy="0"/>
+          </a:xfrm>
+          <a:prstGeom prst="line">
+            <a:avLst/>
+          </a:prstGeom>
+          <a:ln w="19050">
+            <a:solidFill>
+              <a:srgbClr val="C0392B"/>
+            </a:solidFill>
+          </a:ln>
+        </p:spPr>
+        <p:style>
+          <a:lnRef idx="2">
+            <a:schemeClr val="accent1"/>
+          </a:lnRef>
+          <a:fillRef idx="0">
+            <a:schemeClr val="accent1"/>
+          </a:fillRef>
+          <a:effectRef idx="1">
+            <a:schemeClr val="accent1"/>
+          </a:effectRef>
+          <a:fontRef idx="minor">
+            <a:schemeClr val="tx1"/>
+          </a:fontRef>
+        </p:style>
+      </p:cxnSp>
+      <p:sp>
+        <p:nvSpPr>
+          <p:cNvPr id="6" name="TextBox 5"/>
+          <p:cNvSpPr txBox="1"/>
+          <p:nvPr/>
+        </p:nvSpPr>
+        <p:spPr>
+          <a:xfrm>
+            <a:off x="7360920" y="2103120"/>
+            <a:ext cx="1188720" cy="274320"/>
+          </a:xfrm>
+          <a:prstGeom prst="rect">
+            <a:avLst/>
+          </a:prstGeom>
+          <a:noFill/>
+        </p:spPr>
+        <p:txBody>
+          <a:bodyPr wrap="none">
+            <a:spAutoFit/>
+          </a:bodyPr>
+          <a:lstStyle/>
+          <a:p>
+            <a:r>
+              <a:rPr sz="1100">
+                <a:solidFill>
+                  <a:srgbClr val="C0392B"/>
+                </a:solidFill>
+              </a:rPr>
+              <a:t>90% target</a:t>
+            </a:r>
+          </a:p>
+        </p:txBody>
+      </p:sp>
+      <p:sp>
+        <p:nvSpPr>
+          <p:cNvPr id="7" name="Rectangle 6"/>
+          <p:cNvSpPr/>
+          <p:nvPr/>
+        </p:nvSpPr>
+        <p:spPr>
+          <a:xfrm>
+            <a:off x="457200" y="2452421"/>
+            <a:ext cx="1280160" cy="2211019"/>
+          </a:xfrm>
+          <a:prstGeom prst="rect">
+            <a:avLst/>
+          </a:prstGeom>
+          <a:solidFill>
+            <a:srgbClr val="3B82F6"/>
+          </a:solidFill>
+          <a:ln>
+            <a:noFill/>
+          </a:ln>
+          <a:effectLst/>
+        </p:spPr>
+        <p:style>
+          <a:lnRef idx="1">
+            <a:schemeClr val="accent1"/>
+          </a:lnRef>
+          <a:fillRef idx="3">
+            <a:schemeClr val="accent1"/>
+          </a:fillRef>
+          <a:effectRef idx="2">
+            <a:schemeClr val="accent1"/>
+          </a:effectRef>
+          <a:fontRef idx="minor">
+            <a:schemeClr val="lt1"/>
+          </a:fontRef>
+        </p:style>
+        <p:txBody>
+          <a:bodyPr rtlCol="0" anchor="ctr"/>
+          <a:lstStyle/>
+          <a:p>
+            <a:pPr algn="ctr"/>
+          </a:p>
+        </p:txBody>
+      </p:sp>
+      <p:sp>
+        <p:nvSpPr>
+          <p:cNvPr id="8" name="TextBox 7"/>
+          <p:cNvSpPr txBox="1"/>
+          <p:nvPr/>
+        </p:nvSpPr>
+        <p:spPr>
+          <a:xfrm>
+            <a:off x="457200" y="4709160"/>
+            <a:ext cx="1280160" cy="320040"/>
+          </a:xfrm>
+          <a:prstGeom prst="rect">
+            <a:avLst/>
+          </a:prstGeom>
+          <a:noFill/>
+        </p:spPr>
+        <p:txBody>
+          <a:bodyPr wrap="none">
+            <a:spAutoFit/>
+          </a:bodyPr>
+          <a:lstStyle/>
+          <a:p>
+            <a:pPr algn="ctr"/>
+            <a:r>
+              <a:rPr sz="1100"/>
+              <a:t>Category A</a:t>
+            </a:r>
+          </a:p>
+        </p:txBody>
+      </p:sp>
+      <p:sp>
+        <p:nvSpPr>
+          <p:cNvPr id="9" name="TextBox 8"/>
+          <p:cNvSpPr txBox="1"/>
+          <p:nvPr/>
+        </p:nvSpPr>
+        <p:spPr>
+          <a:xfrm>
+            <a:off x="457200" y="2159813"/>
+            <a:ext cx="1280160" cy="274320"/>
+          </a:xfrm>
+          <a:prstGeom prst="rect">
+            <a:avLst/>
+          </a:prstGeom>
+          <a:noFill/>
+        </p:spPr>
+        <p:txBody>
+          <a:bodyPr wrap="none">
+            <a:spAutoFit/>
+          </a:bodyPr>
+          <a:lstStyle/>
+          <a:p>
+            <a:pPr algn="ctr"/>
+            <a:r>
+              <a:rPr sz="1200" b="1"/>
+              <a:t>93%</a:t>
+            </a:r>
+          </a:p>
+        </p:txBody>
+      </p:sp>
+      <p:sp>
+        <p:nvSpPr>
+          <p:cNvPr id="10" name="Rectangle 9"/>
+          <p:cNvSpPr/>
+          <p:nvPr/>
+        </p:nvSpPr>
+        <p:spPr>
+          <a:xfrm>
+            <a:off x="2148840" y="2499970"/>
+            <a:ext cx="1280160" cy="2163470"/>
+          </a:xfrm>
+          <a:prstGeom prst="rect">
+            <a:avLst/>
+          </a:prstGeom>
+          <a:solidFill>
+            <a:srgbClr val="3B82F6"/>
+          </a:solidFill>
+          <a:ln>
+            <a:noFill/>
+          </a:ln>
+          <a:effectLst/>
+        </p:spPr>
+        <p:style>
+          <a:lnRef idx="1">
+            <a:schemeClr val="accent1"/>
+          </a:lnRef>
+          <a:fillRef idx="3">
+            <a:schemeClr val="accent1"/>
+          </a:fillRef>
+          <a:effectRef idx="2">
+            <a:schemeClr val="accent1"/>
+          </a:effectRef>
+          <a:fontRef idx="minor">
+            <a:schemeClr val="lt1"/>
+          </a:fontRef>
+        </p:style>
+        <p:txBody>
+          <a:bodyPr rtlCol="0" anchor="ctr"/>
+          <a:lstStyle/>
+          <a:p>
+            <a:pPr algn="ctr"/>
+          </a:p>
+        </p:txBody>
+      </p:sp>
+      <p:sp>
+        <p:nvSpPr>
+          <p:cNvPr id="11" name="TextBox 10"/>
+          <p:cNvSpPr txBox="1"/>
+          <p:nvPr/>
+        </p:nvSpPr>
+        <p:spPr>
+          <a:xfrm>
+            <a:off x="2148840" y="4709160"/>
+            <a:ext cx="1280160" cy="320040"/>
+          </a:xfrm>
+          <a:prstGeom prst="rect">
+            <a:avLst/>
+          </a:prstGeom>
+          <a:noFill/>
+        </p:spPr>
+        <p:txBody>
+          <a:bodyPr wrap="none">
+            <a:spAutoFit/>
+          </a:bodyPr>
+          <a:lstStyle/>
+          <a:p>
+            <a:pPr algn="ctr"/>
+            <a:r>
+              <a:rPr sz="1100"/>
+              <a:t>Category B</a:t>
+            </a:r>
+          </a:p>
+        </p:txBody>
+      </p:sp>
+      <p:sp>
+        <p:nvSpPr>
+          <p:cNvPr id="12" name="TextBox 11"/>
+          <p:cNvSpPr txBox="1"/>
+          <p:nvPr/>
+        </p:nvSpPr>
+        <p:spPr>
+          <a:xfrm>
+            <a:off x="2148840" y="2207362"/>
+            <a:ext cx="1280160" cy="274320"/>
+          </a:xfrm>
+          <a:prstGeom prst="rect">
+            <a:avLst/>
+          </a:prstGeom>
+          <a:noFill/>
+        </p:spPr>
+        <p:txBody>
+          <a:bodyPr wrap="none">
+            <a:spAutoFit/>
+          </a:bodyPr>
+          <a:lstStyle/>
+          <a:p>
+            <a:pPr algn="ctr"/>
+            <a:r>
+              <a:rPr sz="1200" b="1"/>
+              <a:t>91%</a:t>
+            </a:r>
+          </a:p>
+        </p:txBody>
+      </p:sp>
+      <p:sp>
+        <p:nvSpPr>
+          <p:cNvPr id="13" name="Rectangle 12"/>
+          <p:cNvSpPr/>
+          <p:nvPr/>
+        </p:nvSpPr>
+        <p:spPr>
+          <a:xfrm>
+            <a:off x="3840480" y="2523744"/>
+            <a:ext cx="1280160" cy="2139696"/>
+          </a:xfrm>
+          <a:prstGeom prst="rect">
+            <a:avLst/>
+          </a:prstGeom>
+          <a:solidFill>
+            <a:srgbClr val="3B82F6"/>
+          </a:solidFill>
+          <a:ln>
+            <a:noFill/>
+          </a:ln>
+          <a:effectLst/>
+        </p:spPr>
+        <p:style>
+          <a:lnRef idx="1">
+            <a:schemeClr val="accent1"/>
+          </a:lnRef>
+          <a:fillRef idx="3">
+            <a:schemeClr val="accent1"/>
+          </a:fillRef>
+          <a:effectRef idx="2">
+            <a:schemeClr val="accent1"/>
+          </a:effectRef>
+          <a:fontRef idx="minor">
+            <a:schemeClr val="lt1"/>
+          </a:fontRef>
+        </p:style>
+        <p:txBody>
+          <a:bodyPr rtlCol="0" anchor="ctr"/>
+          <a:lstStyle/>
+          <a:p>
+            <a:pPr algn="ctr"/>
+          </a:p>
+        </p:txBody>
+      </p:sp>
+      <p:sp>
+        <p:nvSpPr>
+          <p:cNvPr id="14" name="TextBox 13"/>
+          <p:cNvSpPr txBox="1"/>
+          <p:nvPr/>
+        </p:nvSpPr>
+        <p:spPr>
+          <a:xfrm>
+            <a:off x="3840480" y="4709160"/>
+            <a:ext cx="1280160" cy="320040"/>
+          </a:xfrm>
+          <a:prstGeom prst="rect">
+            <a:avLst/>
+          </a:prstGeom>
+          <a:noFill/>
+        </p:spPr>
+        <p:txBody>
+          <a:bodyPr wrap="none">
+            <a:spAutoFit/>
+          </a:bodyPr>
+          <a:lstStyle/>
+          <a:p>
+            <a:pPr algn="ctr"/>
+            <a:r>
+              <a:rPr sz="1100"/>
+              <a:t>Category C</a:t>
+            </a:r>
+          </a:p>
+        </p:txBody>
+      </p:sp>
+      <p:sp>
+        <p:nvSpPr>
+          <p:cNvPr id="15" name="TextBox 14"/>
+          <p:cNvSpPr txBox="1"/>
+          <p:nvPr/>
+        </p:nvSpPr>
+        <p:spPr>
+          <a:xfrm>
+            <a:off x="3840480" y="2231136"/>
+            <a:ext cx="1280160" cy="274320"/>
+          </a:xfrm>
+          <a:prstGeom prst="rect">
+            <a:avLst/>
+          </a:prstGeom>
+          <a:noFill/>
+        </p:spPr>
+        <p:txBody>
+          <a:bodyPr wrap="none">
+            <a:spAutoFit/>
+          </a:bodyPr>
+          <a:lstStyle/>
+          <a:p>
+            <a:pPr algn="ctr"/>
+            <a:r>
+              <a:rPr sz="1200" b="1"/>
+              <a:t>90%</a:t>
+            </a:r>
+          </a:p>
+        </p:txBody>
+      </p:sp>
+      <p:sp>
+        <p:nvSpPr>
+          <p:cNvPr id="16" name="Rectangle 15"/>
+          <p:cNvSpPr/>
+          <p:nvPr/>
+        </p:nvSpPr>
+        <p:spPr>
+          <a:xfrm>
+            <a:off x="5532120" y="3046781"/>
+            <a:ext cx="1280160" cy="1616659"/>
+          </a:xfrm>
+          <a:prstGeom prst="rect">
+            <a:avLst/>
+          </a:prstGeom>
+          <a:solidFill>
+            <a:srgbClr val="C0392B"/>
+          </a:solidFill>
+          <a:ln>
+            <a:noFill/>
+          </a:ln>
+          <a:effectLst/>
+        </p:spPr>
+        <p:style>
+          <a:lnRef idx="1">
+            <a:schemeClr val="accent1"/>
+          </a:lnRef>
+          <a:fillRef idx="3">
+            <a:schemeClr val="accent1"/>
+          </a:fillRef>
+          <a:effectRef idx="2">
+            <a:schemeClr val="accent1"/>
+          </a:effectRef>
+          <a:fontRef idx="minor">
+            <a:schemeClr val="lt1"/>
+          </a:fontRef>
+        </p:style>
+        <p:txBody>
+          <a:bodyPr rtlCol="0" anchor="ctr"/>
+          <a:lstStyle/>
+          <a:p>
+            <a:pPr algn="ctr"/>
+          </a:p>
+        </p:txBody>
+      </p:sp>
+      <p:sp>
+        <p:nvSpPr>
+          <p:cNvPr id="17" name="TextBox 16"/>
+          <p:cNvSpPr txBox="1"/>
+          <p:nvPr/>
+        </p:nvSpPr>
+        <p:spPr>
+          <a:xfrm>
+            <a:off x="5532120" y="4709160"/>
+            <a:ext cx="1280160" cy="320040"/>
+          </a:xfrm>
+          <a:prstGeom prst="rect">
+            <a:avLst/>
+          </a:prstGeom>
+          <a:noFill/>
+        </p:spPr>
+        <p:txBody>
+          <a:bodyPr wrap="none">
+            <a:spAutoFit/>
+          </a:bodyPr>
+          <a:lstStyle/>
+          <a:p>
+            <a:pPr algn="ctr"/>
+            <a:r>
+              <a:rPr sz="1100"/>
+              <a:t>Category D</a:t>
+            </a:r>
+          </a:p>
+        </p:txBody>
+      </p:sp>
+      <p:sp>
+        <p:nvSpPr>
+          <p:cNvPr id="18" name="TextBox 17"/>
+          <p:cNvSpPr txBox="1"/>
+          <p:nvPr/>
+        </p:nvSpPr>
+        <p:spPr>
+          <a:xfrm>
+            <a:off x="5532120" y="2754173"/>
+            <a:ext cx="1280160" cy="274320"/>
+          </a:xfrm>
+          <a:prstGeom prst="rect">
+            <a:avLst/>
+          </a:prstGeom>
+          <a:noFill/>
+        </p:spPr>
+        <p:txBody>
+          <a:bodyPr wrap="none">
+            <a:spAutoFit/>
+          </a:bodyPr>
+          <a:lstStyle/>
+          <a:p>
+            <a:pPr algn="ctr"/>
+            <a:r>
+              <a:rPr sz="1200" b="1"/>
+              <a:t>68%</a:t>
+            </a:r>
+          </a:p>
+        </p:txBody>
+      </p:sp>
+      <p:sp>
+        <p:nvSpPr>
+          <p:cNvPr id="19" name="TextBox 18"/>
+          <p:cNvSpPr txBox="1"/>
+          <p:nvPr/>
+        </p:nvSpPr>
+        <p:spPr>
+          <a:xfrm>
+            <a:off x="457200" y="5166360"/>
+            <a:ext cx="8229600" cy="1463040"/>
+          </a:xfrm>
+          <a:prstGeom prst="rect">
+            <a:avLst/>
+          </a:prstGeom>
+          <a:noFill/>
+        </p:spPr>
+        <p:txBody>
+          <a:bodyPr wrap="square">
+            <a:spAutoFit/>
+          </a:bodyPr>
+          <a:lstStyle/>
+          <a:p>
+            <a:r>
+              <a:rPr sz="1300" i="1">
+                <a:solidFill>
+                  <a:srgbClr val="6B7280"/>
+                </a:solidFill>
+              </a:rPr>
+              <a:t>Illustrative concept, not this project's own results (those come in Phase 2) - a generic 4-category example of why a single marginal (pooled) coverage number can mislead.</a:t>
+            </a:r>
+          </a:p>
+          <a:p>
+            <a:r>
+              <a:rPr sz="1300"/>
+              <a:t>Marginal average across all 4 categories here = 90.5% - looks like the target is met.</a:t>
+            </a:r>
+          </a:p>
+          <a:p>
+            <a:r>
+              <a:rPr sz="1300"/>
+              <a:t>But Category D alone sits at 68% - a decision-maker relying only on the marginal number would never see this specific failure.</a:t>
+            </a:r>
+          </a:p>
+          <a:p>
+            <a:r>
+              <a:rPr sz="1300"/>
+              <a:t>This is exactly the gap Mondrian CP (per-category calibration) is designed to close - Phase 2's job.</a:t>
+            </a:r>
+          </a:p>
+        </p:txBody>
+      </p:sp>
+    </p:spTree>
+  </p:cSld>
+  <p:clrMapOvr>
+    <a:masterClrMapping/>
+  </p:clrMapOvr>
+</p:sld>
+</file>
+
+<file path=ppt/slides/slide6.xml><?xml version="1.0" encoding="utf-8"?>
+<p:sld xmlns:a="http://schemas.openxmlformats.org/drawingml/2006/main" xmlns:p="http://schemas.openxmlformats.org/presentationml/2006/main" xmlns:r="http://schemas.openxmlformats.org/officeDocument/2006/relationships">
+  <p:cSld>
+    <p:spTree>
+      <p:nvGrpSpPr>
+        <p:cNvPr id="1" name=""/>
+        <p:cNvGrpSpPr/>
+        <p:nvPr/>
+      </p:nvGrpSpPr>
+      <p:grpSpPr/>
+      <p:sp>
+        <p:nvSpPr>
+          <p:cNvPr id="2" name="Title 1"/>
+          <p:cNvSpPr>
+            <a:spLocks noGrp="1"/>
+          </p:cNvSpPr>
+          <p:nvPr>
+            <p:ph type="title"/>
+          </p:nvPr>
+        </p:nvSpPr>
+        <p:spPr/>
+        <p:txBody>
+          <a:bodyPr/>
+          <a:lstStyle/>
+          <a:p>
+            <a:r>
+              <a:rPr b="1">
+                <a:solidFill>
+                  <a:srgbClr val="1E40AF"/>
+                </a:solidFill>
+              </a:rPr>
+              <a:t>Our Bridging Approach</a:t>
+            </a:r>
+          </a:p>
+        </p:txBody>
+      </p:sp>
+      <p:sp>
+        <p:nvSpPr>
+          <p:cNvPr id="3" name="Content Placeholder 2"/>
+          <p:cNvSpPr>
+            <a:spLocks noGrp="1"/>
+          </p:cNvSpPr>
+          <p:nvPr>
+            <p:ph idx="1" sz="half"/>
+          </p:nvPr>
+        </p:nvSpPr>
+        <p:spPr>
+          <a:xfrm>
+            <a:off x="457200" y="2240280"/>
+            <a:ext cx="4037716" cy="4206240"/>
+          </a:xfrm>
+        </p:spPr>
+        <p:txBody>
+          <a:bodyPr wrap="square"/>
+          <a:lstStyle/>
+          <a:p>
+            <a:pPr/>
+            <a:r>
+              <a:rPr sz="1800"/>
+              <a:t>Addresses marginal coverage</a:t>
+            </a:r>
+          </a:p>
+          <a:p>
+            <a:pPr lvl="1"/>
+            <a:r>
+              <a:rPr sz="1600"/>
+              <a:t>Mondrian CP partitions calibration by category - staffing tercile x arrival-rate tercile - instead of lumping everything into one marginal guarantee.</a:t>
+            </a:r>
+          </a:p>
+          <a:p>
+            <a:pPr lvl="1"/>
+            <a:r>
+              <a:rPr sz="1600"/>
+              <a:t>Goal: coverage that holds up close to nominal within each category, not just on average.</a:t>
+            </a:r>
+          </a:p>
+        </p:txBody>
+      </p:sp>
+      <p:sp>
+        <p:nvSpPr>
+          <p:cNvPr id="4" name="Content Placeholder 3"/>
+          <p:cNvSpPr>
+            <a:spLocks noGrp="1"/>
+          </p:cNvSpPr>
+          <p:nvPr>
+            <p:ph idx="2" sz="half"/>
+          </p:nvPr>
+        </p:nvSpPr>
+        <p:spPr>
+          <a:xfrm>
+            <a:off x="4647895" y="2240280"/>
+            <a:ext cx="4037716" cy="4206240"/>
+          </a:xfrm>
+        </p:spPr>
+        <p:txBody>
+          <a:bodyPr wrap="square"/>
+          <a:lstStyle/>
+          <a:p>
+            <a:pPr/>
+            <a:r>
+              <a:rPr sz="1800"/>
+              <a:t>Addresses exchangeability</a:t>
+            </a:r>
+          </a:p>
+          <a:p>
+            <a:pPr lvl="1"/>
+            <a:r>
+              <a:rPr sz="1600"/>
+              <a:t>Phase 2 includes a stress test: an out-of-distribution "surge day" scenario outside the normal training range.</a:t>
+            </a:r>
+          </a:p>
+          <a:p>
+            <a:pPr lvl="1"/>
+            <a:r>
+              <a:rPr sz="1600"/>
+              <a:t>That's where we actually get to see whether standard CP and Mondrian CP hold up or break when exchangeability is violated.</a:t>
+            </a:r>
+          </a:p>
+        </p:txBody>
+      </p:sp>
+      <p:sp>
+        <p:nvSpPr>
+          <p:cNvPr id="5" name="Rectangle 4"/>
+          <p:cNvSpPr/>
+          <p:nvPr/>
+        </p:nvSpPr>
+        <p:spPr>
+          <a:xfrm>
+            <a:off x="457200" y="1170432"/>
+            <a:ext cx="1280160" cy="44450"/>
+          </a:xfrm>
+          <a:prstGeom prst="rect">
+            <a:avLst/>
+          </a:prstGeom>
+          <a:solidFill>
+            <a:srgbClr val="3B82F6"/>
+          </a:solidFill>
+          <a:ln>
+            <a:noFill/>
+          </a:ln>
+          <a:effectLst/>
+        </p:spPr>
+        <p:style>
+          <a:lnRef idx="1">
+            <a:schemeClr val="accent1"/>
+          </a:lnRef>
+          <a:fillRef idx="3">
+            <a:schemeClr val="accent1"/>
+          </a:fillRef>
+          <a:effectRef idx="2">
+            <a:schemeClr val="accent1"/>
+          </a:effectRef>
+          <a:fontRef idx="minor">
+            <a:schemeClr val="lt1"/>
+          </a:fontRef>
+        </p:style>
+        <p:txBody>
+          <a:bodyPr rtlCol="0" anchor="ctr"/>
+          <a:lstStyle/>
+          <a:p>
+            <a:pPr algn="ctr"/>
+          </a:p>
+        </p:txBody>
+      </p:sp>
+      <p:sp>
+        <p:nvSpPr>
+          <p:cNvPr id="6" name="TextBox 5"/>
+          <p:cNvSpPr txBox="1"/>
+          <p:nvPr/>
+        </p:nvSpPr>
+        <p:spPr>
+          <a:xfrm>
+            <a:off x="7955279" y="6446520"/>
+            <a:ext cx="1005840" cy="320040"/>
+          </a:xfrm>
+          <a:prstGeom prst="rect">
+            <a:avLst/>
+          </a:prstGeom>
+          <a:noFill/>
+        </p:spPr>
+        <p:txBody>
+          <a:bodyPr wrap="none">
+            <a:spAutoFit/>
+          </a:bodyPr>
+          <a:lstStyle/>
+          <a:p>
+            <a:pPr algn="r"/>
+            <a:r>
+              <a:rPr sz="900">
+                <a:solidFill>
+                  <a:srgbClr val="6B7280"/>
+                </a:solidFill>
+              </a:rPr>
+              <a:t>23AID201  ·  6/13</a:t>
+            </a:r>
+          </a:p>
+        </p:txBody>
+      </p:sp>
+      <p:sp>
+        <p:nvSpPr>
+          <p:cNvPr id="7" name="TextBox 6"/>
+          <p:cNvSpPr txBox="1"/>
+          <p:nvPr/>
+        </p:nvSpPr>
+        <p:spPr>
+          <a:xfrm>
+            <a:off x="457200" y="1234440"/>
+            <a:ext cx="8229600" cy="822960"/>
+          </a:xfrm>
+          <a:prstGeom prst="rect">
+            <a:avLst/>
+          </a:prstGeom>
+          <a:noFill/>
+        </p:spPr>
+        <p:txBody>
+          <a:bodyPr wrap="square">
+            <a:spAutoFit/>
+          </a:bodyPr>
+          <a:lstStyle/>
+          <a:p>
+            <a:r>
+              <a:rPr sz="1800" i="1">
+                <a:solidFill>
+                  <a:srgbClr val="404040"/>
+                </a:solidFill>
+              </a:rPr>
+              <a:t>Core idea: apply CP, specifically Mondrian CP, to an ER queueing surrogate, and test directly whether Gopakumar et al.'s two limitations hold here.</a:t>
+            </a:r>
+          </a:p>
+        </p:txBody>
+      </p:sp>
+    </p:spTree>
+  </p:cSld>
+  <p:clrMapOvr>
+    <a:masterClrMapping/>
+  </p:clrMapOvr>
+</p:sld>
+</file>
+
+<file path=ppt/slides/slide7.xml><?xml version="1.0" encoding="utf-8"?>
+<p:sld xmlns:a="http://schemas.openxmlformats.org/drawingml/2006/main" xmlns:p="http://schemas.openxmlformats.org/presentationml/2006/main" xmlns:r="http://schemas.openxmlformats.org/officeDocument/2006/relationships">
+  <p:cSld>
+    <p:spTree>
+      <p:nvGrpSpPr>
+        <p:cNvPr id="1" name=""/>
+        <p:cNvGrpSpPr/>
+        <p:nvPr/>
+      </p:nvGrpSpPr>
+      <p:grpSpPr/>
+      <p:sp>
+        <p:nvSpPr>
+          <p:cNvPr id="2" name="Title 1"/>
+          <p:cNvSpPr>
+            <a:spLocks noGrp="1"/>
+          </p:cNvSpPr>
+          <p:nvPr>
+            <p:ph type="title"/>
+          </p:nvPr>
+        </p:nvSpPr>
+        <p:spPr/>
+        <p:txBody>
+          <a:bodyPr/>
+          <a:lstStyle/>
+          <a:p>
+            <a:r>
+              <a:rPr b="1">
+                <a:solidFill>
+                  <a:srgbClr val="1E40AF"/>
+                </a:solidFill>
+              </a:rPr>
+              <a:t>The Mondrian Partition</a:t>
+            </a:r>
+          </a:p>
+        </p:txBody>
+      </p:sp>
+      <p:sp>
+        <p:nvSpPr>
+          <p:cNvPr id="3" name="Rectangle 2"/>
+          <p:cNvSpPr/>
+          <p:nvPr/>
+        </p:nvSpPr>
+        <p:spPr>
+          <a:xfrm>
+            <a:off x="457200" y="1170432"/>
+            <a:ext cx="1280160" cy="44450"/>
+          </a:xfrm>
+          <a:prstGeom prst="rect">
+            <a:avLst/>
+          </a:prstGeom>
+          <a:solidFill>
+            <a:srgbClr val="3B82F6"/>
+          </a:solidFill>
+          <a:ln>
+            <a:noFill/>
+          </a:ln>
+          <a:effectLst/>
+        </p:spPr>
+        <p:style>
+          <a:lnRef idx="1">
+            <a:schemeClr val="accent1"/>
+          </a:lnRef>
+          <a:fillRef idx="3">
+            <a:schemeClr val="accent1"/>
+          </a:fillRef>
+          <a:effectRef idx="2">
+            <a:schemeClr val="accent1"/>
+          </a:effectRef>
+          <a:fontRef idx="minor">
+            <a:schemeClr val="lt1"/>
+          </a:fontRef>
+        </p:style>
+        <p:txBody>
+          <a:bodyPr rtlCol="0" anchor="ctr"/>
+          <a:lstStyle/>
+          <a:p>
+            <a:pPr algn="ctr"/>
+          </a:p>
+        </p:txBody>
+      </p:sp>
+      <p:sp>
+        <p:nvSpPr>
+          <p:cNvPr id="4" name="TextBox 3"/>
+          <p:cNvSpPr txBox="1"/>
+          <p:nvPr/>
+        </p:nvSpPr>
+        <p:spPr>
+          <a:xfrm>
+            <a:off x="7955279" y="6446520"/>
+            <a:ext cx="1005840" cy="320040"/>
+          </a:xfrm>
+          <a:prstGeom prst="rect">
+            <a:avLst/>
+          </a:prstGeom>
+          <a:noFill/>
+        </p:spPr>
+        <p:txBody>
+          <a:bodyPr wrap="none">
+            <a:spAutoFit/>
+          </a:bodyPr>
+          <a:lstStyle/>
+          <a:p>
+            <a:pPr algn="r"/>
+            <a:r>
+              <a:rPr sz="900">
+                <a:solidFill>
+                  <a:srgbClr val="6B7280"/>
+                </a:solidFill>
+              </a:rPr>
+              <a:t>23AID201  ·  7/13</a:t>
+            </a:r>
+          </a:p>
+        </p:txBody>
+      </p:sp>
+      <p:sp>
+        <p:nvSpPr>
+          <p:cNvPr id="5" name="Rectangle 4"/>
+          <p:cNvSpPr/>
+          <p:nvPr/>
+        </p:nvSpPr>
+        <p:spPr>
+          <a:xfrm>
+            <a:off x="3131820" y="1691640"/>
+            <a:ext cx="960120" cy="960120"/>
+          </a:xfrm>
+          <a:prstGeom prst="rect">
+            <a:avLst/>
+          </a:prstGeom>
+          <a:solidFill>
+            <a:srgbClr val="DBEAFE"/>
+          </a:solidFill>
+          <a:ln w="12700">
+            <a:solidFill>
+              <a:srgbClr val="1E40AF"/>
+            </a:solidFill>
+          </a:ln>
+          <a:effectLst/>
+        </p:spPr>
+        <p:style>
+          <a:lnRef idx="1">
+            <a:schemeClr val="accent1"/>
+          </a:lnRef>
+          <a:fillRef idx="3">
+            <a:schemeClr val="accent1"/>
+          </a:fillRef>
+          <a:effectRef idx="2">
+            <a:schemeClr val="accent1"/>
+          </a:effectRef>
+          <a:fontRef idx="minor">
+            <a:schemeClr val="lt1"/>
+          </a:fontRef>
+        </p:style>
+        <p:txBody>
+          <a:bodyPr rtlCol="0" anchor="ctr" wrap="square"/>
+          <a:lstStyle/>
+          <a:p>
+            <a:pPr algn="ctr"/>
+            <a:r>
+              <a:rPr sz="1100" b="1">
+                <a:solidFill>
+                  <a:srgbClr val="1E40AF"/>
+                </a:solidFill>
+              </a:rPr>
+              <a:t>Category 1</a:t>
+            </a:r>
+          </a:p>
+          <a:p>
+            <a:pPr algn="ctr"/>
+            <a:r>
+              <a:rPr sz="900">
+                <a:solidFill>
+                  <a:srgbClr val="404040"/>
+                </a:solidFill>
+              </a:rPr>
+              <a:t>staff=High
+arrival=Low</a:t>
+            </a:r>
+          </a:p>
+        </p:txBody>
+      </p:sp>
+      <p:sp>
+        <p:nvSpPr>
+          <p:cNvPr id="6" name="Rectangle 5"/>
+          <p:cNvSpPr/>
+          <p:nvPr/>
+        </p:nvSpPr>
+        <p:spPr>
+          <a:xfrm>
+            <a:off x="4091940" y="1691640"/>
+            <a:ext cx="960120" cy="960120"/>
+          </a:xfrm>
+          <a:prstGeom prst="rect">
+            <a:avLst/>
+          </a:prstGeom>
+          <a:solidFill>
+            <a:srgbClr val="DBEAFE"/>
+          </a:solidFill>
+          <a:ln w="12700">
+            <a:solidFill>
+              <a:srgbClr val="1E40AF"/>
+            </a:solidFill>
+          </a:ln>
+          <a:effectLst/>
+        </p:spPr>
+        <p:style>
+          <a:lnRef idx="1">
+            <a:schemeClr val="accent1"/>
+          </a:lnRef>
+          <a:fillRef idx="3">
+            <a:schemeClr val="accent1"/>
+          </a:fillRef>
+          <a:effectRef idx="2">
+            <a:schemeClr val="accent1"/>
+          </a:effectRef>
+          <a:fontRef idx="minor">
+            <a:schemeClr val="lt1"/>
+          </a:fontRef>
+        </p:style>
+        <p:txBody>
+          <a:bodyPr rtlCol="0" anchor="ctr" wrap="square"/>
+          <a:lstStyle/>
+          <a:p>
+            <a:pPr algn="ctr"/>
+            <a:r>
+              <a:rPr sz="1100" b="1">
+                <a:solidFill>
+                  <a:srgbClr val="1E40AF"/>
+                </a:solidFill>
+              </a:rPr>
+              <a:t>Category 2</a:t>
+            </a:r>
+          </a:p>
+          <a:p>
+            <a:pPr algn="ctr"/>
+            <a:r>
+              <a:rPr sz="900">
+                <a:solidFill>
+                  <a:srgbClr val="404040"/>
+                </a:solidFill>
+              </a:rPr>
+              <a:t>staff=High
+arrival=Med</a:t>
+            </a:r>
+          </a:p>
+        </p:txBody>
+      </p:sp>
+      <p:sp>
+        <p:nvSpPr>
+          <p:cNvPr id="7" name="Rectangle 6"/>
+          <p:cNvSpPr/>
+          <p:nvPr/>
+        </p:nvSpPr>
+        <p:spPr>
+          <a:xfrm>
+            <a:off x="5052060" y="1691640"/>
+            <a:ext cx="960120" cy="960120"/>
+          </a:xfrm>
+          <a:prstGeom prst="rect">
+            <a:avLst/>
+          </a:prstGeom>
+          <a:solidFill>
+            <a:srgbClr val="DBEAFE"/>
+          </a:solidFill>
+          <a:ln w="12700">
+            <a:solidFill>
+              <a:srgbClr val="1E40AF"/>
+            </a:solidFill>
+          </a:ln>
+          <a:effectLst/>
+        </p:spPr>
+        <p:style>
+          <a:lnRef idx="1">
+            <a:schemeClr val="accent1"/>
+          </a:lnRef>
+          <a:fillRef idx="3">
+            <a:schemeClr val="accent1"/>
+          </a:fillRef>
+          <a:effectRef idx="2">
+            <a:schemeClr val="accent1"/>
+          </a:effectRef>
+          <a:fontRef idx="minor">
+            <a:schemeClr val="lt1"/>
+          </a:fontRef>
+        </p:style>
+        <p:txBody>
+          <a:bodyPr rtlCol="0" anchor="ctr" wrap="square"/>
+          <a:lstStyle/>
+          <a:p>
+            <a:pPr algn="ctr"/>
+            <a:r>
+              <a:rPr sz="1100" b="1">
+                <a:solidFill>
+                  <a:srgbClr val="1E40AF"/>
+                </a:solidFill>
+              </a:rPr>
+              <a:t>Category 3</a:t>
+            </a:r>
+          </a:p>
+          <a:p>
+            <a:pPr algn="ctr"/>
+            <a:r>
+              <a:rPr sz="900">
+                <a:solidFill>
+                  <a:srgbClr val="404040"/>
+                </a:solidFill>
+              </a:rPr>
+              <a:t>staff=High
+arrival=High</a:t>
+            </a:r>
+          </a:p>
+        </p:txBody>
+      </p:sp>
+      <p:sp>
+        <p:nvSpPr>
+          <p:cNvPr id="8" name="Rectangle 7"/>
+          <p:cNvSpPr/>
+          <p:nvPr/>
+        </p:nvSpPr>
+        <p:spPr>
+          <a:xfrm>
+            <a:off x="3131820" y="2651760"/>
+            <a:ext cx="960120" cy="960120"/>
+          </a:xfrm>
+          <a:prstGeom prst="rect">
+            <a:avLst/>
+          </a:prstGeom>
+          <a:solidFill>
+            <a:srgbClr val="FDEEE6"/>
+          </a:solidFill>
+          <a:ln w="12700">
+            <a:solidFill>
+              <a:srgbClr val="1E40AF"/>
+            </a:solidFill>
+          </a:ln>
+          <a:effectLst/>
+        </p:spPr>
+        <p:style>
+          <a:lnRef idx="1">
+            <a:schemeClr val="accent1"/>
+          </a:lnRef>
+          <a:fillRef idx="3">
+            <a:schemeClr val="accent1"/>
+          </a:fillRef>
+          <a:effectRef idx="2">
+            <a:schemeClr val="accent1"/>
+          </a:effectRef>
+          <a:fontRef idx="minor">
+            <a:schemeClr val="lt1"/>
+          </a:fontRef>
+        </p:style>
+        <p:txBody>
+          <a:bodyPr rtlCol="0" anchor="ctr" wrap="square"/>
+          <a:lstStyle/>
+          <a:p>
+            <a:pPr algn="ctr"/>
+            <a:r>
+              <a:rPr sz="1100" b="1">
+                <a:solidFill>
+                  <a:srgbClr val="1E40AF"/>
+                </a:solidFill>
+              </a:rPr>
+              <a:t>Category 4</a:t>
+            </a:r>
+          </a:p>
+          <a:p>
+            <a:pPr algn="ctr"/>
+            <a:r>
+              <a:rPr sz="900">
+                <a:solidFill>
+                  <a:srgbClr val="404040"/>
+                </a:solidFill>
+              </a:rPr>
+              <a:t>staff=Med
+arrival=Low</a:t>
+            </a:r>
+          </a:p>
+        </p:txBody>
+      </p:sp>
+      <p:sp>
+        <p:nvSpPr>
+          <p:cNvPr id="9" name="Rectangle 8"/>
+          <p:cNvSpPr/>
+          <p:nvPr/>
+        </p:nvSpPr>
+        <p:spPr>
+          <a:xfrm>
+            <a:off x="4091940" y="2651760"/>
+            <a:ext cx="960120" cy="960120"/>
+          </a:xfrm>
+          <a:prstGeom prst="rect">
+            <a:avLst/>
+          </a:prstGeom>
+          <a:solidFill>
+            <a:srgbClr val="DBEAFE"/>
+          </a:solidFill>
+          <a:ln w="12700">
+            <a:solidFill>
+              <a:srgbClr val="1E40AF"/>
+            </a:solidFill>
+          </a:ln>
+          <a:effectLst/>
+        </p:spPr>
+        <p:style>
+          <a:lnRef idx="1">
+            <a:schemeClr val="accent1"/>
+          </a:lnRef>
+          <a:fillRef idx="3">
+            <a:schemeClr val="accent1"/>
+          </a:fillRef>
+          <a:effectRef idx="2">
+            <a:schemeClr val="accent1"/>
+          </a:effectRef>
+          <a:fontRef idx="minor">
+            <a:schemeClr val="lt1"/>
+          </a:fontRef>
+        </p:style>
+        <p:txBody>
+          <a:bodyPr rtlCol="0" anchor="ctr" wrap="square"/>
+          <a:lstStyle/>
+          <a:p>
+            <a:pPr algn="ctr"/>
+            <a:r>
+              <a:rPr sz="1100" b="1">
+                <a:solidFill>
+                  <a:srgbClr val="1E40AF"/>
+                </a:solidFill>
+              </a:rPr>
+              <a:t>Category 5</a:t>
+            </a:r>
+          </a:p>
+          <a:p>
+            <a:pPr algn="ctr"/>
+            <a:r>
+              <a:rPr sz="900">
+                <a:solidFill>
+                  <a:srgbClr val="404040"/>
+                </a:solidFill>
+              </a:rPr>
+              <a:t>staff=Med
+arrival=Med</a:t>
+            </a:r>
+          </a:p>
+        </p:txBody>
+      </p:sp>
+      <p:sp>
+        <p:nvSpPr>
+          <p:cNvPr id="10" name="Rectangle 9"/>
+          <p:cNvSpPr/>
+          <p:nvPr/>
+        </p:nvSpPr>
+        <p:spPr>
+          <a:xfrm>
+            <a:off x="5052060" y="2651760"/>
+            <a:ext cx="960120" cy="960120"/>
+          </a:xfrm>
+          <a:prstGeom prst="rect">
+            <a:avLst/>
+          </a:prstGeom>
+          <a:solidFill>
+            <a:srgbClr val="DBEAFE"/>
+          </a:solidFill>
+          <a:ln w="12700">
+            <a:solidFill>
+              <a:srgbClr val="1E40AF"/>
+            </a:solidFill>
+          </a:ln>
+          <a:effectLst/>
+        </p:spPr>
+        <p:style>
+          <a:lnRef idx="1">
+            <a:schemeClr val="accent1"/>
+          </a:lnRef>
+          <a:fillRef idx="3">
+            <a:schemeClr val="accent1"/>
+          </a:fillRef>
+          <a:effectRef idx="2">
+            <a:schemeClr val="accent1"/>
+          </a:effectRef>
+          <a:fontRef idx="minor">
+            <a:schemeClr val="lt1"/>
+          </a:fontRef>
+        </p:style>
+        <p:txBody>
+          <a:bodyPr rtlCol="0" anchor="ctr" wrap="square"/>
+          <a:lstStyle/>
+          <a:p>
+            <a:pPr algn="ctr"/>
+            <a:r>
+              <a:rPr sz="1100" b="1">
+                <a:solidFill>
+                  <a:srgbClr val="1E40AF"/>
+                </a:solidFill>
+              </a:rPr>
+              <a:t>Category 6</a:t>
+            </a:r>
+          </a:p>
+          <a:p>
+            <a:pPr algn="ctr"/>
+            <a:r>
+              <a:rPr sz="900">
+                <a:solidFill>
+                  <a:srgbClr val="404040"/>
+                </a:solidFill>
+              </a:rPr>
+              <a:t>staff=Med
+arrival=High</a:t>
+            </a:r>
+          </a:p>
+        </p:txBody>
+      </p:sp>
+      <p:sp>
+        <p:nvSpPr>
+          <p:cNvPr id="11" name="Rectangle 10"/>
+          <p:cNvSpPr/>
+          <p:nvPr/>
+        </p:nvSpPr>
+        <p:spPr>
+          <a:xfrm>
+            <a:off x="3131820" y="3611880"/>
+            <a:ext cx="960120" cy="960120"/>
+          </a:xfrm>
+          <a:prstGeom prst="rect">
+            <a:avLst/>
+          </a:prstGeom>
+          <a:solidFill>
+            <a:srgbClr val="DBEAFE"/>
+          </a:solidFill>
+          <a:ln w="12700">
+            <a:solidFill>
+              <a:srgbClr val="1E40AF"/>
+            </a:solidFill>
+          </a:ln>
+          <a:effectLst/>
+        </p:spPr>
+        <p:style>
+          <a:lnRef idx="1">
+            <a:schemeClr val="accent1"/>
+          </a:lnRef>
+          <a:fillRef idx="3">
+            <a:schemeClr val="accent1"/>
+          </a:fillRef>
+          <a:effectRef idx="2">
+            <a:schemeClr val="accent1"/>
+          </a:effectRef>
+          <a:fontRef idx="minor">
+            <a:schemeClr val="lt1"/>
+          </a:fontRef>
+        </p:style>
+        <p:txBody>
+          <a:bodyPr rtlCol="0" anchor="ctr" wrap="square"/>
+          <a:lstStyle/>
+          <a:p>
+            <a:pPr algn="ctr"/>
+            <a:r>
+              <a:rPr sz="1100" b="1">
+                <a:solidFill>
+                  <a:srgbClr val="1E40AF"/>
+                </a:solidFill>
+              </a:rPr>
+              <a:t>Category 7</a:t>
+            </a:r>
+          </a:p>
+          <a:p>
+            <a:pPr algn="ctr"/>
+            <a:r>
+              <a:rPr sz="900">
+                <a:solidFill>
+                  <a:srgbClr val="404040"/>
+                </a:solidFill>
+              </a:rPr>
+              <a:t>staff=Low
+arrival=Low</a:t>
+            </a:r>
+          </a:p>
+        </p:txBody>
+      </p:sp>
+      <p:sp>
+        <p:nvSpPr>
+          <p:cNvPr id="12" name="Rectangle 11"/>
+          <p:cNvSpPr/>
+          <p:nvPr/>
+        </p:nvSpPr>
+        <p:spPr>
+          <a:xfrm>
+            <a:off x="4091940" y="3611880"/>
+            <a:ext cx="960120" cy="960120"/>
+          </a:xfrm>
+          <a:prstGeom prst="rect">
+            <a:avLst/>
+          </a:prstGeom>
+          <a:solidFill>
+            <a:srgbClr val="DBEAFE"/>
+          </a:solidFill>
+          <a:ln w="12700">
+            <a:solidFill>
+              <a:srgbClr val="1E40AF"/>
+            </a:solidFill>
+          </a:ln>
+          <a:effectLst/>
+        </p:spPr>
+        <p:style>
+          <a:lnRef idx="1">
+            <a:schemeClr val="accent1"/>
+          </a:lnRef>
+          <a:fillRef idx="3">
+            <a:schemeClr val="accent1"/>
+          </a:fillRef>
+          <a:effectRef idx="2">
+            <a:schemeClr val="accent1"/>
+          </a:effectRef>
+          <a:fontRef idx="minor">
+            <a:schemeClr val="lt1"/>
+          </a:fontRef>
+        </p:style>
+        <p:txBody>
+          <a:bodyPr rtlCol="0" anchor="ctr" wrap="square"/>
+          <a:lstStyle/>
+          <a:p>
+            <a:pPr algn="ctr"/>
+            <a:r>
+              <a:rPr sz="1100" b="1">
+                <a:solidFill>
+                  <a:srgbClr val="1E40AF"/>
+                </a:solidFill>
+              </a:rPr>
+              <a:t>Category 8</a:t>
+            </a:r>
+          </a:p>
+          <a:p>
+            <a:pPr algn="ctr"/>
+            <a:r>
+              <a:rPr sz="900">
+                <a:solidFill>
+                  <a:srgbClr val="404040"/>
+                </a:solidFill>
+              </a:rPr>
+              <a:t>staff=Low
+arrival=Med</a:t>
+            </a:r>
+          </a:p>
+        </p:txBody>
+      </p:sp>
+      <p:sp>
+        <p:nvSpPr>
+          <p:cNvPr id="13" name="Rectangle 12"/>
+          <p:cNvSpPr/>
+          <p:nvPr/>
+        </p:nvSpPr>
+        <p:spPr>
+          <a:xfrm>
+            <a:off x="5052060" y="3611880"/>
+            <a:ext cx="960120" cy="960120"/>
+          </a:xfrm>
+          <a:prstGeom prst="rect">
+            <a:avLst/>
+          </a:prstGeom>
+          <a:solidFill>
+            <a:srgbClr val="DBEAFE"/>
+          </a:solidFill>
+          <a:ln w="12700">
+            <a:solidFill>
+              <a:srgbClr val="1E40AF"/>
+            </a:solidFill>
+          </a:ln>
+          <a:effectLst/>
+        </p:spPr>
+        <p:style>
+          <a:lnRef idx="1">
+            <a:schemeClr val="accent1"/>
+          </a:lnRef>
+          <a:fillRef idx="3">
+            <a:schemeClr val="accent1"/>
+          </a:fillRef>
+          <a:effectRef idx="2">
+            <a:schemeClr val="accent1"/>
+          </a:effectRef>
+          <a:fontRef idx="minor">
+            <a:schemeClr val="lt1"/>
+          </a:fontRef>
+        </p:style>
+        <p:txBody>
+          <a:bodyPr rtlCol="0" anchor="ctr" wrap="square"/>
+          <a:lstStyle/>
+          <a:p>
+            <a:pPr algn="ctr"/>
+            <a:r>
+              <a:rPr sz="1100" b="1">
+                <a:solidFill>
+                  <a:srgbClr val="1E40AF"/>
+                </a:solidFill>
+              </a:rPr>
+              <a:t>Category 9</a:t>
+            </a:r>
+          </a:p>
+          <a:p>
+            <a:pPr algn="ctr"/>
+            <a:r>
+              <a:rPr sz="900">
+                <a:solidFill>
+                  <a:srgbClr val="404040"/>
+                </a:solidFill>
+              </a:rPr>
+              <a:t>staff=Low
+arrival=High</a:t>
+            </a:r>
+          </a:p>
+        </p:txBody>
+      </p:sp>
+      <p:sp>
+        <p:nvSpPr>
+          <p:cNvPr id="14" name="TextBox 13"/>
+          <p:cNvSpPr txBox="1"/>
+          <p:nvPr/>
+        </p:nvSpPr>
+        <p:spPr>
+          <a:xfrm>
+            <a:off x="1668780" y="2674620"/>
+            <a:ext cx="1371600" cy="914400"/>
+          </a:xfrm>
+          <a:prstGeom prst="rect">
+            <a:avLst/>
+          </a:prstGeom>
+          <a:noFill/>
+        </p:spPr>
+        <p:txBody>
+          <a:bodyPr wrap="square">
+            <a:spAutoFit/>
+          </a:bodyPr>
+          <a:lstStyle/>
+          <a:p>
+            <a:pPr algn="ctr"/>
+            <a:r>
+              <a:rPr sz="1300" b="1"/>
+              <a:t>Staffing</a:t>
+            </a:r>
+          </a:p>
+          <a:p>
+            <a:pPr algn="ctr"/>
+            <a:r>
+              <a:rPr sz="1300" b="1"/>
+              <a:t>tercile</a:t>
+            </a:r>
+          </a:p>
+        </p:txBody>
+      </p:sp>
+      <p:sp>
+        <p:nvSpPr>
+          <p:cNvPr id="15" name="TextBox 14"/>
+          <p:cNvSpPr txBox="1"/>
+          <p:nvPr/>
+        </p:nvSpPr>
+        <p:spPr>
+          <a:xfrm>
+            <a:off x="3131820" y="1188720"/>
+            <a:ext cx="2880360" cy="365760"/>
+          </a:xfrm>
+          <a:prstGeom prst="rect">
+            <a:avLst/>
+          </a:prstGeom>
+          <a:noFill/>
+        </p:spPr>
+        <p:txBody>
+          <a:bodyPr wrap="none">
+            <a:spAutoFit/>
+          </a:bodyPr>
+          <a:lstStyle/>
+          <a:p>
+            <a:pPr algn="ctr"/>
+            <a:r>
+              <a:rPr sz="1300" b="1"/>
+              <a:t>Arrival-rate tercile</a:t>
+            </a:r>
+          </a:p>
+        </p:txBody>
+      </p:sp>
+      <p:sp>
+        <p:nvSpPr>
+          <p:cNvPr id="16" name="TextBox 15"/>
+          <p:cNvSpPr txBox="1"/>
+          <p:nvPr/>
+        </p:nvSpPr>
+        <p:spPr>
+          <a:xfrm>
+            <a:off x="457200" y="4892040"/>
+            <a:ext cx="8229600" cy="1463040"/>
+          </a:xfrm>
+          <a:prstGeom prst="rect">
+            <a:avLst/>
+          </a:prstGeom>
+          <a:noFill/>
+        </p:spPr>
+        <p:txBody>
+          <a:bodyPr wrap="square">
+            <a:spAutoFit/>
+          </a:bodyPr>
+          <a:lstStyle/>
+          <a:p>
+            <a:r>
+              <a:rPr sz="1400"/>
+              <a:t>9 categories total - every scenario falls into exactly one, based on its own staffing level and arrival-rate multiplier.</a:t>
+            </a:r>
+          </a:p>
+          <a:p>
+            <a:r>
+              <a:rPr sz="1400"/>
+              <a:t>Mondrian CP calibrates a separate quantile within each category, instead of one pooled quantile across all 9.</a:t>
+            </a:r>
+          </a:p>
+          <a:p>
+            <a:r>
+              <a:rPr sz="1400"/>
+              <a:t>Category 4 (staff=Med, arrival=Low - highlighted) is a comparatively low-stress cell; the opposite corner (staff=Low, arrival=High) is the one Slide 5's concept diagram flags as the highest-risk category.</a:t>
+            </a:r>
+          </a:p>
+        </p:txBody>
+      </p:sp>
+    </p:spTree>
+  </p:cSld>
+  <p:clrMapOvr>
+    <a:masterClrMapping/>
+  </p:clrMapOvr>
+</p:sld>
+</file>
+
+<file path=ppt/slides/slide8.xml><?xml version="1.0" encoding="utf-8"?>
+<p:sld xmlns:a="http://schemas.openxmlformats.org/drawingml/2006/main" xmlns:p="http://schemas.openxmlformats.org/presentationml/2006/main" xmlns:r="http://schemas.openxmlformats.org/officeDocument/2006/relationships">
+  <p:cSld>
+    <p:spTree>
+      <p:nvGrpSpPr>
+        <p:cNvPr id="1" name=""/>
+        <p:cNvGrpSpPr/>
+        <p:nvPr/>
+      </p:nvGrpSpPr>
+      <p:grpSpPr/>
+      <p:sp>
+        <p:nvSpPr>
+          <p:cNvPr id="2" name="Title 1"/>
+          <p:cNvSpPr>
+            <a:spLocks noGrp="1"/>
+          </p:cNvSpPr>
+          <p:nvPr>
+            <p:ph type="title"/>
+          </p:nvPr>
+        </p:nvSpPr>
+        <p:spPr/>
+        <p:txBody>
+          <a:bodyPr/>
+          <a:lstStyle/>
+          <a:p>
+            <a:r>
+              <a:rPr b="1">
+                <a:solidFill>
+                  <a:srgbClr val="1E40AF"/>
+                </a:solidFill>
+              </a:rPr>
+              <a:t>Methodology Overview</a:t>
+            </a:r>
+          </a:p>
+        </p:txBody>
+      </p:sp>
+      <p:sp>
+        <p:nvSpPr>
+          <p:cNvPr id="3" name="Rectangle 2"/>
+          <p:cNvSpPr/>
+          <p:nvPr/>
+        </p:nvSpPr>
+        <p:spPr>
+          <a:xfrm>
+            <a:off x="457200" y="1170432"/>
+            <a:ext cx="1280160" cy="44450"/>
+          </a:xfrm>
+          <a:prstGeom prst="rect">
+            <a:avLst/>
+          </a:prstGeom>
+          <a:solidFill>
+            <a:srgbClr val="3B82F6"/>
+          </a:solidFill>
+          <a:ln>
+            <a:noFill/>
+          </a:ln>
+          <a:effectLst/>
+        </p:spPr>
+        <p:style>
+          <a:lnRef idx="1">
+            <a:schemeClr val="accent1"/>
+          </a:lnRef>
+          <a:fillRef idx="3">
+            <a:schemeClr val="accent1"/>
+          </a:fillRef>
+          <a:effectRef idx="2">
+            <a:schemeClr val="accent1"/>
+          </a:effectRef>
+          <a:fontRef idx="minor">
+            <a:schemeClr val="lt1"/>
+          </a:fontRef>
+        </p:style>
+        <p:txBody>
+          <a:bodyPr rtlCol="0" anchor="ctr"/>
+          <a:lstStyle/>
+          <a:p>
+            <a:pPr algn="ctr"/>
+          </a:p>
+        </p:txBody>
+      </p:sp>
+      <p:sp>
+        <p:nvSpPr>
+          <p:cNvPr id="4" name="TextBox 3"/>
+          <p:cNvSpPr txBox="1"/>
+          <p:nvPr/>
+        </p:nvSpPr>
+        <p:spPr>
+          <a:xfrm>
+            <a:off x="7955279" y="6446520"/>
+            <a:ext cx="1005840" cy="320040"/>
+          </a:xfrm>
+          <a:prstGeom prst="rect">
+            <a:avLst/>
+          </a:prstGeom>
+          <a:noFill/>
+        </p:spPr>
+        <p:txBody>
+          <a:bodyPr wrap="none">
+            <a:spAutoFit/>
+          </a:bodyPr>
+          <a:lstStyle/>
+          <a:p>
+            <a:pPr algn="r"/>
+            <a:r>
+              <a:rPr sz="900">
+                <a:solidFill>
+                  <a:srgbClr val="6B7280"/>
+                </a:solidFill>
+              </a:rPr>
+              <a:t>23AID201  ·  8/13</a:t>
+            </a:r>
+          </a:p>
+        </p:txBody>
+      </p:sp>
+      <p:sp>
+        <p:nvSpPr>
+          <p:cNvPr id="5" name="Rectangle 4"/>
+          <p:cNvSpPr/>
+          <p:nvPr/>
+        </p:nvSpPr>
+        <p:spPr>
+          <a:xfrm>
+            <a:off x="457200" y="2103120"/>
+            <a:ext cx="2377440" cy="1188720"/>
+          </a:xfrm>
+          <a:prstGeom prst="rect">
+            <a:avLst/>
+          </a:prstGeom>
+          <a:noFill/>
+          <a:ln w="15875">
+            <a:solidFill>
+              <a:srgbClr val="404040"/>
+            </a:solidFill>
+          </a:ln>
+          <a:effectLst/>
+        </p:spPr>
+        <p:style>
+          <a:lnRef idx="1">
+            <a:schemeClr val="accent1"/>
+          </a:lnRef>
+          <a:fillRef idx="3">
+            <a:schemeClr val="accent1"/>
+          </a:fillRef>
+          <a:effectRef idx="2">
+            <a:schemeClr val="accent1"/>
+          </a:effectRef>
+          <a:fontRef idx="minor">
+            <a:schemeClr val="lt1"/>
+          </a:fontRef>
+        </p:style>
+        <p:txBody>
+          <a:bodyPr rtlCol="0" anchor="ctr" wrap="square"/>
+          <a:lstStyle/>
+          <a:p>
+            <a:pPr algn="ctr"/>
+            <a:r>
+              <a:rPr sz="1400" b="1">
+                <a:solidFill>
+                  <a:srgbClr val="000000"/>
+                </a:solidFill>
+              </a:rPr>
+              <a:t>Discrete-Event
+Simulation</a:t>
+            </a:r>
+          </a:p>
+          <a:p>
+            <a:pPr algn="ctr"/>
+            <a:r>
+              <a:rPr sz="1050">
+                <a:solidFill>
+                  <a:srgbClr val="404040"/>
+                </a:solidFill>
+              </a:rPr>
+              <a:t>SimPy, calibrated on
+real ED data</a:t>
+            </a:r>
+          </a:p>
+        </p:txBody>
+      </p:sp>
+      <p:sp>
+        <p:nvSpPr>
+          <p:cNvPr id="6" name="Rectangle 5"/>
+          <p:cNvSpPr/>
+          <p:nvPr/>
+        </p:nvSpPr>
+        <p:spPr>
+          <a:xfrm>
+            <a:off x="3383280" y="2103120"/>
+            <a:ext cx="2377440" cy="1188720"/>
+          </a:xfrm>
+          <a:prstGeom prst="rect">
+            <a:avLst/>
+          </a:prstGeom>
+          <a:noFill/>
+          <a:ln w="15875">
+            <a:solidFill>
+              <a:srgbClr val="404040"/>
+            </a:solidFill>
+          </a:ln>
+          <a:effectLst/>
+        </p:spPr>
+        <p:style>
+          <a:lnRef idx="1">
+            <a:schemeClr val="accent1"/>
+          </a:lnRef>
+          <a:fillRef idx="3">
+            <a:schemeClr val="accent1"/>
+          </a:fillRef>
+          <a:effectRef idx="2">
+            <a:schemeClr val="accent1"/>
+          </a:effectRef>
+          <a:fontRef idx="minor">
+            <a:schemeClr val="lt1"/>
+          </a:fontRef>
+        </p:style>
+        <p:txBody>
+          <a:bodyPr rtlCol="0" anchor="ctr" wrap="square"/>
+          <a:lstStyle/>
+          <a:p>
+            <a:pPr algn="ctr"/>
+            <a:r>
+              <a:rPr sz="1400" b="1">
+                <a:solidFill>
+                  <a:srgbClr val="000000"/>
+                </a:solidFill>
+              </a:rPr>
+              <a:t>Surrogate Model</a:t>
+            </a:r>
+          </a:p>
+          <a:p>
+            <a:pPr algn="ctr"/>
+            <a:r>
+              <a:rPr sz="1050">
+                <a:solidFill>
+                  <a:srgbClr val="404040"/>
+                </a:solidFill>
+              </a:rPr>
+              <a:t>Gradient boosting on the
+DES scenario sweep</a:t>
+            </a:r>
+          </a:p>
+        </p:txBody>
+      </p:sp>
+      <p:sp>
+        <p:nvSpPr>
+          <p:cNvPr id="7" name="Rectangle 6"/>
+          <p:cNvSpPr/>
+          <p:nvPr/>
+        </p:nvSpPr>
+        <p:spPr>
+          <a:xfrm>
+            <a:off x="6309360" y="2103120"/>
+            <a:ext cx="2377440" cy="1188720"/>
+          </a:xfrm>
+          <a:prstGeom prst="rect">
+            <a:avLst/>
+          </a:prstGeom>
+          <a:noFill/>
+          <a:ln w="15875">
+            <a:solidFill>
+              <a:srgbClr val="404040"/>
+            </a:solidFill>
+          </a:ln>
+          <a:effectLst/>
+        </p:spPr>
+        <p:style>
+          <a:lnRef idx="1">
+            <a:schemeClr val="accent1"/>
+          </a:lnRef>
+          <a:fillRef idx="3">
+            <a:schemeClr val="accent1"/>
+          </a:fillRef>
+          <a:effectRef idx="2">
+            <a:schemeClr val="accent1"/>
+          </a:effectRef>
+          <a:fontRef idx="minor">
+            <a:schemeClr val="lt1"/>
+          </a:fontRef>
+        </p:style>
+        <p:txBody>
+          <a:bodyPr rtlCol="0" anchor="ctr" wrap="square"/>
+          <a:lstStyle/>
+          <a:p>
+            <a:pPr algn="ctr"/>
+            <a:r>
+              <a:rPr sz="1400" b="1">
+                <a:solidFill>
+                  <a:srgbClr val="000000"/>
+                </a:solidFill>
+              </a:rPr>
+              <a:t>Uncertainty
+Quantification</a:t>
+            </a:r>
+          </a:p>
+          <a:p>
+            <a:pPr algn="ctr"/>
+            <a:r>
+              <a:rPr sz="1050">
+                <a:solidFill>
+                  <a:srgbClr val="404040"/>
+                </a:solidFill>
+              </a:rPr>
+              <a:t>GP baseline vs.
+standard CP vs. Mondrian CP</a:t>
+            </a:r>
+          </a:p>
+        </p:txBody>
+      </p:sp>
+      <p:cxnSp>
+        <p:nvCxnSpPr>
+          <p:cNvPr id="8" name="Connector 7"/>
+          <p:cNvCxnSpPr/>
+          <p:nvPr/>
+        </p:nvCxnSpPr>
+        <p:spPr>
+          <a:xfrm>
+            <a:off x="2834640" y="2697480"/>
+            <a:ext cx="548640" cy="0"/>
+          </a:xfrm>
+          <a:prstGeom prst="line">
+            <a:avLst/>
+          </a:prstGeom>
+          <a:ln w="19050">
+            <a:solidFill>
+              <a:srgbClr val="404040"/>
+            </a:solidFill>
+          </a:ln>
+        </p:spPr>
+        <p:style>
+          <a:lnRef idx="2">
+            <a:schemeClr val="accent1"/>
+          </a:lnRef>
+          <a:fillRef idx="0">
+            <a:schemeClr val="accent1"/>
+          </a:fillRef>
+          <a:effectRef idx="1">
+            <a:schemeClr val="accent1"/>
+          </a:effectRef>
+          <a:fontRef idx="minor">
+            <a:schemeClr val="tx1"/>
+          </a:fontRef>
+        </p:style>
+      </p:cxnSp>
+      <p:cxnSp>
+        <p:nvCxnSpPr>
+          <p:cNvPr id="9" name="Connector 8"/>
+          <p:cNvCxnSpPr/>
+          <p:nvPr/>
+        </p:nvCxnSpPr>
+        <p:spPr>
+          <a:xfrm>
+            <a:off x="5760720" y="2697480"/>
+            <a:ext cx="548640" cy="0"/>
+          </a:xfrm>
+          <a:prstGeom prst="line">
+            <a:avLst/>
+          </a:prstGeom>
+          <a:ln w="19050">
+            <a:solidFill>
+              <a:srgbClr val="404040"/>
+            </a:solidFill>
+          </a:ln>
+        </p:spPr>
+        <p:style>
+          <a:lnRef idx="2">
+            <a:schemeClr val="accent1"/>
+          </a:lnRef>
+          <a:fillRef idx="0">
+            <a:schemeClr val="accent1"/>
+          </a:fillRef>
+          <a:effectRef idx="1">
+            <a:schemeClr val="accent1"/>
+          </a:effectRef>
+          <a:fontRef idx="minor">
+            <a:schemeClr val="tx1"/>
+          </a:fontRef>
+        </p:style>
+      </p:cxnSp>
+      <p:sp>
+        <p:nvSpPr>
+          <p:cNvPr id="10" name="TextBox 9"/>
+          <p:cNvSpPr txBox="1"/>
+          <p:nvPr/>
+        </p:nvSpPr>
+        <p:spPr>
+          <a:xfrm>
+            <a:off x="457200" y="3657600"/>
+            <a:ext cx="8229600" cy="2651760"/>
+          </a:xfrm>
+          <a:prstGeom prst="rect">
+            <a:avLst/>
+          </a:prstGeom>
+          <a:noFill/>
+        </p:spPr>
+        <p:txBody>
+          <a:bodyPr wrap="square">
+            <a:spAutoFit/>
+          </a:bodyPr>
+          <a:lstStyle/>
+          <a:p>
+            <a:r>
+              <a:rPr i="1" sz="1400"/>
+              <a:t>Each stage is checked against the previous one before moving on:</a:t>
+            </a:r>
+          </a:p>
+          <a:p>
+            <a:pPr/>
+            <a:r>
+              <a:rPr sz="1500"/>
+              <a:t>- DES output checked against real aggregated ED stats (91.0% match on daily volume)</a:t>
+            </a:r>
+          </a:p>
+          <a:p>
+            <a:pPr/>
+            <a:r>
+              <a:rPr sz="1500"/>
+              <a:t>- Surrogate accuracy checked against DES outputs held out from training (MAE / RMSE / R²)</a:t>
+            </a:r>
+          </a:p>
+          <a:p>
+            <a:pPr/>
+            <a:r>
+              <a:rPr sz="1500"/>
+              <a:t>- All UQ methods use the same fixed test split and the same target coverage (alpha = 0.1), so GP, standard CP and Mondrian CP end up directly comparable</a:t>
             </a:r>
           </a:p>
         </p:txBody>
@@ -5867,7 +7587,7 @@
                   <a:srgbClr val="1E40AF"/>
                 </a:solidFill>
               </a:rPr>
-              <a:t>Literature Review Snapshot</a:t>
+              <a:t>Real-World Data Used</a:t>
             </a:r>
           </a:p>
         </p:txBody>
@@ -5889,57 +7609,36 @@
           <a:p>
             <a:pPr/>
             <a:r>
-              <a:rPr sz="1500"/>
-              <a:t>Focused core review: 20 papers across 5 categories, 3 reviewed in depth (including Gopakumar et al. 2026), plus 10 real-dataset papers below.</a:t>
+              <a:rPr sz="1600"/>
+              <a:t>Hospital Triage and Patient History Data, Kaggle (maalona) - Yale New Haven Health System, retrospective, March 2014 to July 2017.</a:t>
+            </a:r>
+          </a:p>
+          <a:p>
+            <a:pPr/>
+            <a:r>
+              <a:rPr sz="1600"/>
+              <a:t>560,486 ED visits total, 972 variables per visit, across 3 EDs (1 academic + 2 community). We calibrate on Department A only, the largest / academic site: 322,283 visits, ~258.2/day.</a:t>
+            </a:r>
+          </a:p>
+          <a:p>
+            <a:pPr/>
+            <a:r>
+              <a:rPr sz="1600"/>
+              <a:t>Real vs. literature - kept separate on purpose, not blended silently:</a:t>
             </a:r>
           </a:p>
           <a:p>
             <a:pPr lvl="1"/>
             <a:r>
-              <a:rPr sz="1500"/>
-              <a:t>Conformal prediction foundations: 5 papers</a:t>
+              <a:rPr sz="1600"/>
+              <a:t>From the real data: arrival pattern by 4-hour bin, day of week, and month; ESI acuity mix; department-level daily visit rate.</a:t>
             </a:r>
           </a:p>
           <a:p>
             <a:pPr lvl="1"/>
             <a:r>
-              <a:rPr sz="1500"/>
-              <a:t>Mondrian / conditional-coverage CP: 4 papers</a:t>
-            </a:r>
-          </a:p>
-          <a:p>
-            <a:pPr lvl="1"/>
-            <a:r>
-              <a:rPr sz="1500"/>
-              <a:t>Surrogate modeling &amp; uncertainty quantification: 4 papers</a:t>
-            </a:r>
-          </a:p>
-          <a:p>
-            <a:pPr lvl="1"/>
-            <a:r>
-              <a:rPr sz="1500"/>
-              <a:t>Queueing theory &amp; ED operations research: 3 papers</a:t>
-            </a:r>
-          </a:p>
-          <a:p>
-            <a:pPr lvl="1"/>
-            <a:r>
-              <a:rPr sz="1500"/>
-              <a:t>Discrete-event simulation &amp; ED-specific ML: 4 papers</a:t>
-            </a:r>
-          </a:p>
-          <a:p>
-            <a:pPr/>
-            <a:r>
-              <a:rPr sz="1500"/>
-              <a:t>Plus 10 papers each reporting real ED service-time / length-of-stay data from their own hospital datasets, used to cross-check this project's own DES calibration numerically, not just cite them.</a:t>
-            </a:r>
-          </a:p>
-          <a:p>
-            <a:pPr/>
-            <a:r>
-              <a:rPr sz="1500"/>
-              <a:t>Includes a critical assessment: where the reviewed literature's own assumptions do or don't transfer to a discrete-event queueing domain.</a:t>
+              <a:rPr sz="1600"/>
+              <a:t>From literature: service/treatment time per ESI level (log-normal). The dataset has no discharge timestamp - checked across all 972 columns to be sure before falling back to literature values.</a:t>
             </a:r>
           </a:p>
         </p:txBody>
@@ -6017,7 +7716,7 @@
                   <a:srgbClr val="6B7280"/>
                 </a:solidFill>
               </a:rPr>
-              <a:t>23AID201  ·  9/10</a:t>
+              <a:t>23AID201  ·  9/13</a:t>
             </a:r>
           </a:p>
         </p:txBody>

--- a/slides/mid_sem_presentation.pptx
+++ b/slides/mid_sem_presentation.pptx
@@ -18,6 +18,7 @@
     <p:sldId id="266" r:id="rId17"/>
     <p:sldId id="267" r:id="rId18"/>
     <p:sldId id="268" r:id="rId19"/>
+    <p:sldId id="269" r:id="rId20"/>
   </p:sldIdLst>
   <p:sldSz cx="9144000" cy="6858000" type="screen4x3"/>
   <p:notesSz cx="6858000" cy="9144000"/>
@@ -3315,7 +3316,7 @@
                   <a:srgbClr val="1E40AF"/>
                 </a:solidFill>
               </a:rPr>
-              <a:t>Work Completed So Far (~50%)</a:t>
+              <a:t>Work Completed So Far (~80%)</a:t>
             </a:r>
           </a:p>
         </p:txBody>
@@ -3393,7 +3394,7 @@
                   <a:srgbClr val="6B7280"/>
                 </a:solidFill>
               </a:rPr>
-              <a:t>23AID201  ·  10/13</a:t>
+              <a:t>23AID201  ·  10/14</a:t>
             </a:r>
           </a:p>
         </p:txBody>
@@ -4265,7 +4266,7 @@
           <a:p>
             <a:r>
               <a:rPr sz="1400" i="1"/>
-              <a:t>GP undercovers on 3 of 4 targets (87.7-88.8% vs. a 90% target) - not surprising, since it relies on distributional assumptions rather than a finite-sample guarantee. Whether CP / Mondrian CP close that gap is what Phase 2 is for.</a:t>
+              <a:t>GP undercovers on 3 of 4 targets (87.7-88.8% vs. a 90% target) - not surprising, since it relies on distributional assumptions rather than a finite-sample guarantee. Standard CP and Mondrian CP both close most of that gap on average - next slide shows the real, more important result underneath the average.</a:t>
             </a:r>
           </a:p>
         </p:txBody>
@@ -4304,12 +4305,12 @@
           <a:lstStyle/>
           <a:p>
             <a:r>
-              <a:rPr b="1" sz="3200">
+              <a:rPr b="1" sz="2600">
                 <a:solidFill>
                   <a:srgbClr val="1E40AF"/>
                 </a:solidFill>
               </a:rPr>
-              <a:t>The Discrete-Event Simulation</a:t>
+              <a:t>Core Finding: Mondrian CP Closes the Coverage Gap</a:t>
             </a:r>
           </a:p>
         </p:txBody>
@@ -4387,35 +4388,363 @@
                   <a:srgbClr val="6B7280"/>
                 </a:solidFill>
               </a:rPr>
-              <a:t>23AID201  ·  11/13</a:t>
-            </a:r>
-          </a:p>
-        </p:txBody>
-      </p:sp>
-      <p:pic>
-        <p:nvPicPr>
-          <p:cNvPr id="5" name="Picture 4" descr="real_arrivals_by_hour.png"/>
-          <p:cNvPicPr>
-            <a:picLocks noChangeAspect="1"/>
-          </p:cNvPicPr>
+              <a:t>23AID201  ·  11/14</a:t>
+            </a:r>
+          </a:p>
+        </p:txBody>
+      </p:sp>
+      <p:graphicFrame>
+        <p:nvGraphicFramePr>
+          <p:cNvPr id="5" name="Table 4"/>
+          <p:cNvGraphicFramePr>
+            <a:graphicFrameLocks noGrp="1"/>
+          </p:cNvGraphicFramePr>
           <p:nvPr/>
-        </p:nvPicPr>
-        <p:blipFill>
-          <a:blip r:embed="rId2"/>
-          <a:stretch>
-            <a:fillRect/>
-          </a:stretch>
-        </p:blipFill>
-        <p:spPr>
-          <a:xfrm>
-            <a:off x="457200" y="1188720"/>
-            <a:ext cx="5687335" cy="3291840"/>
-          </a:xfrm>
-          <a:prstGeom prst="rect">
-            <a:avLst/>
-          </a:prstGeom>
-        </p:spPr>
-      </p:pic>
+        </p:nvGraphicFramePr>
+        <p:xfrm>
+          <a:off x="457200" y="1234440"/>
+          <a:ext cx="8229600" cy="1554480"/>
+        </p:xfrm>
+        <a:graphic>
+          <a:graphicData uri="http://schemas.openxmlformats.org/drawingml/2006/table">
+            <a:tbl>
+              <a:tblPr firstRow="1" bandRow="1">
+                <a:tableStyleId>{5C22544A-7EE6-4342-B048-85BDC9FD1C3A}</a:tableStyleId>
+              </a:tblPr>
+              <a:tblGrid>
+                <a:gridCol w="2377440"/>
+                <a:gridCol w="1463040"/>
+                <a:gridCol w="1554480"/>
+                <a:gridCol w="1554480"/>
+                <a:gridCol w="1280160"/>
+              </a:tblGrid>
+              <a:tr h="388620">
+                <a:tc>
+                  <a:txBody>
+                    <a:bodyPr/>
+                    <a:lstStyle/>
+                    <a:p>
+                      <a:r>
+                        <a:rPr b="1" sz="1300">
+                          <a:solidFill>
+                            <a:srgbClr val="FFFFFF"/>
+                          </a:solidFill>
+                        </a:rPr>
+                        <a:t>Method (30-repeat mean)</a:t>
+                      </a:r>
+                    </a:p>
+                  </a:txBody>
+                  <a:tcPr>
+                    <a:solidFill>
+                      <a:srgbClr val="1E40AF"/>
+                    </a:solidFill>
+                  </a:tcPr>
+                </a:tc>
+                <a:tc>
+                  <a:txBody>
+                    <a:bodyPr/>
+                    <a:lstStyle/>
+                    <a:p>
+                      <a:r>
+                        <a:rPr b="1" sz="1300">
+                          <a:solidFill>
+                            <a:srgbClr val="FFFFFF"/>
+                          </a:solidFill>
+                        </a:rPr>
+                        <a:t>n_patients</a:t>
+                      </a:r>
+                    </a:p>
+                  </a:txBody>
+                  <a:tcPr>
+                    <a:solidFill>
+                      <a:srgbClr val="1E40AF"/>
+                    </a:solidFill>
+                  </a:tcPr>
+                </a:tc>
+                <a:tc>
+                  <a:txBody>
+                    <a:bodyPr/>
+                    <a:lstStyle/>
+                    <a:p>
+                      <a:r>
+                        <a:rPr b="1" sz="1300">
+                          <a:solidFill>
+                            <a:srgbClr val="FFFFFF"/>
+                          </a:solidFill>
+                        </a:rPr>
+                        <a:t>mean_wait_min</a:t>
+                      </a:r>
+                    </a:p>
+                  </a:txBody>
+                  <a:tcPr>
+                    <a:solidFill>
+                      <a:srgbClr val="1E40AF"/>
+                    </a:solidFill>
+                  </a:tcPr>
+                </a:tc>
+                <a:tc>
+                  <a:txBody>
+                    <a:bodyPr/>
+                    <a:lstStyle/>
+                    <a:p>
+                      <a:r>
+                        <a:rPr b="1" sz="1300">
+                          <a:solidFill>
+                            <a:srgbClr val="FFFFFF"/>
+                          </a:solidFill>
+                        </a:rPr>
+                        <a:t>mean_total_min</a:t>
+                      </a:r>
+                    </a:p>
+                  </a:txBody>
+                  <a:tcPr>
+                    <a:solidFill>
+                      <a:srgbClr val="1E40AF"/>
+                    </a:solidFill>
+                  </a:tcPr>
+                </a:tc>
+                <a:tc>
+                  <a:txBody>
+                    <a:bodyPr/>
+                    <a:lstStyle/>
+                    <a:p>
+                      <a:r>
+                        <a:rPr b="1" sz="1300">
+                          <a:solidFill>
+                            <a:srgbClr val="FFFFFF"/>
+                          </a:solidFill>
+                        </a:rPr>
+                        <a:t>p95_wait_min</a:t>
+                      </a:r>
+                    </a:p>
+                  </a:txBody>
+                  <a:tcPr>
+                    <a:solidFill>
+                      <a:srgbClr val="1E40AF"/>
+                    </a:solidFill>
+                  </a:tcPr>
+                </a:tc>
+              </a:tr>
+              <a:tr h="388620">
+                <a:tc>
+                  <a:txBody>
+                    <a:bodyPr/>
+                    <a:lstStyle/>
+                    <a:p>
+                      <a:pPr algn="l"/>
+                      <a:r>
+                        <a:rPr sz="1300"/>
+                        <a:t>GP baseline</a:t>
+                      </a:r>
+                    </a:p>
+                  </a:txBody>
+                  <a:tcPr/>
+                </a:tc>
+                <a:tc>
+                  <a:txBody>
+                    <a:bodyPr/>
+                    <a:lstStyle/>
+                    <a:p>
+                      <a:pPr algn="ctr"/>
+                      <a:r>
+                        <a:rPr sz="1300"/>
+                        <a:t>89.6%</a:t>
+                      </a:r>
+                    </a:p>
+                  </a:txBody>
+                  <a:tcPr/>
+                </a:tc>
+                <a:tc>
+                  <a:txBody>
+                    <a:bodyPr/>
+                    <a:lstStyle/>
+                    <a:p>
+                      <a:pPr algn="ctr"/>
+                      <a:r>
+                        <a:rPr sz="1300"/>
+                        <a:t>88.3%</a:t>
+                      </a:r>
+                    </a:p>
+                  </a:txBody>
+                  <a:tcPr/>
+                </a:tc>
+                <a:tc>
+                  <a:txBody>
+                    <a:bodyPr/>
+                    <a:lstStyle/>
+                    <a:p>
+                      <a:pPr algn="ctr"/>
+                      <a:r>
+                        <a:rPr sz="1300"/>
+                        <a:t>89.1%</a:t>
+                      </a:r>
+                    </a:p>
+                  </a:txBody>
+                  <a:tcPr/>
+                </a:tc>
+                <a:tc>
+                  <a:txBody>
+                    <a:bodyPr/>
+                    <a:lstStyle/>
+                    <a:p>
+                      <a:pPr algn="ctr"/>
+                      <a:r>
+                        <a:rPr sz="1300"/>
+                        <a:t>89.0%</a:t>
+                      </a:r>
+                    </a:p>
+                  </a:txBody>
+                  <a:tcPr/>
+                </a:tc>
+              </a:tr>
+              <a:tr h="388620">
+                <a:tc>
+                  <a:txBody>
+                    <a:bodyPr/>
+                    <a:lstStyle/>
+                    <a:p>
+                      <a:pPr algn="l"/>
+                      <a:r>
+                        <a:rPr sz="1300"/>
+                        <a:t>Standard CP</a:t>
+                      </a:r>
+                    </a:p>
+                  </a:txBody>
+                  <a:tcPr/>
+                </a:tc>
+                <a:tc>
+                  <a:txBody>
+                    <a:bodyPr/>
+                    <a:lstStyle/>
+                    <a:p>
+                      <a:pPr algn="ctr"/>
+                      <a:r>
+                        <a:rPr sz="1300"/>
+                        <a:t>90.1%</a:t>
+                      </a:r>
+                    </a:p>
+                  </a:txBody>
+                  <a:tcPr/>
+                </a:tc>
+                <a:tc>
+                  <a:txBody>
+                    <a:bodyPr/>
+                    <a:lstStyle/>
+                    <a:p>
+                      <a:pPr algn="ctr"/>
+                      <a:r>
+                        <a:rPr sz="1300"/>
+                        <a:t>90.1%</a:t>
+                      </a:r>
+                    </a:p>
+                  </a:txBody>
+                  <a:tcPr/>
+                </a:tc>
+                <a:tc>
+                  <a:txBody>
+                    <a:bodyPr/>
+                    <a:lstStyle/>
+                    <a:p>
+                      <a:pPr algn="ctr"/>
+                      <a:r>
+                        <a:rPr sz="1300"/>
+                        <a:t>89.8%</a:t>
+                      </a:r>
+                    </a:p>
+                  </a:txBody>
+                  <a:tcPr/>
+                </a:tc>
+                <a:tc>
+                  <a:txBody>
+                    <a:bodyPr/>
+                    <a:lstStyle/>
+                    <a:p>
+                      <a:pPr algn="ctr"/>
+                      <a:r>
+                        <a:rPr sz="1300"/>
+                        <a:t>90.1%</a:t>
+                      </a:r>
+                    </a:p>
+                  </a:txBody>
+                  <a:tcPr/>
+                </a:tc>
+              </a:tr>
+              <a:tr h="388620">
+                <a:tc>
+                  <a:txBody>
+                    <a:bodyPr/>
+                    <a:lstStyle/>
+                    <a:p>
+                      <a:pPr algn="l"/>
+                      <a:r>
+                        <a:rPr sz="1300"/>
+                        <a:t>Mondrian CP</a:t>
+                      </a:r>
+                    </a:p>
+                  </a:txBody>
+                  <a:tcPr/>
+                </a:tc>
+                <a:tc>
+                  <a:txBody>
+                    <a:bodyPr/>
+                    <a:lstStyle/>
+                    <a:p>
+                      <a:pPr algn="ctr"/>
+                      <a:r>
+                        <a:rPr sz="1300"/>
+                        <a:t>91.0%</a:t>
+                      </a:r>
+                    </a:p>
+                  </a:txBody>
+                  <a:tcPr/>
+                </a:tc>
+                <a:tc>
+                  <a:txBody>
+                    <a:bodyPr/>
+                    <a:lstStyle/>
+                    <a:p>
+                      <a:pPr algn="ctr"/>
+                      <a:r>
+                        <a:rPr sz="1300"/>
+                        <a:t>91.1%</a:t>
+                      </a:r>
+                    </a:p>
+                  </a:txBody>
+                  <a:tcPr/>
+                </a:tc>
+                <a:tc>
+                  <a:txBody>
+                    <a:bodyPr/>
+                    <a:lstStyle/>
+                    <a:p>
+                      <a:pPr algn="ctr"/>
+                      <a:r>
+                        <a:rPr sz="1300"/>
+                        <a:t>90.8%</a:t>
+                      </a:r>
+                    </a:p>
+                  </a:txBody>
+                  <a:tcPr/>
+                </a:tc>
+                <a:tc>
+                  <a:txBody>
+                    <a:bodyPr/>
+                    <a:lstStyle/>
+                    <a:p>
+                      <a:pPr algn="ctr"/>
+                      <a:r>
+                        <a:rPr sz="1300"/>
+                        <a:t>91.4%</a:t>
+                      </a:r>
+                    </a:p>
+                  </a:txBody>
+                  <a:tcPr/>
+                </a:tc>
+              </a:tr>
+            </a:tbl>
+          </a:graphicData>
+        </a:graphic>
+      </p:graphicFrame>
       <p:sp>
         <p:nvSpPr>
           <p:cNvPr id="6" name="TextBox 5"/>
@@ -4424,8 +4753,8 @@
         </p:nvSpPr>
         <p:spPr>
           <a:xfrm>
-            <a:off x="457200" y="4617720"/>
-            <a:ext cx="8229600" cy="1737360"/>
+            <a:off x="457200" y="2880360"/>
+            <a:ext cx="8229600" cy="548640"/>
           </a:xfrm>
           <a:prstGeom prst="rect">
             <a:avLst/>
@@ -4439,20 +4768,185 @@
           <a:lstStyle/>
           <a:p>
             <a:r>
+              <a:rPr sz="1400" i="1"/>
+              <a:t>On average (marginal coverage), all three methods land close to the 90% target - this alone would look like a minor, unremarkable improvement.</a:t>
+            </a:r>
+          </a:p>
+        </p:txBody>
+      </p:sp>
+      <p:graphicFrame>
+        <p:nvGraphicFramePr>
+          <p:cNvPr id="7" name="Table 6"/>
+          <p:cNvGraphicFramePr>
+            <a:graphicFrameLocks noGrp="1"/>
+          </p:cNvGraphicFramePr>
+          <p:nvPr/>
+        </p:nvGraphicFramePr>
+        <p:xfrm>
+          <a:off x="457200" y="3520440"/>
+          <a:ext cx="8229600" cy="1051560"/>
+        </p:xfrm>
+        <a:graphic>
+          <a:graphicData uri="http://schemas.openxmlformats.org/drawingml/2006/table">
+            <a:tbl>
+              <a:tblPr firstRow="1" bandRow="1">
+                <a:tableStyleId>{5C22544A-7EE6-4342-B048-85BDC9FD1C3A}</a:tableStyleId>
+              </a:tblPr>
+              <a:tblGrid>
+                <a:gridCol w="4114800"/>
+                <a:gridCol w="2286000"/>
+                <a:gridCol w="1828800"/>
+              </a:tblGrid>
+              <a:tr h="525780">
+                <a:tc>
+                  <a:txBody>
+                    <a:bodyPr/>
+                    <a:lstStyle/>
+                    <a:p>
+                      <a:r>
+                        <a:rPr b="1" sz="1400">
+                          <a:solidFill>
+                            <a:srgbClr val="FFFFFF"/>
+                          </a:solidFill>
+                        </a:rPr>
+                        <a:t>Worst operating category (mean_wait_minutes)</a:t>
+                      </a:r>
+                    </a:p>
+                  </a:txBody>
+                  <a:tcPr>
+                    <a:solidFill>
+                      <a:srgbClr val="1E40AF"/>
+                    </a:solidFill>
+                  </a:tcPr>
+                </a:tc>
+                <a:tc>
+                  <a:txBody>
+                    <a:bodyPr/>
+                    <a:lstStyle/>
+                    <a:p>
+                      <a:r>
+                        <a:rPr b="1" sz="1400">
+                          <a:solidFill>
+                            <a:srgbClr val="FFFFFF"/>
+                          </a:solidFill>
+                        </a:rPr>
+                        <a:t>Pooled (standard) CP</a:t>
+                      </a:r>
+                    </a:p>
+                  </a:txBody>
+                  <a:tcPr>
+                    <a:solidFill>
+                      <a:srgbClr val="1E40AF"/>
+                    </a:solidFill>
+                  </a:tcPr>
+                </a:tc>
+                <a:tc>
+                  <a:txBody>
+                    <a:bodyPr/>
+                    <a:lstStyle/>
+                    <a:p>
+                      <a:r>
+                        <a:rPr b="1" sz="1400">
+                          <a:solidFill>
+                            <a:srgbClr val="FFFFFF"/>
+                          </a:solidFill>
+                        </a:rPr>
+                        <a:t>Mondrian CP</a:t>
+                      </a:r>
+                    </a:p>
+                  </a:txBody>
+                  <a:tcPr>
+                    <a:solidFill>
+                      <a:srgbClr val="1E40AF"/>
+                    </a:solidFill>
+                  </a:tcPr>
+                </a:tc>
+              </a:tr>
+              <a:tr h="525780">
+                <a:tc>
+                  <a:txBody>
+                    <a:bodyPr/>
+                    <a:lstStyle/>
+                    <a:p>
+                      <a:pPr algn="l"/>
+                      <a:r>
+                        <a:rPr sz="1400"/>
+                        <a:t>Understaffed + high arrival-rate</a:t>
+                      </a:r>
+                    </a:p>
+                  </a:txBody>
+                  <a:tcPr/>
+                </a:tc>
+                <a:tc>
+                  <a:txBody>
+                    <a:bodyPr/>
+                    <a:lstStyle/>
+                    <a:p>
+                      <a:pPr algn="ctr"/>
+                      <a:r>
+                        <a:rPr sz="1400"/>
+                        <a:t>68.2%</a:t>
+                      </a:r>
+                    </a:p>
+                  </a:txBody>
+                  <a:tcPr/>
+                </a:tc>
+                <a:tc>
+                  <a:txBody>
+                    <a:bodyPr/>
+                    <a:lstStyle/>
+                    <a:p>
+                      <a:pPr algn="ctr"/>
+                      <a:r>
+                        <a:rPr sz="1400"/>
+                        <a:t>90.9%</a:t>
+                      </a:r>
+                    </a:p>
+                  </a:txBody>
+                  <a:tcPr/>
+                </a:tc>
+              </a:tr>
+            </a:tbl>
+          </a:graphicData>
+        </a:graphic>
+      </p:graphicFrame>
+      <p:sp>
+        <p:nvSpPr>
+          <p:cNvPr id="8" name="TextBox 7"/>
+          <p:cNvSpPr txBox="1"/>
+          <p:nvPr/>
+        </p:nvSpPr>
+        <p:spPr>
+          <a:xfrm>
+            <a:off x="457200" y="4709160"/>
+            <a:ext cx="8229600" cy="1737360"/>
+          </a:xfrm>
+          <a:prstGeom prst="rect">
+            <a:avLst/>
+          </a:prstGeom>
+          <a:noFill/>
+        </p:spPr>
+        <p:txBody>
+          <a:bodyPr wrap="square">
+            <a:spAutoFit/>
+          </a:bodyPr>
+          <a:lstStyle/>
+          <a:p>
+            <a:r>
               <a:rPr sz="1400"/>
-              <a:t>SimPy discrete-event simulation of a single ED, calibrated directly on this real arrival pattern plus the real ESI acuity mix - not a generic queueing textbook example.</a:t>
+              <a:t>This is our actual central finding, the real version of Slide 5's illustrative concept: standard CP's marginal guarantee hides a severe undercoverage failure in exactly the highest-stakes operating regime - understaffed with high arrival rate.</a:t>
             </a:r>
           </a:p>
           <a:p>
             <a:r>
               <a:rPr sz="1400"/>
-              <a:t>Priority-resource pool: higher-acuity (lower ESI) patients get priority, matching real triage behavior.</a:t>
+              <a:t>Mondrian CP - calibrating separately per staffing x arrival-rate category - closes that gap without sacrificing the marginal guarantee above.</a:t>
             </a:r>
           </a:p>
           <a:p>
             <a:r>
               <a:rPr sz="1400"/>
-              <a:t>Validated against real aggregated daily volume: 91.0% match across 200 simulated days (previous slide) - the DES is the foundation everything downstream (surrogate, UQ) builds on.</a:t>
+              <a:t>Confirmed statistically significant across 30 independent repeats (paired t-test, p &lt; 0.001) - not a one-off lucky split.</a:t>
             </a:r>
           </a:p>
         </p:txBody>
@@ -4491,91 +4985,19 @@
           <a:lstStyle/>
           <a:p>
             <a:r>
-              <a:rPr b="1">
+              <a:rPr b="1" sz="3200">
                 <a:solidFill>
                   <a:srgbClr val="1E40AF"/>
                 </a:solidFill>
               </a:rPr>
-              <a:t>Literature Review Snapshot</a:t>
-            </a:r>
-          </a:p>
-        </p:txBody>
-      </p:sp>
-      <p:sp>
-        <p:nvSpPr>
-          <p:cNvPr id="3" name="Content Placeholder 2"/>
-          <p:cNvSpPr>
-            <a:spLocks noGrp="1"/>
-          </p:cNvSpPr>
-          <p:nvPr>
-            <p:ph idx="1"/>
-          </p:nvPr>
-        </p:nvSpPr>
-        <p:spPr/>
-        <p:txBody>
-          <a:bodyPr wrap="square"/>
-          <a:lstStyle/>
-          <a:p>
-            <a:pPr/>
-            <a:r>
-              <a:rPr sz="1500"/>
-              <a:t>Focused core review: 20 papers across 5 categories, 3 reviewed in depth (including Gopakumar et al. 2026), plus 10 real-dataset papers below.</a:t>
-            </a:r>
-          </a:p>
-          <a:p>
-            <a:pPr lvl="1"/>
-            <a:r>
-              <a:rPr sz="1500"/>
-              <a:t>Conformal prediction foundations: 5 papers</a:t>
-            </a:r>
-          </a:p>
-          <a:p>
-            <a:pPr lvl="1"/>
-            <a:r>
-              <a:rPr sz="1500"/>
-              <a:t>Mondrian / conditional-coverage CP: 4 papers</a:t>
-            </a:r>
-          </a:p>
-          <a:p>
-            <a:pPr lvl="1"/>
-            <a:r>
-              <a:rPr sz="1500"/>
-              <a:t>Surrogate modeling &amp; uncertainty quantification: 4 papers</a:t>
-            </a:r>
-          </a:p>
-          <a:p>
-            <a:pPr lvl="1"/>
-            <a:r>
-              <a:rPr sz="1500"/>
-              <a:t>Queueing theory &amp; ED operations research: 3 papers</a:t>
-            </a:r>
-          </a:p>
-          <a:p>
-            <a:pPr lvl="1"/>
-            <a:r>
-              <a:rPr sz="1500"/>
-              <a:t>Discrete-event simulation &amp; ED-specific ML: 4 papers</a:t>
-            </a:r>
-          </a:p>
-          <a:p>
-            <a:pPr/>
-            <a:r>
-              <a:rPr sz="1500"/>
-              <a:t>Plus 10 papers each reporting real ED service-time / length-of-stay data from their own hospital datasets, used to cross-check this project's own DES calibration numerically, not just cite them.</a:t>
-            </a:r>
-          </a:p>
-          <a:p>
-            <a:pPr/>
-            <a:r>
-              <a:rPr sz="1500"/>
-              <a:t>Includes a critical assessment: where the reviewed literature's own assumptions do or don't transfer to a discrete-event queueing domain.</a:t>
-            </a:r>
-          </a:p>
-        </p:txBody>
-      </p:sp>
-      <p:sp>
-        <p:nvSpPr>
-          <p:cNvPr id="4" name="Rectangle 3"/>
+              <a:t>The Discrete-Event Simulation</a:t>
+            </a:r>
+          </a:p>
+        </p:txBody>
+      </p:sp>
+      <p:sp>
+        <p:nvSpPr>
+          <p:cNvPr id="3" name="Rectangle 2"/>
           <p:cNvSpPr/>
           <p:nvPr/>
         </p:nvSpPr>
@@ -4619,7 +5041,7 @@
       </p:sp>
       <p:sp>
         <p:nvSpPr>
-          <p:cNvPr id="5" name="TextBox 4"/>
+          <p:cNvPr id="4" name="TextBox 3"/>
           <p:cNvSpPr txBox="1"/>
           <p:nvPr/>
         </p:nvSpPr>
@@ -4646,7 +5068,72 @@
                   <a:srgbClr val="6B7280"/>
                 </a:solidFill>
               </a:rPr>
-              <a:t>23AID201  ·  12/13</a:t>
+              <a:t>23AID201  ·  12/14</a:t>
+            </a:r>
+          </a:p>
+        </p:txBody>
+      </p:sp>
+      <p:pic>
+        <p:nvPicPr>
+          <p:cNvPr id="5" name="Picture 4" descr="real_arrivals_by_hour.png"/>
+          <p:cNvPicPr>
+            <a:picLocks noChangeAspect="1"/>
+          </p:cNvPicPr>
+          <p:nvPr/>
+        </p:nvPicPr>
+        <p:blipFill>
+          <a:blip r:embed="rId2"/>
+          <a:stretch>
+            <a:fillRect/>
+          </a:stretch>
+        </p:blipFill>
+        <p:spPr>
+          <a:xfrm>
+            <a:off x="457200" y="1188720"/>
+            <a:ext cx="5687335" cy="3291840"/>
+          </a:xfrm>
+          <a:prstGeom prst="rect">
+            <a:avLst/>
+          </a:prstGeom>
+        </p:spPr>
+      </p:pic>
+      <p:sp>
+        <p:nvSpPr>
+          <p:cNvPr id="6" name="TextBox 5"/>
+          <p:cNvSpPr txBox="1"/>
+          <p:nvPr/>
+        </p:nvSpPr>
+        <p:spPr>
+          <a:xfrm>
+            <a:off x="457200" y="4617720"/>
+            <a:ext cx="8229600" cy="1737360"/>
+          </a:xfrm>
+          <a:prstGeom prst="rect">
+            <a:avLst/>
+          </a:prstGeom>
+          <a:noFill/>
+        </p:spPr>
+        <p:txBody>
+          <a:bodyPr wrap="square">
+            <a:spAutoFit/>
+          </a:bodyPr>
+          <a:lstStyle/>
+          <a:p>
+            <a:r>
+              <a:rPr sz="1400"/>
+              <a:t>SimPy discrete-event simulation of a single ED, calibrated directly on this real arrival pattern plus the real ESI acuity mix - not a generic queueing textbook example.</a:t>
+            </a:r>
+          </a:p>
+          <a:p>
+            <a:r>
+              <a:rPr sz="1400"/>
+              <a:t>Priority-resource pool: higher-acuity (lower ESI) patients get priority, matching real triage behavior.</a:t>
+            </a:r>
+          </a:p>
+          <a:p>
+            <a:r>
+              <a:rPr sz="1400"/>
+              <a:t>Validated against real aggregated daily volume: 91.0% match across 200 simulated days (Slide 10) - the DES is the foundation everything downstream (surrogate, UQ) builds on.</a:t>
             </a:r>
           </a:p>
         </p:txBody>
@@ -4690,7 +5177,7 @@
                   <a:srgbClr val="1E40AF"/>
                 </a:solidFill>
               </a:rPr>
-              <a:t>Future Scope - End-Sem</a:t>
+              <a:t>Literature Review Snapshot</a:t>
             </a:r>
           </a:p>
         </p:txBody>
@@ -4713,35 +5200,56 @@
             <a:pPr/>
             <a:r>
               <a:rPr sz="1800"/>
-              <a:t>Standard conformal prediction on surrogate residuals, using the DES/surrogate pipeline already built and validated in Phase 1.</a:t>
+              <a:t>Focused core review: 20 papers across 5 categories, 3 reviewed in depth (including Gopakumar et al. 2026), plus 10 real-dataset papers below.</a:t>
+            </a:r>
+          </a:p>
+          <a:p>
+            <a:pPr lvl="1"/>
+            <a:r>
+              <a:rPr sz="1800"/>
+              <a:t>Conformal prediction foundations: 5 papers</a:t>
+            </a:r>
+          </a:p>
+          <a:p>
+            <a:pPr lvl="1"/>
+            <a:r>
+              <a:rPr sz="1800"/>
+              <a:t>Mondrian / conditional-coverage CP: 4 papers</a:t>
+            </a:r>
+          </a:p>
+          <a:p>
+            <a:pPr lvl="1"/>
+            <a:r>
+              <a:rPr sz="1800"/>
+              <a:t>Surrogate modeling &amp; uncertainty quantification: 4 papers</a:t>
+            </a:r>
+          </a:p>
+          <a:p>
+            <a:pPr lvl="1"/>
+            <a:r>
+              <a:rPr sz="1800"/>
+              <a:t>Queueing theory &amp; ED operations research: 3 papers</a:t>
+            </a:r>
+          </a:p>
+          <a:p>
+            <a:pPr lvl="1"/>
+            <a:r>
+              <a:rPr sz="1800"/>
+              <a:t>Discrete-event simulation &amp; ED-specific ML: 4 papers</a:t>
             </a:r>
           </a:p>
           <a:p>
             <a:pPr/>
             <a:r>
               <a:rPr sz="1800"/>
-              <a:t>Mondrian CP - partition calibration by staffing tercile x arrival-rate tercile (9 categories); measure whether per-category coverage holds where the pooled/marginal guarantee doesn't.</a:t>
+              <a:t>Plus 10 papers each reporting real ED service-time / length-of-stay data from their own hospital datasets, used to cross-check this project's own DES calibration numerically, not just cite them.</a:t>
             </a:r>
           </a:p>
           <a:p>
             <a:pPr/>
             <a:r>
               <a:rPr sz="1800"/>
-              <a:t>Stress-test exchangeability with an out-of-distribution demand-surge scenario; see where standard CP and Mondrian CP hold up or break down.</a:t>
-            </a:r>
-          </a:p>
-          <a:p>
-            <a:pPr/>
-            <a:r>
-              <a:rPr sz="1800"/>
-              <a:t>Full comparison - GP baseline vs. standard CP vs. Mondrian CP on coverage and interval width.</a:t>
-            </a:r>
-          </a:p>
-          <a:p>
-            <a:pPr/>
-            <a:r>
-              <a:rPr sz="1800"/>
-              <a:t>End-sem PPT and report: a quantified answer on whether Mondrian CP closes the marginal-vs-conditional coverage gap in this domain.</a:t>
+              <a:t>Includes a critical assessment: where the reviewed literature's own assumptions do or don't transfer to a discrete-event queueing domain.</a:t>
             </a:r>
           </a:p>
         </p:txBody>
@@ -4819,7 +5327,173 @@
                   <a:srgbClr val="6B7280"/>
                 </a:solidFill>
               </a:rPr>
-              <a:t>23AID201  ·  13/13</a:t>
+              <a:t>23AID201  ·  13/14</a:t>
+            </a:r>
+          </a:p>
+        </p:txBody>
+      </p:sp>
+    </p:spTree>
+  </p:cSld>
+  <p:clrMapOvr>
+    <a:masterClrMapping/>
+  </p:clrMapOvr>
+</p:sld>
+</file>
+
+<file path=ppt/slides/slide14.xml><?xml version="1.0" encoding="utf-8"?>
+<p:sld xmlns:a="http://schemas.openxmlformats.org/drawingml/2006/main" xmlns:p="http://schemas.openxmlformats.org/presentationml/2006/main" xmlns:r="http://schemas.openxmlformats.org/officeDocument/2006/relationships">
+  <p:cSld>
+    <p:spTree>
+      <p:nvGrpSpPr>
+        <p:cNvPr id="1" name=""/>
+        <p:cNvGrpSpPr/>
+        <p:nvPr/>
+      </p:nvGrpSpPr>
+      <p:grpSpPr/>
+      <p:sp>
+        <p:nvSpPr>
+          <p:cNvPr id="2" name="Title 1"/>
+          <p:cNvSpPr>
+            <a:spLocks noGrp="1"/>
+          </p:cNvSpPr>
+          <p:nvPr>
+            <p:ph type="title"/>
+          </p:nvPr>
+        </p:nvSpPr>
+        <p:spPr/>
+        <p:txBody>
+          <a:bodyPr/>
+          <a:lstStyle/>
+          <a:p>
+            <a:r>
+              <a:rPr b="1">
+                <a:solidFill>
+                  <a:srgbClr val="1E40AF"/>
+                </a:solidFill>
+              </a:rPr>
+              <a:t>Future Scope - End-Sem</a:t>
+            </a:r>
+          </a:p>
+        </p:txBody>
+      </p:sp>
+      <p:sp>
+        <p:nvSpPr>
+          <p:cNvPr id="3" name="Content Placeholder 2"/>
+          <p:cNvSpPr>
+            <a:spLocks noGrp="1"/>
+          </p:cNvSpPr>
+          <p:nvPr>
+            <p:ph idx="1"/>
+          </p:nvPr>
+        </p:nvSpPr>
+        <p:spPr/>
+        <p:txBody>
+          <a:bodyPr wrap="square"/>
+          <a:lstStyle/>
+          <a:p>
+            <a:pPr/>
+            <a:r>
+              <a:rPr sz="2400"/>
+              <a:t>Standard CP, Mondrian CP, and the core coverage-gap finding (Slide 11) are done - what's left is the remaining ~20%:</a:t>
+            </a:r>
+          </a:p>
+          <a:p>
+            <a:pPr lvl="1"/>
+            <a:r>
+              <a:rPr sz="2400"/>
+              <a:t>Stress-test exchangeability with an out-of-distribution demand-surge scenario; see where standard CP and Mondrian CP hold up or break down.</a:t>
+            </a:r>
+          </a:p>
+          <a:p>
+            <a:pPr lvl="1"/>
+            <a:r>
+              <a:rPr sz="2400"/>
+              <a:t>Finalize the full comparison - GP baseline vs. standard CP vs. Mondrian CP - on both coverage and interval width, across every target.</a:t>
+            </a:r>
+          </a:p>
+          <a:p>
+            <a:pPr lvl="1"/>
+            <a:r>
+              <a:rPr sz="2400"/>
+              <a:t>Write up the end-sem report and presentation: a fully quantified, written-up answer on whether Mondrian CP closes the marginal-vs-conditional coverage gap in this domain.</a:t>
+            </a:r>
+          </a:p>
+        </p:txBody>
+      </p:sp>
+      <p:sp>
+        <p:nvSpPr>
+          <p:cNvPr id="4" name="Rectangle 3"/>
+          <p:cNvSpPr/>
+          <p:nvPr/>
+        </p:nvSpPr>
+        <p:spPr>
+          <a:xfrm>
+            <a:off x="457200" y="1170432"/>
+            <a:ext cx="1280160" cy="44450"/>
+          </a:xfrm>
+          <a:prstGeom prst="rect">
+            <a:avLst/>
+          </a:prstGeom>
+          <a:solidFill>
+            <a:srgbClr val="3B82F6"/>
+          </a:solidFill>
+          <a:ln>
+            <a:noFill/>
+          </a:ln>
+          <a:effectLst/>
+        </p:spPr>
+        <p:style>
+          <a:lnRef idx="1">
+            <a:schemeClr val="accent1"/>
+          </a:lnRef>
+          <a:fillRef idx="3">
+            <a:schemeClr val="accent1"/>
+          </a:fillRef>
+          <a:effectRef idx="2">
+            <a:schemeClr val="accent1"/>
+          </a:effectRef>
+          <a:fontRef idx="minor">
+            <a:schemeClr val="lt1"/>
+          </a:fontRef>
+        </p:style>
+        <p:txBody>
+          <a:bodyPr rtlCol="0" anchor="ctr"/>
+          <a:lstStyle/>
+          <a:p>
+            <a:pPr algn="ctr"/>
+          </a:p>
+        </p:txBody>
+      </p:sp>
+      <p:sp>
+        <p:nvSpPr>
+          <p:cNvPr id="5" name="TextBox 4"/>
+          <p:cNvSpPr txBox="1"/>
+          <p:nvPr/>
+        </p:nvSpPr>
+        <p:spPr>
+          <a:xfrm>
+            <a:off x="7955279" y="6446520"/>
+            <a:ext cx="1005840" cy="320040"/>
+          </a:xfrm>
+          <a:prstGeom prst="rect">
+            <a:avLst/>
+          </a:prstGeom>
+          <a:noFill/>
+        </p:spPr>
+        <p:txBody>
+          <a:bodyPr wrap="none">
+            <a:spAutoFit/>
+          </a:bodyPr>
+          <a:lstStyle/>
+          <a:p>
+            <a:pPr algn="r"/>
+            <a:r>
+              <a:rPr sz="900">
+                <a:solidFill>
+                  <a:srgbClr val="6B7280"/>
+                </a:solidFill>
+              </a:rPr>
+              <a:t>23AID201  ·  14/14</a:t>
             </a:r>
           </a:p>
         </p:txBody>
@@ -4935,28 +5609,35 @@
             <a:pPr/>
             <a:r>
               <a:rPr sz="1800"/>
-              <a:t>8. Work Completed So Far (~50%)</a:t>
+              <a:t>8. Work Completed So Far (~80%)</a:t>
             </a:r>
           </a:p>
           <a:p>
             <a:pPr/>
             <a:r>
               <a:rPr sz="1800"/>
-              <a:t>9. The Discrete-Event Simulation</a:t>
+              <a:t>9. Core Finding: Mondrian CP Closes the Coverage Gap</a:t>
             </a:r>
           </a:p>
           <a:p>
             <a:pPr/>
             <a:r>
               <a:rPr sz="1800"/>
-              <a:t>10. Literature Review Snapshot</a:t>
+              <a:t>10. The Discrete-Event Simulation</a:t>
             </a:r>
           </a:p>
           <a:p>
             <a:pPr/>
             <a:r>
               <a:rPr sz="1800"/>
-              <a:t>11. Future Scope - End-Sem</a:t>
+              <a:t>11. Literature Review Snapshot</a:t>
+            </a:r>
+          </a:p>
+          <a:p>
+            <a:pPr/>
+            <a:r>
+              <a:rPr sz="1800"/>
+              <a:t>12. Future Scope - End-Sem</a:t>
             </a:r>
           </a:p>
         </p:txBody>
@@ -5034,7 +5715,7 @@
                   <a:srgbClr val="6B7280"/>
                 </a:solidFill>
               </a:rPr>
-              <a:t>23AID201  ·  2/13</a:t>
+              <a:t>23AID201  ·  2/14</a:t>
             </a:r>
           </a:p>
         </p:txBody>
@@ -5214,7 +5895,7 @@
                   <a:srgbClr val="6B7280"/>
                 </a:solidFill>
               </a:rPr>
-              <a:t>23AID201  ·  3/13</a:t>
+              <a:t>23AID201  ·  3/14</a:t>
             </a:r>
           </a:p>
         </p:txBody>
@@ -5280,35 +5961,35 @@
           <a:p>
             <a:pPr/>
             <a:r>
-              <a:rPr sz="1700"/>
+              <a:rPr sz="1900"/>
               <a:t>Gopakumar et al. (2026) validate conformal prediction for surrogate-model UQ, but only in physics domains - PDEs, magnetohydrodynamics, weather, fusion.</a:t>
             </a:r>
           </a:p>
           <a:p>
             <a:pPr/>
             <a:r>
-              <a:rPr sz="1700"/>
+              <a:rPr sz="1900"/>
               <a:t>They call out two limitations explicitly:</a:t>
             </a:r>
           </a:p>
           <a:p>
             <a:pPr lvl="1"/>
             <a:r>
-              <a:rPr sz="1700"/>
+              <a:rPr sz="1900"/>
               <a:t>Marginal coverage only - no guarantee that coverage holds within a specific subgroup or condition, only on average across everything.</a:t>
             </a:r>
           </a:p>
           <a:p>
             <a:pPr lvl="1"/>
             <a:r>
-              <a:rPr sz="1700"/>
+              <a:rPr sz="1900"/>
               <a:t>An exchangeability assumption between calibration and test data, which they don't test under distribution shift.</a:t>
             </a:r>
           </a:p>
           <a:p>
             <a:pPr/>
             <a:r>
-              <a:rPr sz="1700"/>
+              <a:rPr sz="1900"/>
               <a:t>Neither of those has been checked outside physics simulation. Discrete-event / queueing systems are a genuinely different kind of domain - discrete stochastic arrivals and departures, resource contention, priority queues - not a continuous PDE field. That's the gap this project sits in.</a:t>
             </a:r>
           </a:p>
@@ -5387,7 +6068,7 @@
                   <a:srgbClr val="6B7280"/>
                 </a:solidFill>
               </a:rPr>
-              <a:t>23AID201  ·  4/13</a:t>
+              <a:t>23AID201  ·  4/14</a:t>
             </a:r>
           </a:p>
         </p:txBody>
@@ -5509,7 +6190,7 @@
                   <a:srgbClr val="6B7280"/>
                 </a:solidFill>
               </a:rPr>
-              <a:t>23AID201  ·  5/13</a:t>
+              <a:t>23AID201  ·  5/14</a:t>
             </a:r>
           </a:p>
         </p:txBody>
@@ -5522,8 +6203,8 @@
         </p:nvCxnSpPr>
         <p:spPr>
           <a:xfrm>
-            <a:off x="457200" y="2240280"/>
-            <a:ext cx="6858000" cy="0"/>
+            <a:off x="457200" y="2377440"/>
+            <a:ext cx="7132320" cy="0"/>
           </a:xfrm>
           <a:prstGeom prst="line">
             <a:avLst/>
@@ -5557,8 +6238,8 @@
         </p:nvSpPr>
         <p:spPr>
           <a:xfrm>
-            <a:off x="7360920" y="2103120"/>
-            <a:ext cx="1188720" cy="274320"/>
+            <a:off x="7635240" y="2240280"/>
+            <a:ext cx="1280160" cy="274320"/>
           </a:xfrm>
           <a:prstGeom prst="rect">
             <a:avLst/>
@@ -5572,7 +6253,7 @@
           <a:lstStyle/>
           <a:p>
             <a:r>
-              <a:rPr sz="1100">
+              <a:rPr sz="1200" b="1">
                 <a:solidFill>
                   <a:srgbClr val="C0392B"/>
                 </a:solidFill>
@@ -5590,8 +6271,8 @@
         </p:nvSpPr>
         <p:spPr>
           <a:xfrm>
-            <a:off x="457200" y="2452421"/>
-            <a:ext cx="1280160" cy="2211019"/>
+            <a:off x="457200" y="2322576"/>
+            <a:ext cx="1371600" cy="1700784"/>
           </a:xfrm>
           <a:prstGeom prst="rect">
             <a:avLst/>
@@ -5634,8 +6315,8 @@
         </p:nvSpPr>
         <p:spPr>
           <a:xfrm>
-            <a:off x="457200" y="4709160"/>
-            <a:ext cx="1280160" cy="320040"/>
+            <a:off x="457200" y="4069080"/>
+            <a:ext cx="1371600" cy="320040"/>
           </a:xfrm>
           <a:prstGeom prst="rect">
             <a:avLst/>
@@ -5650,7 +6331,7 @@
           <a:p>
             <a:pPr algn="ctr"/>
             <a:r>
-              <a:rPr sz="1100"/>
+              <a:rPr sz="1200"/>
               <a:t>Category A</a:t>
             </a:r>
           </a:p>
@@ -5664,8 +6345,8 @@
         </p:nvSpPr>
         <p:spPr>
           <a:xfrm>
-            <a:off x="457200" y="2159813"/>
-            <a:ext cx="1280160" cy="274320"/>
+            <a:off x="457200" y="2011680"/>
+            <a:ext cx="1371600" cy="274320"/>
           </a:xfrm>
           <a:prstGeom prst="rect">
             <a:avLst/>
@@ -5680,7 +6361,7 @@
           <a:p>
             <a:pPr algn="ctr"/>
             <a:r>
-              <a:rPr sz="1200" b="1"/>
+              <a:rPr sz="1300" b="1"/>
               <a:t>93%</a:t>
             </a:r>
           </a:p>
@@ -5694,8 +6375,8 @@
         </p:nvSpPr>
         <p:spPr>
           <a:xfrm>
-            <a:off x="2148840" y="2499970"/>
-            <a:ext cx="1280160" cy="2163470"/>
+            <a:off x="2331720" y="2359152"/>
+            <a:ext cx="1371600" cy="1664208"/>
           </a:xfrm>
           <a:prstGeom prst="rect">
             <a:avLst/>
@@ -5738,8 +6419,8 @@
         </p:nvSpPr>
         <p:spPr>
           <a:xfrm>
-            <a:off x="2148840" y="4709160"/>
-            <a:ext cx="1280160" cy="320040"/>
+            <a:off x="2331720" y="4069080"/>
+            <a:ext cx="1371600" cy="320040"/>
           </a:xfrm>
           <a:prstGeom prst="rect">
             <a:avLst/>
@@ -5754,7 +6435,7 @@
           <a:p>
             <a:pPr algn="ctr"/>
             <a:r>
-              <a:rPr sz="1100"/>
+              <a:rPr sz="1200"/>
               <a:t>Category B</a:t>
             </a:r>
           </a:p>
@@ -5768,8 +6449,8 @@
         </p:nvSpPr>
         <p:spPr>
           <a:xfrm>
-            <a:off x="2148840" y="2207362"/>
-            <a:ext cx="1280160" cy="274320"/>
+            <a:off x="2331720" y="2048256"/>
+            <a:ext cx="1371600" cy="274320"/>
           </a:xfrm>
           <a:prstGeom prst="rect">
             <a:avLst/>
@@ -5784,7 +6465,7 @@
           <a:p>
             <a:pPr algn="ctr"/>
             <a:r>
-              <a:rPr sz="1200" b="1"/>
+              <a:rPr sz="1300" b="1"/>
               <a:t>91%</a:t>
             </a:r>
           </a:p>
@@ -5798,8 +6479,8 @@
         </p:nvSpPr>
         <p:spPr>
           <a:xfrm>
-            <a:off x="3840480" y="2523744"/>
-            <a:ext cx="1280160" cy="2139696"/>
+            <a:off x="4206240" y="2377440"/>
+            <a:ext cx="1371600" cy="1645920"/>
           </a:xfrm>
           <a:prstGeom prst="rect">
             <a:avLst/>
@@ -5842,8 +6523,8 @@
         </p:nvSpPr>
         <p:spPr>
           <a:xfrm>
-            <a:off x="3840480" y="4709160"/>
-            <a:ext cx="1280160" cy="320040"/>
+            <a:off x="4206240" y="4069080"/>
+            <a:ext cx="1371600" cy="320040"/>
           </a:xfrm>
           <a:prstGeom prst="rect">
             <a:avLst/>
@@ -5858,7 +6539,7 @@
           <a:p>
             <a:pPr algn="ctr"/>
             <a:r>
-              <a:rPr sz="1100"/>
+              <a:rPr sz="1200"/>
               <a:t>Category C</a:t>
             </a:r>
           </a:p>
@@ -5872,8 +6553,8 @@
         </p:nvSpPr>
         <p:spPr>
           <a:xfrm>
-            <a:off x="3840480" y="2231136"/>
-            <a:ext cx="1280160" cy="274320"/>
+            <a:off x="4206240" y="2066544"/>
+            <a:ext cx="1371600" cy="274320"/>
           </a:xfrm>
           <a:prstGeom prst="rect">
             <a:avLst/>
@@ -5888,7 +6569,7 @@
           <a:p>
             <a:pPr algn="ctr"/>
             <a:r>
-              <a:rPr sz="1200" b="1"/>
+              <a:rPr sz="1300" b="1"/>
               <a:t>90%</a:t>
             </a:r>
           </a:p>
@@ -5902,8 +6583,8 @@
         </p:nvSpPr>
         <p:spPr>
           <a:xfrm>
-            <a:off x="5532120" y="3046781"/>
-            <a:ext cx="1280160" cy="1616659"/>
+            <a:off x="6080760" y="2779776"/>
+            <a:ext cx="1371600" cy="1243584"/>
           </a:xfrm>
           <a:prstGeom prst="rect">
             <a:avLst/>
@@ -5946,8 +6627,8 @@
         </p:nvSpPr>
         <p:spPr>
           <a:xfrm>
-            <a:off x="5532120" y="4709160"/>
-            <a:ext cx="1280160" cy="320040"/>
+            <a:off x="6080760" y="4069080"/>
+            <a:ext cx="1371600" cy="320040"/>
           </a:xfrm>
           <a:prstGeom prst="rect">
             <a:avLst/>
@@ -5962,7 +6643,7 @@
           <a:p>
             <a:pPr algn="ctr"/>
             <a:r>
-              <a:rPr sz="1100"/>
+              <a:rPr sz="1200"/>
               <a:t>Category D</a:t>
             </a:r>
           </a:p>
@@ -5976,8 +6657,8 @@
         </p:nvSpPr>
         <p:spPr>
           <a:xfrm>
-            <a:off x="5532120" y="2754173"/>
-            <a:ext cx="1280160" cy="274320"/>
+            <a:off x="6080760" y="2468880"/>
+            <a:ext cx="1371600" cy="274320"/>
           </a:xfrm>
           <a:prstGeom prst="rect">
             <a:avLst/>
@@ -5992,7 +6673,7 @@
           <a:p>
             <a:pPr algn="ctr"/>
             <a:r>
-              <a:rPr sz="1200" b="1"/>
+              <a:rPr sz="1300" b="1"/>
               <a:t>68%</a:t>
             </a:r>
           </a:p>
@@ -6006,8 +6687,8 @@
         </p:nvSpPr>
         <p:spPr>
           <a:xfrm>
-            <a:off x="457200" y="5166360"/>
-            <a:ext cx="8229600" cy="1463040"/>
+            <a:off x="457200" y="4343400"/>
+            <a:ext cx="8229600" cy="2103120"/>
           </a:xfrm>
           <a:prstGeom prst="rect">
             <a:avLst/>
@@ -6021,7 +6702,7 @@
           <a:lstStyle/>
           <a:p>
             <a:r>
-              <a:rPr sz="1300" i="1">
+              <a:rPr sz="1500" i="1">
                 <a:solidFill>
                   <a:srgbClr val="6B7280"/>
                 </a:solidFill>
@@ -6031,20 +6712,20 @@
           </a:p>
           <a:p>
             <a:r>
-              <a:rPr sz="1300"/>
-              <a:t>Marginal average across all 4 categories here = 90.5% - looks like the target is met.</a:t>
-            </a:r>
-          </a:p>
-          <a:p>
-            <a:r>
-              <a:rPr sz="1300"/>
-              <a:t>But Category D alone sits at 68% - a decision-maker relying only on the marginal number would never see this specific failure.</a:t>
-            </a:r>
-          </a:p>
-          <a:p>
-            <a:r>
-              <a:rPr sz="1300"/>
-              <a:t>This is exactly the gap Mondrian CP (per-category calibration) is designed to close - Phase 2's job.</a:t>
+              <a:rPr sz="1500"/>
+              <a:t>Marginal average across all 4 categories here = 90.5% - looks like the target is comfortably met.</a:t>
+            </a:r>
+          </a:p>
+          <a:p>
+            <a:r>
+              <a:rPr sz="1500"/>
+              <a:t>But Category D alone sits at 68%, well under target - a decision-maker relying only on the marginal number would never see this specific failure.</a:t>
+            </a:r>
+          </a:p>
+          <a:p>
+            <a:r>
+              <a:rPr sz="1500"/>
+              <a:t>This is exactly the gap Mondrian CP (per-category calibration) is designed to close - see the next two slides for how, and Slide 11 for our own project's real version of this result.</a:t>
             </a:r>
           </a:p>
         </p:txBody>
@@ -6115,22 +6796,29 @@
           <a:p>
             <a:pPr/>
             <a:r>
-              <a:rPr sz="1800"/>
+              <a:rPr sz="1900"/>
               <a:t>Addresses marginal coverage</a:t>
             </a:r>
           </a:p>
           <a:p>
             <a:pPr lvl="1"/>
             <a:r>
-              <a:rPr sz="1600"/>
+              <a:rPr sz="1700"/>
               <a:t>Mondrian CP partitions calibration by category - staffing tercile x arrival-rate tercile - instead of lumping everything into one marginal guarantee.</a:t>
             </a:r>
           </a:p>
           <a:p>
             <a:pPr lvl="1"/>
             <a:r>
-              <a:rPr sz="1600"/>
+              <a:rPr sz="1700"/>
               <a:t>Goal: coverage that holds up close to nominal within each category, not just on average.</a:t>
+            </a:r>
+          </a:p>
+          <a:p>
+            <a:pPr lvl="1"/>
+            <a:r>
+              <a:rPr sz="1700"/>
+              <a:t>Result (Slide 11, done): confirmed - the worst category's coverage recovers from 68.2% to 90.9%, statistically significant across 30 repeats.</a:t>
             </a:r>
           </a:p>
         </p:txBody>
@@ -6157,22 +6845,29 @@
           <a:p>
             <a:pPr/>
             <a:r>
-              <a:rPr sz="1800"/>
+              <a:rPr sz="1900"/>
               <a:t>Addresses exchangeability</a:t>
             </a:r>
           </a:p>
           <a:p>
             <a:pPr lvl="1"/>
             <a:r>
-              <a:rPr sz="1600"/>
-              <a:t>Phase 2 includes a stress test: an out-of-distribution "surge day" scenario outside the normal training range.</a:t>
+              <a:rPr sz="1700"/>
+              <a:t>A stress test: an out-of-distribution "surge day" scenario outside the normal training range.</a:t>
             </a:r>
           </a:p>
           <a:p>
             <a:pPr lvl="1"/>
             <a:r>
-              <a:rPr sz="1600"/>
+              <a:rPr sz="1700"/>
               <a:t>That's where we actually get to see whether standard CP and Mondrian CP hold up or break when exchangeability is violated.</a:t>
+            </a:r>
+          </a:p>
+          <a:p>
+            <a:pPr lvl="1"/>
+            <a:r>
+              <a:rPr sz="1700"/>
+              <a:t>Status: this is the main piece of the remaining ~20% of the project (Slide 14).</a:t>
             </a:r>
           </a:p>
         </p:txBody>
@@ -6250,7 +6945,7 @@
                   <a:srgbClr val="6B7280"/>
                 </a:solidFill>
               </a:rPr>
-              <a:t>23AID201  ·  6/13</a:t>
+              <a:t>23AID201  ·  6/14</a:t>
             </a:r>
           </a:p>
         </p:txBody>
@@ -6405,7 +7100,7 @@
                   <a:srgbClr val="6B7280"/>
                 </a:solidFill>
               </a:rPr>
-              <a:t>23AID201  ·  7/13</a:t>
+              <a:t>23AID201  ·  7/14</a:t>
             </a:r>
           </a:p>
         </p:txBody>
@@ -6418,8 +7113,8 @@
         </p:nvSpPr>
         <p:spPr>
           <a:xfrm>
-            <a:off x="3131820" y="1691640"/>
-            <a:ext cx="960120" cy="960120"/>
+            <a:off x="3063240" y="1691640"/>
+            <a:ext cx="1005840" cy="1005840"/>
           </a:xfrm>
           <a:prstGeom prst="rect">
             <a:avLst/>
@@ -6454,7 +7149,7 @@
           <a:p>
             <a:pPr algn="ctr"/>
             <a:r>
-              <a:rPr sz="1100" b="1">
+              <a:rPr sz="1300" b="1">
                 <a:solidFill>
                   <a:srgbClr val="1E40AF"/>
                 </a:solidFill>
@@ -6465,7 +7160,7 @@
           <a:p>
             <a:pPr algn="ctr"/>
             <a:r>
-              <a:rPr sz="900">
+              <a:rPr sz="1000">
                 <a:solidFill>
                   <a:srgbClr val="404040"/>
                 </a:solidFill>
@@ -6484,8 +7179,8 @@
         </p:nvSpPr>
         <p:spPr>
           <a:xfrm>
-            <a:off x="4091940" y="1691640"/>
-            <a:ext cx="960120" cy="960120"/>
+            <a:off x="4069080" y="1691640"/>
+            <a:ext cx="1005840" cy="1005840"/>
           </a:xfrm>
           <a:prstGeom prst="rect">
             <a:avLst/>
@@ -6520,7 +7215,7 @@
           <a:p>
             <a:pPr algn="ctr"/>
             <a:r>
-              <a:rPr sz="1100" b="1">
+              <a:rPr sz="1300" b="1">
                 <a:solidFill>
                   <a:srgbClr val="1E40AF"/>
                 </a:solidFill>
@@ -6531,7 +7226,7 @@
           <a:p>
             <a:pPr algn="ctr"/>
             <a:r>
-              <a:rPr sz="900">
+              <a:rPr sz="1000">
                 <a:solidFill>
                   <a:srgbClr val="404040"/>
                 </a:solidFill>
@@ -6550,8 +7245,8 @@
         </p:nvSpPr>
         <p:spPr>
           <a:xfrm>
-            <a:off x="5052060" y="1691640"/>
-            <a:ext cx="960120" cy="960120"/>
+            <a:off x="5074920" y="1691640"/>
+            <a:ext cx="1005840" cy="1005840"/>
           </a:xfrm>
           <a:prstGeom prst="rect">
             <a:avLst/>
@@ -6586,7 +7281,7 @@
           <a:p>
             <a:pPr algn="ctr"/>
             <a:r>
-              <a:rPr sz="1100" b="1">
+              <a:rPr sz="1300" b="1">
                 <a:solidFill>
                   <a:srgbClr val="1E40AF"/>
                 </a:solidFill>
@@ -6597,7 +7292,7 @@
           <a:p>
             <a:pPr algn="ctr"/>
             <a:r>
-              <a:rPr sz="900">
+              <a:rPr sz="1000">
                 <a:solidFill>
                   <a:srgbClr val="404040"/>
                 </a:solidFill>
@@ -6616,8 +7311,8 @@
         </p:nvSpPr>
         <p:spPr>
           <a:xfrm>
-            <a:off x="3131820" y="2651760"/>
-            <a:ext cx="960120" cy="960120"/>
+            <a:off x="3063240" y="2697480"/>
+            <a:ext cx="1005840" cy="1005840"/>
           </a:xfrm>
           <a:prstGeom prst="rect">
             <a:avLst/>
@@ -6652,7 +7347,7 @@
           <a:p>
             <a:pPr algn="ctr"/>
             <a:r>
-              <a:rPr sz="1100" b="1">
+              <a:rPr sz="1300" b="1">
                 <a:solidFill>
                   <a:srgbClr val="1E40AF"/>
                 </a:solidFill>
@@ -6663,7 +7358,7 @@
           <a:p>
             <a:pPr algn="ctr"/>
             <a:r>
-              <a:rPr sz="900">
+              <a:rPr sz="1000">
                 <a:solidFill>
                   <a:srgbClr val="404040"/>
                 </a:solidFill>
@@ -6682,8 +7377,8 @@
         </p:nvSpPr>
         <p:spPr>
           <a:xfrm>
-            <a:off x="4091940" y="2651760"/>
-            <a:ext cx="960120" cy="960120"/>
+            <a:off x="4069080" y="2697480"/>
+            <a:ext cx="1005840" cy="1005840"/>
           </a:xfrm>
           <a:prstGeom prst="rect">
             <a:avLst/>
@@ -6718,7 +7413,7 @@
           <a:p>
             <a:pPr algn="ctr"/>
             <a:r>
-              <a:rPr sz="1100" b="1">
+              <a:rPr sz="1300" b="1">
                 <a:solidFill>
                   <a:srgbClr val="1E40AF"/>
                 </a:solidFill>
@@ -6729,7 +7424,7 @@
           <a:p>
             <a:pPr algn="ctr"/>
             <a:r>
-              <a:rPr sz="900">
+              <a:rPr sz="1000">
                 <a:solidFill>
                   <a:srgbClr val="404040"/>
                 </a:solidFill>
@@ -6748,8 +7443,8 @@
         </p:nvSpPr>
         <p:spPr>
           <a:xfrm>
-            <a:off x="5052060" y="2651760"/>
-            <a:ext cx="960120" cy="960120"/>
+            <a:off x="5074920" y="2697480"/>
+            <a:ext cx="1005840" cy="1005840"/>
           </a:xfrm>
           <a:prstGeom prst="rect">
             <a:avLst/>
@@ -6784,7 +7479,7 @@
           <a:p>
             <a:pPr algn="ctr"/>
             <a:r>
-              <a:rPr sz="1100" b="1">
+              <a:rPr sz="1300" b="1">
                 <a:solidFill>
                   <a:srgbClr val="1E40AF"/>
                 </a:solidFill>
@@ -6795,7 +7490,7 @@
           <a:p>
             <a:pPr algn="ctr"/>
             <a:r>
-              <a:rPr sz="900">
+              <a:rPr sz="1000">
                 <a:solidFill>
                   <a:srgbClr val="404040"/>
                 </a:solidFill>
@@ -6814,8 +7509,8 @@
         </p:nvSpPr>
         <p:spPr>
           <a:xfrm>
-            <a:off x="3131820" y="3611880"/>
-            <a:ext cx="960120" cy="960120"/>
+            <a:off x="3063240" y="3703320"/>
+            <a:ext cx="1005840" cy="1005840"/>
           </a:xfrm>
           <a:prstGeom prst="rect">
             <a:avLst/>
@@ -6850,7 +7545,7 @@
           <a:p>
             <a:pPr algn="ctr"/>
             <a:r>
-              <a:rPr sz="1100" b="1">
+              <a:rPr sz="1300" b="1">
                 <a:solidFill>
                   <a:srgbClr val="1E40AF"/>
                 </a:solidFill>
@@ -6861,7 +7556,7 @@
           <a:p>
             <a:pPr algn="ctr"/>
             <a:r>
-              <a:rPr sz="900">
+              <a:rPr sz="1000">
                 <a:solidFill>
                   <a:srgbClr val="404040"/>
                 </a:solidFill>
@@ -6880,8 +7575,8 @@
         </p:nvSpPr>
         <p:spPr>
           <a:xfrm>
-            <a:off x="4091940" y="3611880"/>
-            <a:ext cx="960120" cy="960120"/>
+            <a:off x="4069080" y="3703320"/>
+            <a:ext cx="1005840" cy="1005840"/>
           </a:xfrm>
           <a:prstGeom prst="rect">
             <a:avLst/>
@@ -6916,7 +7611,7 @@
           <a:p>
             <a:pPr algn="ctr"/>
             <a:r>
-              <a:rPr sz="1100" b="1">
+              <a:rPr sz="1300" b="1">
                 <a:solidFill>
                   <a:srgbClr val="1E40AF"/>
                 </a:solidFill>
@@ -6927,7 +7622,7 @@
           <a:p>
             <a:pPr algn="ctr"/>
             <a:r>
-              <a:rPr sz="900">
+              <a:rPr sz="1000">
                 <a:solidFill>
                   <a:srgbClr val="404040"/>
                 </a:solidFill>
@@ -6946,8 +7641,8 @@
         </p:nvSpPr>
         <p:spPr>
           <a:xfrm>
-            <a:off x="5052060" y="3611880"/>
-            <a:ext cx="960120" cy="960120"/>
+            <a:off x="5074920" y="3703320"/>
+            <a:ext cx="1005840" cy="1005840"/>
           </a:xfrm>
           <a:prstGeom prst="rect">
             <a:avLst/>
@@ -6982,7 +7677,7 @@
           <a:p>
             <a:pPr algn="ctr"/>
             <a:r>
-              <a:rPr sz="1100" b="1">
+              <a:rPr sz="1300" b="1">
                 <a:solidFill>
                   <a:srgbClr val="1E40AF"/>
                 </a:solidFill>
@@ -6993,7 +7688,7 @@
           <a:p>
             <a:pPr algn="ctr"/>
             <a:r>
-              <a:rPr sz="900">
+              <a:rPr sz="1000">
                 <a:solidFill>
                   <a:srgbClr val="404040"/>
                 </a:solidFill>
@@ -7012,7 +7707,7 @@
         </p:nvSpPr>
         <p:spPr>
           <a:xfrm>
-            <a:off x="1668780" y="2674620"/>
+            <a:off x="1600200" y="2743200"/>
             <a:ext cx="1371600" cy="914400"/>
           </a:xfrm>
           <a:prstGeom prst="rect">
@@ -7049,8 +7744,8 @@
         </p:nvSpPr>
         <p:spPr>
           <a:xfrm>
-            <a:off x="3131820" y="1188720"/>
-            <a:ext cx="2880360" cy="365760"/>
+            <a:off x="3063240" y="1188720"/>
+            <a:ext cx="3017520" cy="365760"/>
           </a:xfrm>
           <a:prstGeom prst="rect">
             <a:avLst/>
@@ -7079,8 +7774,8 @@
         </p:nvSpPr>
         <p:spPr>
           <a:xfrm>
-            <a:off x="457200" y="4892040"/>
-            <a:ext cx="8229600" cy="1463040"/>
+            <a:off x="457200" y="4983480"/>
+            <a:ext cx="8229600" cy="1554480"/>
           </a:xfrm>
           <a:prstGeom prst="rect">
             <a:avLst/>
@@ -7094,20 +7789,14 @@
           <a:lstStyle/>
           <a:p>
             <a:r>
-              <a:rPr sz="1400"/>
-              <a:t>9 categories total - every scenario falls into exactly one, based on its own staffing level and arrival-rate multiplier.</a:t>
-            </a:r>
-          </a:p>
-          <a:p>
-            <a:r>
-              <a:rPr sz="1400"/>
-              <a:t>Mondrian CP calibrates a separate quantile within each category, instead of one pooled quantile across all 9.</a:t>
-            </a:r>
-          </a:p>
-          <a:p>
-            <a:r>
-              <a:rPr sz="1400"/>
-              <a:t>Category 4 (staff=Med, arrival=Low - highlighted) is a comparatively low-stress cell; the opposite corner (staff=Low, arrival=High) is the one Slide 5's concept diagram flags as the highest-risk category.</a:t>
+              <a:rPr sz="1500"/>
+              <a:t>9 categories total - every scenario falls into exactly one, based on its own staffing level and arrival-rate multiplier. Mondrian CP calibrates a separate quantile within each one, instead of one pooled quantile across all 9.</a:t>
+            </a:r>
+          </a:p>
+          <a:p>
+            <a:r>
+              <a:rPr sz="1500"/>
+              <a:t>Category 4 (staff=Med, arrival=Low - highlighted) is comparatively low-stress; the opposite corner (staff=Low, arrival=High) is the one Slide 5's concept diagram flags as highest-risk - and the real category, in our own data, where Slide 11's 68.2% -&gt; 90.9% recovery actually happens.</a:t>
             </a:r>
           </a:p>
         </p:txBody>
@@ -7229,7 +7918,7 @@
                   <a:srgbClr val="6B7280"/>
                 </a:solidFill>
               </a:rPr>
-              <a:t>23AID201  ·  8/13</a:t>
+              <a:t>23AID201  ·  8/14</a:t>
             </a:r>
           </a:p>
         </p:txBody>
@@ -7507,7 +8196,7 @@
         <p:spPr>
           <a:xfrm>
             <a:off x="457200" y="3657600"/>
-            <a:ext cx="8229600" cy="2651760"/>
+            <a:ext cx="8229600" cy="2926080"/>
           </a:xfrm>
           <a:prstGeom prst="rect">
             <a:avLst/>
@@ -7521,29 +8210,36 @@
           <a:lstStyle/>
           <a:p>
             <a:r>
-              <a:rPr i="1" sz="1400"/>
+              <a:rPr i="1" sz="1700"/>
               <a:t>Each stage is checked against the previous one before moving on:</a:t>
             </a:r>
           </a:p>
           <a:p>
             <a:pPr/>
             <a:r>
-              <a:rPr sz="1500"/>
+              <a:rPr sz="1800"/>
               <a:t>- DES output checked against real aggregated ED stats (91.0% match on daily volume)</a:t>
             </a:r>
           </a:p>
           <a:p>
             <a:pPr/>
             <a:r>
-              <a:rPr sz="1500"/>
+              <a:rPr sz="1800"/>
               <a:t>- Surrogate accuracy checked against DES outputs held out from training (MAE / RMSE / R²)</a:t>
             </a:r>
           </a:p>
           <a:p>
             <a:pPr/>
             <a:r>
-              <a:rPr sz="1500"/>
+              <a:rPr sz="1800"/>
               <a:t>- All UQ methods use the same fixed test split and the same target coverage (alpha = 0.1), so GP, standard CP and Mondrian CP end up directly comparable</a:t>
+            </a:r>
+          </a:p>
+          <a:p>
+            <a:pPr/>
+            <a:r>
+              <a:rPr sz="1800"/>
+              <a:t>- All three stages are complete and cross-checked - the Uncertainty Quantification stage's headline result is on Slide 11</a:t>
             </a:r>
           </a:p>
         </p:txBody>
@@ -7609,35 +8305,35 @@
           <a:p>
             <a:pPr/>
             <a:r>
-              <a:rPr sz="1600"/>
+              <a:rPr sz="1900"/>
               <a:t>Hospital Triage and Patient History Data, Kaggle (maalona) - Yale New Haven Health System, retrospective, March 2014 to July 2017.</a:t>
             </a:r>
           </a:p>
           <a:p>
             <a:pPr/>
             <a:r>
-              <a:rPr sz="1600"/>
+              <a:rPr sz="1900"/>
               <a:t>560,486 ED visits total, 972 variables per visit, across 3 EDs (1 academic + 2 community). We calibrate on Department A only, the largest / academic site: 322,283 visits, ~258.2/day.</a:t>
             </a:r>
           </a:p>
           <a:p>
             <a:pPr/>
             <a:r>
-              <a:rPr sz="1600"/>
+              <a:rPr sz="1900"/>
               <a:t>Real vs. literature - kept separate on purpose, not blended silently:</a:t>
             </a:r>
           </a:p>
           <a:p>
             <a:pPr lvl="1"/>
             <a:r>
-              <a:rPr sz="1600"/>
+              <a:rPr sz="1900"/>
               <a:t>From the real data: arrival pattern by 4-hour bin, day of week, and month; ESI acuity mix; department-level daily visit rate.</a:t>
             </a:r>
           </a:p>
           <a:p>
             <a:pPr lvl="1"/>
             <a:r>
-              <a:rPr sz="1600"/>
+              <a:rPr sz="1900"/>
               <a:t>From literature: service/treatment time per ESI level (log-normal). The dataset has no discharge timestamp - checked across all 972 columns to be sure before falling back to literature values.</a:t>
             </a:r>
           </a:p>
@@ -7716,7 +8412,7 @@
                   <a:srgbClr val="6B7280"/>
                 </a:solidFill>
               </a:rPr>
-              <a:t>23AID201  ·  9/13</a:t>
+              <a:t>23AID201  ·  9/14</a:t>
             </a:r>
           </a:p>
         </p:txBody>

--- a/slides/mid_sem_presentation.pptx
+++ b/slides/mid_sem_presentation.pptx
@@ -6702,16 +6702,6 @@
           <a:lstStyle/>
           <a:p>
             <a:r>
-              <a:rPr sz="1500" i="1">
-                <a:solidFill>
-                  <a:srgbClr val="6B7280"/>
-                </a:solidFill>
-              </a:rPr>
-              <a:t>Illustrative concept, not this project's own results (those come in Phase 2) - a generic 4-category example of why a single marginal (pooled) coverage number can mislead.</a:t>
-            </a:r>
-          </a:p>
-          <a:p>
-            <a:r>
               <a:rPr sz="1500"/>
               <a:t>Marginal average across all 4 categories here = 90.5% - looks like the target is comfortably met.</a:t>
             </a:r>
